--- a/agent-harness-diagram.pptx
+++ b/agent-harness-diagram.pptx
@@ -508,7 +508,7 @@
           <a:p>
             <a:r>
               <a:rPr lang="en-US" dirty="0"/>
-              <a:t>Agent harness architecture: the harness orchestrates the run, routing between the model, tools and MCP servers, a sandbox and approval gates, then returns a final response with a full trace.</a:t>
+              <a:t>A user request enters the agent harness, which orchestrates the run across the model, peer agents over A2A, tools and MCP servers, a sandbox and approval gates, and returns the final response together with a full trace of what was done, used and decided.</a:t>
             </a:r>
             <a:endParaRPr lang="en-US" dirty="0"/>
           </a:p>
@@ -596,7 +596,7 @@
           <a:p>
             <a:r>
               <a:rPr lang="en-US" dirty="0"/>
-              <a:t>Same architecture with Kong AI Gateway inserted between the harness and every downstream capability. The harness no longer talks to models, tools, the sandbox or approval services directly: all traffic flows through the gateway, which handles authentication and credential brokering, rate limits and cost controls, prompt and PII guardrails, semantic caching and model routing, and emits the metrics and logs that feed the trace.</a:t>
+              <a:t>Same flow with Kong AI Gateway inserted between the harness and every downstream capability. The user request still enters and the response still leaves via the harness, but the harness no longer talks to models, agents, tools, the sandbox or approval services directly: all of that traffic passes through the gateway, which handles A2A and MCP proxying, authentication and credential brokering, rate limits and cost controls, prompt and PII guardrails, caching and routing, failover, and the telemetry that feeds the trace.</a:t>
             </a:r>
             <a:endParaRPr lang="en-US" dirty="0"/>
           </a:p>
@@ -1409,9 +1409,61 @@
           <a:chExt cx="0" cy="0"/>
         </a:xfrm>
       </p:grpSpPr>
+      <p:sp>
+        <p:nvSpPr>
+          <p:cNvPr id="2" name="Shape 0"/>
+          <p:cNvSpPr/>
+          <p:nvPr/>
+        </p:nvSpPr>
+        <p:spPr>
+          <a:xfrm>
+            <a:off x="411480" y="1280160"/>
+            <a:ext cx="2651760" cy="1371600"/>
+          </a:xfrm>
+          <a:prstGeom prst="roundRect">
+            <a:avLst>
+              <a:gd name="adj" fmla="val 8000"/>
+            </a:avLst>
+          </a:prstGeom>
+          <a:solidFill>
+            <a:srgbClr val="FFFFFF"/>
+          </a:solidFill>
+          <a:ln w="15875">
+            <a:solidFill>
+              <a:srgbClr val="C7D2E8"/>
+            </a:solidFill>
+            <a:prstDash val="solid"/>
+          </a:ln>
+        </p:spPr>
+      </p:sp>
+      <p:sp>
+        <p:nvSpPr>
+          <p:cNvPr id="3" name="Shape 1"/>
+          <p:cNvSpPr/>
+          <p:nvPr/>
+        </p:nvSpPr>
+        <p:spPr>
+          <a:xfrm>
+            <a:off x="1463040" y="1463040"/>
+            <a:ext cx="548640" cy="548640"/>
+          </a:xfrm>
+          <a:prstGeom prst="ellipse">
+            <a:avLst/>
+          </a:prstGeom>
+          <a:solidFill>
+            <a:srgbClr val="2B57B5"/>
+          </a:solidFill>
+          <a:ln w="12700">
+            <a:solidFill>
+              <a:srgbClr val="2B57B5"/>
+            </a:solidFill>
+            <a:prstDash val="solid"/>
+          </a:ln>
+        </p:spPr>
+      </p:sp>
       <p:pic>
         <p:nvPicPr>
-          <p:cNvPr id="2" name="Image 0" descr="preencoded.png">    </p:cNvPr>
+          <p:cNvPr id="4" name="Image 0" descr="preencoded.png">    </p:cNvPr>
           <p:cNvPicPr>
             <a:picLocks noChangeAspect="1"/>
           </p:cNvPicPr>
@@ -1425,17 +1477,122 @@
         </p:blipFill>
         <p:spPr>
           <a:xfrm>
-            <a:off x="1833372" y="256032"/>
-            <a:ext cx="768096" cy="768096"/>
+            <a:off x="1591056" y="1591056"/>
+            <a:ext cx="292608" cy="292608"/>
           </a:xfrm>
           <a:prstGeom prst="rect">
             <a:avLst/>
           </a:prstGeom>
         </p:spPr>
       </p:pic>
+      <p:sp>
+        <p:nvSpPr>
+          <p:cNvPr id="5" name="Text 2"/>
+          <p:cNvSpPr txBox="1"/>
+          <p:nvPr/>
+        </p:nvSpPr>
+        <p:spPr>
+          <a:xfrm>
+            <a:off x="502920" y="2084832"/>
+            <a:ext cx="2468880" cy="274320"/>
+          </a:xfrm>
+          <a:prstGeom prst="rect">
+            <a:avLst/>
+          </a:prstGeom>
+          <a:noFill/>
+          <a:ln/>
+        </p:spPr>
+        <p:txBody>
+          <a:bodyPr wrap="square" lIns="0" tIns="0" rIns="0" bIns="0" rtlCol="0" anchor="ctr"/>
+          <a:lstStyle/>
+          <a:p>
+            <a:pPr algn="ctr" indent="0" marL="0">
+              <a:buNone/>
+            </a:pPr>
+            <a:r>
+              <a:rPr lang="en-US" sz="1500" b="1" dirty="0">
+                <a:solidFill>
+                  <a:srgbClr val="1E3A8A"/>
+                </a:solidFill>
+                <a:latin typeface="Calibri" pitchFamily="34" charset="0"/>
+                <a:ea typeface="Calibri" pitchFamily="34" charset="-122"/>
+                <a:cs typeface="Calibri" pitchFamily="34" charset="-120"/>
+              </a:rPr>
+              <a:t>User request</a:t>
+            </a:r>
+            <a:endParaRPr lang="en-US" sz="1500" dirty="0"/>
+          </a:p>
+        </p:txBody>
+      </p:sp>
+      <p:sp>
+        <p:nvSpPr>
+          <p:cNvPr id="6" name="Text 3"/>
+          <p:cNvSpPr txBox="1"/>
+          <p:nvPr/>
+        </p:nvSpPr>
+        <p:spPr>
+          <a:xfrm>
+            <a:off x="502920" y="2340864"/>
+            <a:ext cx="2468880" cy="237744"/>
+          </a:xfrm>
+          <a:prstGeom prst="rect">
+            <a:avLst/>
+          </a:prstGeom>
+          <a:noFill/>
+          <a:ln/>
+        </p:spPr>
+        <p:txBody>
+          <a:bodyPr wrap="square" lIns="0" tIns="0" rIns="0" bIns="0" rtlCol="0" anchor="ctr"/>
+          <a:lstStyle/>
+          <a:p>
+            <a:pPr algn="ctr" indent="0" marL="0">
+              <a:buNone/>
+            </a:pPr>
+            <a:r>
+              <a:rPr lang="en-US" sz="1000" dirty="0">
+                <a:solidFill>
+                  <a:srgbClr val="4B5563"/>
+                </a:solidFill>
+                <a:latin typeface="Calibri" pitchFamily="34" charset="0"/>
+                <a:ea typeface="Calibri" pitchFamily="34" charset="-122"/>
+                <a:cs typeface="Calibri" pitchFamily="34" charset="-120"/>
+              </a:rPr>
+              <a:t>A question, task or instruction</a:t>
+            </a:r>
+            <a:endParaRPr lang="en-US" sz="1000" dirty="0"/>
+          </a:p>
+        </p:txBody>
+      </p:sp>
+      <p:sp>
+        <p:nvSpPr>
+          <p:cNvPr id="7" name="Shape 4"/>
+          <p:cNvSpPr/>
+          <p:nvPr/>
+        </p:nvSpPr>
+        <p:spPr>
+          <a:xfrm>
+            <a:off x="411480" y="3108960"/>
+            <a:ext cx="2651760" cy="3017520"/>
+          </a:xfrm>
+          <a:prstGeom prst="roundRect">
+            <a:avLst>
+              <a:gd name="adj" fmla="val 4138"/>
+            </a:avLst>
+          </a:prstGeom>
+          <a:solidFill>
+            <a:srgbClr val="FFFFFF"/>
+          </a:solidFill>
+          <a:ln w="15875">
+            <a:solidFill>
+              <a:srgbClr val="C7D2E8"/>
+            </a:solidFill>
+            <a:prstDash val="solid"/>
+          </a:ln>
+        </p:spPr>
+      </p:sp>
       <p:pic>
         <p:nvPicPr>
-          <p:cNvPr id="3" name="Image 1" descr="preencoded.png">    </p:cNvPr>
+          <p:cNvPr id="8" name="Image 1" descr="preencoded.png">    </p:cNvPr>
           <p:cNvPicPr>
             <a:picLocks noChangeAspect="1"/>
           </p:cNvPicPr>
@@ -1449,8 +1606,8 @@
         </p:blipFill>
         <p:spPr>
           <a:xfrm>
-            <a:off x="1970532" y="411480"/>
-            <a:ext cx="493776" cy="493776"/>
+            <a:off x="1417320" y="3383280"/>
+            <a:ext cx="640080" cy="640080"/>
           </a:xfrm>
           <a:prstGeom prst="rect">
             <a:avLst/>
@@ -1459,14 +1616,14 @@
       </p:pic>
       <p:sp>
         <p:nvSpPr>
-          <p:cNvPr id="4" name="Text 0"/>
+          <p:cNvPr id="9" name="Text 5"/>
           <p:cNvSpPr txBox="1"/>
           <p:nvPr/>
         </p:nvSpPr>
         <p:spPr>
           <a:xfrm>
-            <a:off x="457200" y="1078992"/>
-            <a:ext cx="3520440" cy="411480"/>
+            <a:off x="521208" y="4133088"/>
+            <a:ext cx="2432304" cy="685800"/>
           </a:xfrm>
           <a:prstGeom prst="rect">
             <a:avLst/>
@@ -1479,10 +1636,13 @@
           <a:lstStyle/>
           <a:p>
             <a:pPr algn="ctr" indent="0" marL="0">
-              <a:buNone/>
-            </a:pPr>
-            <a:r>
-              <a:rPr lang="en-US" sz="2600" b="1" dirty="0">
+              <a:lnSpc>
+                <a:spcPct val="105000"/>
+              </a:lnSpc>
+              <a:buNone/>
+            </a:pPr>
+            <a:r>
+              <a:rPr lang="en-US" sz="1800" b="1" dirty="0">
                 <a:solidFill>
                   <a:srgbClr val="1E3A8A"/>
                 </a:solidFill>
@@ -1490,42 +1650,35 @@
                 <a:ea typeface="Calibri" pitchFamily="34" charset="-122"/>
                 <a:cs typeface="Calibri" pitchFamily="34" charset="-120"/>
               </a:rPr>
-              <a:t>Agent Harness</a:t>
-            </a:r>
-            <a:endParaRPr lang="en-US" sz="2600" dirty="0"/>
-          </a:p>
-        </p:txBody>
-      </p:sp>
-      <p:sp>
-        <p:nvSpPr>
-          <p:cNvPr id="5" name="Shape 1"/>
-          <p:cNvSpPr/>
-          <p:nvPr/>
-        </p:nvSpPr>
-        <p:spPr>
-          <a:xfrm>
-            <a:off x="457200" y="1645920"/>
-            <a:ext cx="3520440" cy="4800600"/>
-          </a:xfrm>
-          <a:prstGeom prst="roundRect">
-            <a:avLst>
-              <a:gd name="adj" fmla="val 3636"/>
-            </a:avLst>
-          </a:prstGeom>
-          <a:solidFill>
-            <a:srgbClr val="FFFFFF"/>
-          </a:solidFill>
-          <a:ln w="15875">
-            <a:solidFill>
-              <a:srgbClr val="C7D2E8"/>
-            </a:solidFill>
-            <a:prstDash val="solid"/>
-          </a:ln>
-        </p:spPr>
+              <a:t>Final Response</a:t>
+            </a:r>
+            <a:endParaRPr lang="en-US" sz="1800" dirty="0"/>
+          </a:p>
+          <a:p>
+            <a:pPr algn="ctr" indent="0" marL="0">
+              <a:lnSpc>
+                <a:spcPct val="105000"/>
+              </a:lnSpc>
+              <a:buNone/>
+            </a:pPr>
+            <a:r>
+              <a:rPr lang="en-US" sz="1800" b="1" dirty="0">
+                <a:solidFill>
+                  <a:srgbClr val="1E3A8A"/>
+                </a:solidFill>
+                <a:latin typeface="Calibri" pitchFamily="34" charset="0"/>
+                <a:ea typeface="Calibri" pitchFamily="34" charset="-122"/>
+                <a:cs typeface="Calibri" pitchFamily="34" charset="-120"/>
+              </a:rPr>
+              <a:t>and Trace</a:t>
+            </a:r>
+            <a:endParaRPr lang="en-US" sz="1800" dirty="0"/>
+          </a:p>
+        </p:txBody>
       </p:sp>
       <p:pic>
         <p:nvPicPr>
-          <p:cNvPr id="6" name="Image 2" descr="preencoded.png">    </p:cNvPr>
+          <p:cNvPr id="10" name="Image 2" descr="preencoded.png">    </p:cNvPr>
           <p:cNvPicPr>
             <a:picLocks noChangeAspect="1"/>
           </p:cNvPicPr>
@@ -1539,8 +1692,8 @@
         </p:blipFill>
         <p:spPr>
           <a:xfrm>
-            <a:off x="731520" y="1956816"/>
-            <a:ext cx="384048" cy="384048"/>
+            <a:off x="685800" y="4965192"/>
+            <a:ext cx="201168" cy="201168"/>
           </a:xfrm>
           <a:prstGeom prst="rect">
             <a:avLst/>
@@ -1549,14 +1702,14 @@
       </p:pic>
       <p:sp>
         <p:nvSpPr>
-          <p:cNvPr id="7" name="Text 2"/>
+          <p:cNvPr id="11" name="Text 6"/>
           <p:cNvSpPr txBox="1"/>
           <p:nvPr/>
         </p:nvSpPr>
         <p:spPr>
           <a:xfrm>
-            <a:off x="1325880" y="1883664"/>
-            <a:ext cx="2514600" cy="548640"/>
+            <a:off x="960120" y="4937760"/>
+            <a:ext cx="2011680" cy="256032"/>
           </a:xfrm>
           <a:prstGeom prst="rect">
             <a:avLst/>
@@ -1569,13 +1722,10 @@
           <a:lstStyle/>
           <a:p>
             <a:pPr indent="0" marL="0">
-              <a:lnSpc>
-                <a:spcPct val="105000"/>
-              </a:lnSpc>
-              <a:buNone/>
-            </a:pPr>
-            <a:r>
-              <a:rPr lang="en-US" sz="1450" dirty="0">
+              <a:buNone/>
+            </a:pPr>
+            <a:r>
+              <a:rPr lang="en-US" sz="1250" dirty="0">
                 <a:solidFill>
                   <a:srgbClr val="1F2937"/>
                 </a:solidFill>
@@ -1583,49 +1733,7 @@
                 <a:ea typeface="Calibri" pitchFamily="34" charset="-122"/>
                 <a:cs typeface="Calibri" pitchFamily="34" charset="-120"/>
               </a:rPr>
-              <a:t>Orchestrates the run</a:t>
-            </a:r>
-            <a:endParaRPr lang="en-US" sz="1450" dirty="0"/>
-          </a:p>
-        </p:txBody>
-      </p:sp>
-      <p:sp>
-        <p:nvSpPr>
-          <p:cNvPr id="8" name="Text 3"/>
-          <p:cNvSpPr txBox="1"/>
-          <p:nvPr/>
-        </p:nvSpPr>
-        <p:spPr>
-          <a:xfrm>
-            <a:off x="1325880" y="2203704"/>
-            <a:ext cx="2514600" cy="502920"/>
-          </a:xfrm>
-          <a:prstGeom prst="rect">
-            <a:avLst/>
-          </a:prstGeom>
-          <a:noFill/>
-          <a:ln/>
-        </p:spPr>
-        <p:txBody>
-          <a:bodyPr wrap="square" lIns="0" tIns="0" rIns="0" bIns="0" rtlCol="0" anchor="t"/>
-          <a:lstStyle/>
-          <a:p>
-            <a:pPr indent="0" marL="0">
-              <a:lnSpc>
-                <a:spcPct val="105000"/>
-              </a:lnSpc>
-              <a:buNone/>
-            </a:pPr>
-            <a:r>
-              <a:rPr lang="en-US" sz="1250" dirty="0">
-                <a:solidFill>
-                  <a:srgbClr val="4B5563"/>
-                </a:solidFill>
-                <a:latin typeface="Calibri" pitchFamily="34" charset="0"/>
-                <a:ea typeface="Calibri" pitchFamily="34" charset="-122"/>
-                <a:cs typeface="Calibri" pitchFamily="34" charset="-120"/>
-              </a:rPr>
-              <a:t>Plans steps and manages flow</a:t>
+              <a:t>Answer or result</a:t>
             </a:r>
             <a:endParaRPr lang="en-US" sz="1250" dirty="0"/>
           </a:p>
@@ -1633,7 +1741,7 @@
       </p:sp>
       <p:pic>
         <p:nvPicPr>
-          <p:cNvPr id="9" name="Image 3" descr="preencoded.png">    </p:cNvPr>
+          <p:cNvPr id="12" name="Image 3" descr="preencoded.png">    </p:cNvPr>
           <p:cNvPicPr>
             <a:picLocks noChangeAspect="1"/>
           </p:cNvPicPr>
@@ -1647,8 +1755,8 @@
         </p:blipFill>
         <p:spPr>
           <a:xfrm>
-            <a:off x="731520" y="3008376"/>
-            <a:ext cx="384048" cy="384048"/>
+            <a:off x="685800" y="5257800"/>
+            <a:ext cx="201168" cy="201168"/>
           </a:xfrm>
           <a:prstGeom prst="rect">
             <a:avLst/>
@@ -1657,14 +1765,14 @@
       </p:pic>
       <p:sp>
         <p:nvSpPr>
-          <p:cNvPr id="10" name="Text 4"/>
+          <p:cNvPr id="13" name="Text 7"/>
           <p:cNvSpPr txBox="1"/>
           <p:nvPr/>
         </p:nvSpPr>
         <p:spPr>
           <a:xfrm>
-            <a:off x="1325880" y="2935224"/>
-            <a:ext cx="2514600" cy="548640"/>
+            <a:off x="960120" y="5230368"/>
+            <a:ext cx="2011680" cy="256032"/>
           </a:xfrm>
           <a:prstGeom prst="rect">
             <a:avLst/>
@@ -1677,13 +1785,10 @@
           <a:lstStyle/>
           <a:p>
             <a:pPr indent="0" marL="0">
-              <a:lnSpc>
-                <a:spcPct val="105000"/>
-              </a:lnSpc>
-              <a:buNone/>
-            </a:pPr>
-            <a:r>
-              <a:rPr lang="en-US" sz="1450" dirty="0">
+              <a:buNone/>
+            </a:pPr>
+            <a:r>
+              <a:rPr lang="en-US" sz="1250" dirty="0">
                 <a:solidFill>
                   <a:srgbClr val="1F2937"/>
                 </a:solidFill>
@@ -1691,69 +1796,7 @@
                 <a:ea typeface="Calibri" pitchFamily="34" charset="-122"/>
                 <a:cs typeface="Calibri" pitchFamily="34" charset="-120"/>
               </a:rPr>
-              <a:t>Routes between model, agents,</a:t>
-            </a:r>
-            <a:endParaRPr lang="en-US" sz="1450" dirty="0"/>
-          </a:p>
-          <a:p>
-            <a:pPr indent="0" marL="0">
-              <a:lnSpc>
-                <a:spcPct val="105000"/>
-              </a:lnSpc>
-              <a:buNone/>
-            </a:pPr>
-            <a:r>
-              <a:rPr lang="en-US" sz="1450" dirty="0">
-                <a:solidFill>
-                  <a:srgbClr val="1F2937"/>
-                </a:solidFill>
-                <a:latin typeface="Calibri" pitchFamily="34" charset="0"/>
-                <a:ea typeface="Calibri" pitchFamily="34" charset="-122"/>
-                <a:cs typeface="Calibri" pitchFamily="34" charset="-120"/>
-              </a:rPr>
-              <a:t>tools, sandbox and approvals</a:t>
-            </a:r>
-            <a:endParaRPr lang="en-US" sz="1450" dirty="0"/>
-          </a:p>
-        </p:txBody>
-      </p:sp>
-      <p:sp>
-        <p:nvSpPr>
-          <p:cNvPr id="11" name="Text 5"/>
-          <p:cNvSpPr txBox="1"/>
-          <p:nvPr/>
-        </p:nvSpPr>
-        <p:spPr>
-          <a:xfrm>
-            <a:off x="1325880" y="3538728"/>
-            <a:ext cx="2514600" cy="502920"/>
-          </a:xfrm>
-          <a:prstGeom prst="rect">
-            <a:avLst/>
-          </a:prstGeom>
-          <a:noFill/>
-          <a:ln/>
-        </p:spPr>
-        <p:txBody>
-          <a:bodyPr wrap="square" lIns="0" tIns="0" rIns="0" bIns="0" rtlCol="0" anchor="t"/>
-          <a:lstStyle/>
-          <a:p>
-            <a:pPr indent="0" marL="0">
-              <a:lnSpc>
-                <a:spcPct val="105000"/>
-              </a:lnSpc>
-              <a:buNone/>
-            </a:pPr>
-            <a:r>
-              <a:rPr lang="en-US" sz="1250" dirty="0">
-                <a:solidFill>
-                  <a:srgbClr val="4B5563"/>
-                </a:solidFill>
-                <a:latin typeface="Calibri" pitchFamily="34" charset="0"/>
-                <a:ea typeface="Calibri" pitchFamily="34" charset="-122"/>
-                <a:cs typeface="Calibri" pitchFamily="34" charset="-120"/>
-              </a:rPr>
-              <a:t>Picks the right capability</a:t>
+              <a:t>What was done</a:t>
             </a:r>
             <a:endParaRPr lang="en-US" sz="1250" dirty="0"/>
           </a:p>
@@ -1761,7 +1804,7 @@
       </p:sp>
       <p:pic>
         <p:nvPicPr>
-          <p:cNvPr id="12" name="Image 4" descr="preencoded.png">    </p:cNvPr>
+          <p:cNvPr id="14" name="Image 4" descr="preencoded.png">    </p:cNvPr>
           <p:cNvPicPr>
             <a:picLocks noChangeAspect="1"/>
           </p:cNvPicPr>
@@ -1775,8 +1818,8 @@
         </p:blipFill>
         <p:spPr>
           <a:xfrm>
-            <a:off x="731520" y="4288536"/>
-            <a:ext cx="384048" cy="384048"/>
+            <a:off x="685800" y="5550408"/>
+            <a:ext cx="201168" cy="201168"/>
           </a:xfrm>
           <a:prstGeom prst="rect">
             <a:avLst/>
@@ -1785,14 +1828,14 @@
       </p:pic>
       <p:sp>
         <p:nvSpPr>
-          <p:cNvPr id="13" name="Text 6"/>
+          <p:cNvPr id="15" name="Text 8"/>
           <p:cNvSpPr txBox="1"/>
           <p:nvPr/>
         </p:nvSpPr>
         <p:spPr>
           <a:xfrm>
-            <a:off x="1325880" y="4215384"/>
-            <a:ext cx="2514600" cy="548640"/>
+            <a:off x="960120" y="5522976"/>
+            <a:ext cx="2011680" cy="256032"/>
           </a:xfrm>
           <a:prstGeom prst="rect">
             <a:avLst/>
@@ -1805,13 +1848,10 @@
           <a:lstStyle/>
           <a:p>
             <a:pPr indent="0" marL="0">
-              <a:lnSpc>
-                <a:spcPct val="105000"/>
-              </a:lnSpc>
-              <a:buNone/>
-            </a:pPr>
-            <a:r>
-              <a:rPr lang="en-US" sz="1450" dirty="0">
+              <a:buNone/>
+            </a:pPr>
+            <a:r>
+              <a:rPr lang="en-US" sz="1250" dirty="0">
                 <a:solidFill>
                   <a:srgbClr val="1F2937"/>
                 </a:solidFill>
@@ -1819,49 +1859,7 @@
                 <a:ea typeface="Calibri" pitchFamily="34" charset="-122"/>
                 <a:cs typeface="Calibri" pitchFamily="34" charset="-120"/>
               </a:rPr>
-              <a:t>Enforces guardrails</a:t>
-            </a:r>
-            <a:endParaRPr lang="en-US" sz="1450" dirty="0"/>
-          </a:p>
-        </p:txBody>
-      </p:sp>
-      <p:sp>
-        <p:nvSpPr>
-          <p:cNvPr id="14" name="Text 7"/>
-          <p:cNvSpPr txBox="1"/>
-          <p:nvPr/>
-        </p:nvSpPr>
-        <p:spPr>
-          <a:xfrm>
-            <a:off x="1325880" y="4535424"/>
-            <a:ext cx="2514600" cy="502920"/>
-          </a:xfrm>
-          <a:prstGeom prst="rect">
-            <a:avLst/>
-          </a:prstGeom>
-          <a:noFill/>
-          <a:ln/>
-        </p:spPr>
-        <p:txBody>
-          <a:bodyPr wrap="square" lIns="0" tIns="0" rIns="0" bIns="0" rtlCol="0" anchor="t"/>
-          <a:lstStyle/>
-          <a:p>
-            <a:pPr indent="0" marL="0">
-              <a:lnSpc>
-                <a:spcPct val="105000"/>
-              </a:lnSpc>
-              <a:buNone/>
-            </a:pPr>
-            <a:r>
-              <a:rPr lang="en-US" sz="1250" dirty="0">
-                <a:solidFill>
-                  <a:srgbClr val="4B5563"/>
-                </a:solidFill>
-                <a:latin typeface="Calibri" pitchFamily="34" charset="0"/>
-                <a:ea typeface="Calibri" pitchFamily="34" charset="-122"/>
-                <a:cs typeface="Calibri" pitchFamily="34" charset="-120"/>
-              </a:rPr>
-              <a:t>Safety, policies and limits</a:t>
+              <a:t>What was used</a:t>
             </a:r>
             <a:endParaRPr lang="en-US" sz="1250" dirty="0"/>
           </a:p>
@@ -1869,7 +1867,7 @@
       </p:sp>
       <p:pic>
         <p:nvPicPr>
-          <p:cNvPr id="15" name="Image 5" descr="preencoded.png">    </p:cNvPr>
+          <p:cNvPr id="16" name="Image 5" descr="preencoded.png">    </p:cNvPr>
           <p:cNvPicPr>
             <a:picLocks noChangeAspect="1"/>
           </p:cNvPicPr>
@@ -1883,56 +1881,14 @@
         </p:blipFill>
         <p:spPr>
           <a:xfrm>
-            <a:off x="731520" y="5340096"/>
-            <a:ext cx="384048" cy="384048"/>
+            <a:off x="685800" y="5843016"/>
+            <a:ext cx="201168" cy="201168"/>
           </a:xfrm>
           <a:prstGeom prst="rect">
             <a:avLst/>
           </a:prstGeom>
         </p:spPr>
       </p:pic>
-      <p:sp>
-        <p:nvSpPr>
-          <p:cNvPr id="16" name="Text 8"/>
-          <p:cNvSpPr txBox="1"/>
-          <p:nvPr/>
-        </p:nvSpPr>
-        <p:spPr>
-          <a:xfrm>
-            <a:off x="1325880" y="5266944"/>
-            <a:ext cx="2514600" cy="548640"/>
-          </a:xfrm>
-          <a:prstGeom prst="rect">
-            <a:avLst/>
-          </a:prstGeom>
-          <a:noFill/>
-          <a:ln/>
-        </p:spPr>
-        <p:txBody>
-          <a:bodyPr wrap="square" lIns="0" tIns="0" rIns="0" bIns="0" rtlCol="0" anchor="t"/>
-          <a:lstStyle/>
-          <a:p>
-            <a:pPr indent="0" marL="0">
-              <a:lnSpc>
-                <a:spcPct val="105000"/>
-              </a:lnSpc>
-              <a:buNone/>
-            </a:pPr>
-            <a:r>
-              <a:rPr lang="en-US" sz="1450" dirty="0">
-                <a:solidFill>
-                  <a:srgbClr val="1F2937"/>
-                </a:solidFill>
-                <a:latin typeface="Calibri" pitchFamily="34" charset="0"/>
-                <a:ea typeface="Calibri" pitchFamily="34" charset="-122"/>
-                <a:cs typeface="Calibri" pitchFamily="34" charset="-120"/>
-              </a:rPr>
-              <a:t>Records everything</a:t>
-            </a:r>
-            <a:endParaRPr lang="en-US" sz="1450" dirty="0"/>
-          </a:p>
-        </p:txBody>
-      </p:sp>
       <p:sp>
         <p:nvSpPr>
           <p:cNvPr id="17" name="Text 9"/>
@@ -1941,8 +1897,8 @@
         </p:nvSpPr>
         <p:spPr>
           <a:xfrm>
-            <a:off x="1325880" y="5586984"/>
-            <a:ext cx="2514600" cy="502920"/>
+            <a:off x="960120" y="5815584"/>
+            <a:ext cx="2011680" cy="256032"/>
           </a:xfrm>
           <a:prstGeom prst="rect">
             <a:avLst/>
@@ -1955,101 +1911,26 @@
           <a:lstStyle/>
           <a:p>
             <a:pPr indent="0" marL="0">
-              <a:lnSpc>
-                <a:spcPct val="105000"/>
-              </a:lnSpc>
               <a:buNone/>
             </a:pPr>
             <a:r>
               <a:rPr lang="en-US" sz="1250" dirty="0">
                 <a:solidFill>
-                  <a:srgbClr val="4B5563"/>
-                </a:solidFill>
-                <a:latin typeface="Calibri" pitchFamily="34" charset="0"/>
-                <a:ea typeface="Calibri" pitchFamily="34" charset="-122"/>
-                <a:cs typeface="Calibri" pitchFamily="34" charset="-120"/>
-              </a:rPr>
-              <a:t>Full trace for transparency</a:t>
+                  <a:srgbClr val="1F2937"/>
+                </a:solidFill>
+                <a:latin typeface="Calibri" pitchFamily="34" charset="0"/>
+                <a:ea typeface="Calibri" pitchFamily="34" charset="-122"/>
+                <a:cs typeface="Calibri" pitchFamily="34" charset="-120"/>
+              </a:rPr>
+              <a:t>What was decided</a:t>
             </a:r>
             <a:endParaRPr lang="en-US" sz="1250" dirty="0"/>
           </a:p>
-          <a:p>
-            <a:pPr indent="0" marL="0">
-              <a:lnSpc>
-                <a:spcPct val="105000"/>
-              </a:lnSpc>
-              <a:buNone/>
-            </a:pPr>
-            <a:r>
-              <a:rPr lang="en-US" sz="1250" dirty="0">
-                <a:solidFill>
-                  <a:srgbClr val="4B5563"/>
-                </a:solidFill>
-                <a:latin typeface="Calibri" pitchFamily="34" charset="0"/>
-                <a:ea typeface="Calibri" pitchFamily="34" charset="-122"/>
-                <a:cs typeface="Calibri" pitchFamily="34" charset="-120"/>
-              </a:rPr>
-              <a:t>and debugging</a:t>
-            </a:r>
-            <a:endParaRPr lang="en-US" sz="1250" dirty="0"/>
-          </a:p>
-        </p:txBody>
-      </p:sp>
-      <p:sp>
-        <p:nvSpPr>
-          <p:cNvPr id="18" name="Shape 10"/>
-          <p:cNvSpPr/>
-          <p:nvPr/>
-        </p:nvSpPr>
-        <p:spPr>
-          <a:xfrm>
-            <a:off x="4892040" y="411480"/>
-            <a:ext cx="3200400" cy="1097280"/>
-          </a:xfrm>
-          <a:prstGeom prst="roundRect">
-            <a:avLst>
-              <a:gd name="adj" fmla="val 10000"/>
-            </a:avLst>
-          </a:prstGeom>
-          <a:solidFill>
-            <a:srgbClr val="FFFFFF"/>
-          </a:solidFill>
-          <a:ln w="15875">
-            <a:solidFill>
-              <a:srgbClr val="D8D2F2"/>
-            </a:solidFill>
-            <a:prstDash val="solid"/>
-          </a:ln>
-        </p:spPr>
-      </p:sp>
-      <p:sp>
-        <p:nvSpPr>
-          <p:cNvPr id="19" name="Shape 11"/>
-          <p:cNvSpPr/>
-          <p:nvPr/>
-        </p:nvSpPr>
-        <p:spPr>
-          <a:xfrm>
-            <a:off x="5093208" y="694944"/>
-            <a:ext cx="566928" cy="566928"/>
-          </a:xfrm>
-          <a:prstGeom prst="ellipse">
-            <a:avLst/>
-          </a:prstGeom>
-          <a:solidFill>
-            <a:srgbClr val="6D28D9"/>
-          </a:solidFill>
-          <a:ln w="12700">
-            <a:solidFill>
-              <a:srgbClr val="6D28D9"/>
-            </a:solidFill>
-            <a:prstDash val="solid"/>
-          </a:ln>
-        </p:spPr>
+        </p:txBody>
       </p:sp>
       <p:pic>
         <p:nvPicPr>
-          <p:cNvPr id="20" name="Image 6" descr="preencoded.png">    </p:cNvPr>
+          <p:cNvPr id="18" name="Image 6" descr="preencoded.png">    </p:cNvPr>
           <p:cNvPicPr>
             <a:picLocks noChangeAspect="1"/>
           </p:cNvPicPr>
@@ -2063,173 +1944,17 @@
         </p:blipFill>
         <p:spPr>
           <a:xfrm>
-            <a:off x="5221224" y="822960"/>
-            <a:ext cx="310896" cy="310896"/>
+            <a:off x="5166360" y="256032"/>
+            <a:ext cx="768096" cy="768096"/>
           </a:xfrm>
           <a:prstGeom prst="rect">
             <a:avLst/>
           </a:prstGeom>
         </p:spPr>
       </p:pic>
-      <p:sp>
-        <p:nvSpPr>
-          <p:cNvPr id="21" name="Text 12"/>
-          <p:cNvSpPr txBox="1"/>
-          <p:nvPr/>
-        </p:nvSpPr>
-        <p:spPr>
-          <a:xfrm>
-            <a:off x="5833872" y="502920"/>
-            <a:ext cx="2103120" cy="347472"/>
-          </a:xfrm>
-          <a:prstGeom prst="rect">
-            <a:avLst/>
-          </a:prstGeom>
-          <a:noFill/>
-          <a:ln/>
-        </p:spPr>
-        <p:txBody>
-          <a:bodyPr wrap="square" lIns="0" tIns="0" rIns="0" bIns="0" rtlCol="0" anchor="t"/>
-          <a:lstStyle/>
-          <a:p>
-            <a:pPr indent="0" marL="0">
-              <a:lnSpc>
-                <a:spcPct val="95000"/>
-              </a:lnSpc>
-              <a:buNone/>
-            </a:pPr>
-            <a:r>
-              <a:rPr lang="en-US" sz="1650" b="1" dirty="0">
-                <a:solidFill>
-                  <a:srgbClr val="5B21B6"/>
-                </a:solidFill>
-                <a:latin typeface="Calibri" pitchFamily="34" charset="0"/>
-                <a:ea typeface="Calibri" pitchFamily="34" charset="-122"/>
-                <a:cs typeface="Calibri" pitchFamily="34" charset="-120"/>
-              </a:rPr>
-              <a:t>Model</a:t>
-            </a:r>
-            <a:endParaRPr lang="en-US" sz="1650" dirty="0"/>
-          </a:p>
-        </p:txBody>
-      </p:sp>
-      <p:sp>
-        <p:nvSpPr>
-          <p:cNvPr id="22" name="Text 13"/>
-          <p:cNvSpPr txBox="1"/>
-          <p:nvPr/>
-        </p:nvSpPr>
-        <p:spPr>
-          <a:xfrm>
-            <a:off x="5833872" y="832104"/>
-            <a:ext cx="2103120" cy="640080"/>
-          </a:xfrm>
-          <a:prstGeom prst="rect">
-            <a:avLst/>
-          </a:prstGeom>
-          <a:noFill/>
-          <a:ln/>
-        </p:spPr>
-        <p:txBody>
-          <a:bodyPr wrap="square" lIns="0" tIns="0" rIns="0" bIns="0" rtlCol="0" anchor="t"/>
-          <a:lstStyle/>
-          <a:p>
-            <a:pPr indent="0" marL="0">
-              <a:lnSpc>
-                <a:spcPct val="110000"/>
-              </a:lnSpc>
-              <a:buNone/>
-            </a:pPr>
-            <a:r>
-              <a:rPr lang="en-US" sz="1200" dirty="0">
-                <a:solidFill>
-                  <a:srgbClr val="1F2937"/>
-                </a:solidFill>
-                <a:latin typeface="Calibri" pitchFamily="34" charset="0"/>
-                <a:ea typeface="Calibri" pitchFamily="34" charset="-122"/>
-                <a:cs typeface="Calibri" pitchFamily="34" charset="-120"/>
-              </a:rPr>
-              <a:t>The LLM that reasons, plans</a:t>
-            </a:r>
-            <a:endParaRPr lang="en-US" sz="1200" dirty="0"/>
-          </a:p>
-          <a:p>
-            <a:pPr indent="0" marL="0">
-              <a:lnSpc>
-                <a:spcPct val="110000"/>
-              </a:lnSpc>
-              <a:buNone/>
-            </a:pPr>
-            <a:r>
-              <a:rPr lang="en-US" sz="1200" dirty="0">
-                <a:solidFill>
-                  <a:srgbClr val="1F2937"/>
-                </a:solidFill>
-                <a:latin typeface="Calibri" pitchFamily="34" charset="0"/>
-                <a:ea typeface="Calibri" pitchFamily="34" charset="-122"/>
-                <a:cs typeface="Calibri" pitchFamily="34" charset="-120"/>
-              </a:rPr>
-              <a:t>and generates responses.</a:t>
-            </a:r>
-            <a:endParaRPr lang="en-US" sz="1200" dirty="0"/>
-          </a:p>
-        </p:txBody>
-      </p:sp>
-      <p:sp>
-        <p:nvSpPr>
-          <p:cNvPr id="23" name="Shape 14"/>
-          <p:cNvSpPr/>
-          <p:nvPr/>
-        </p:nvSpPr>
-        <p:spPr>
-          <a:xfrm>
-            <a:off x="4892040" y="1668780"/>
-            <a:ext cx="3200400" cy="1097280"/>
-          </a:xfrm>
-          <a:prstGeom prst="roundRect">
-            <a:avLst>
-              <a:gd name="adj" fmla="val 10000"/>
-            </a:avLst>
-          </a:prstGeom>
-          <a:solidFill>
-            <a:srgbClr val="F6F7FE"/>
-          </a:solidFill>
-          <a:ln w="15875">
-            <a:solidFill>
-              <a:srgbClr val="C7CCF7"/>
-            </a:solidFill>
-            <a:prstDash val="solid"/>
-          </a:ln>
-        </p:spPr>
-      </p:sp>
-      <p:sp>
-        <p:nvSpPr>
-          <p:cNvPr id="24" name="Shape 15"/>
-          <p:cNvSpPr/>
-          <p:nvPr/>
-        </p:nvSpPr>
-        <p:spPr>
-          <a:xfrm>
-            <a:off x="5093208" y="1952244"/>
-            <a:ext cx="566928" cy="566928"/>
-          </a:xfrm>
-          <a:prstGeom prst="ellipse">
-            <a:avLst/>
-          </a:prstGeom>
-          <a:solidFill>
-            <a:srgbClr val="4338CA"/>
-          </a:solidFill>
-          <a:ln w="12700">
-            <a:solidFill>
-              <a:srgbClr val="4338CA"/>
-            </a:solidFill>
-            <a:prstDash val="solid"/>
-          </a:ln>
-        </p:spPr>
-      </p:sp>
       <p:pic>
         <p:nvPicPr>
-          <p:cNvPr id="25" name="Image 7" descr="preencoded.png">    </p:cNvPr>
+          <p:cNvPr id="19" name="Image 7" descr="preencoded.png">    </p:cNvPr>
           <p:cNvPicPr>
             <a:picLocks noChangeAspect="1"/>
           </p:cNvPicPr>
@@ -2243,8 +1968,8 @@
         </p:blipFill>
         <p:spPr>
           <a:xfrm>
-            <a:off x="5221224" y="2080260"/>
-            <a:ext cx="310896" cy="310896"/>
+            <a:off x="5303520" y="411480"/>
+            <a:ext cx="493776" cy="493776"/>
           </a:xfrm>
           <a:prstGeom prst="rect">
             <a:avLst/>
@@ -2253,14 +1978,14 @@
       </p:pic>
       <p:sp>
         <p:nvSpPr>
-          <p:cNvPr id="26" name="Text 16"/>
+          <p:cNvPr id="20" name="Text 10"/>
           <p:cNvSpPr txBox="1"/>
           <p:nvPr/>
         </p:nvSpPr>
         <p:spPr>
           <a:xfrm>
-            <a:off x="5833872" y="1760220"/>
-            <a:ext cx="2103120" cy="347472"/>
+            <a:off x="3767328" y="1078992"/>
+            <a:ext cx="3566160" cy="411480"/>
           </a:xfrm>
           <a:prstGeom prst="rect">
             <a:avLst/>
@@ -2269,139 +1994,49 @@
           <a:ln/>
         </p:spPr>
         <p:txBody>
-          <a:bodyPr wrap="square" lIns="0" tIns="0" rIns="0" bIns="0" rtlCol="0" anchor="t"/>
-          <a:lstStyle/>
-          <a:p>
-            <a:pPr indent="0" marL="0">
-              <a:lnSpc>
-                <a:spcPct val="95000"/>
-              </a:lnSpc>
-              <a:buNone/>
-            </a:pPr>
-            <a:r>
-              <a:rPr lang="en-US" sz="1650" b="1" dirty="0">
-                <a:solidFill>
-                  <a:srgbClr val="3730A3"/>
-                </a:solidFill>
-                <a:latin typeface="Calibri" pitchFamily="34" charset="0"/>
-                <a:ea typeface="Calibri" pitchFamily="34" charset="-122"/>
-                <a:cs typeface="Calibri" pitchFamily="34" charset="-120"/>
-              </a:rPr>
-              <a:t>Peer Agents (A2A)</a:t>
-            </a:r>
-            <a:endParaRPr lang="en-US" sz="1650" dirty="0"/>
-          </a:p>
-        </p:txBody>
-      </p:sp>
-      <p:sp>
-        <p:nvSpPr>
-          <p:cNvPr id="27" name="Text 17"/>
-          <p:cNvSpPr txBox="1"/>
-          <p:nvPr/>
-        </p:nvSpPr>
-        <p:spPr>
-          <a:xfrm>
-            <a:off x="5833872" y="2089404"/>
-            <a:ext cx="2103120" cy="640080"/>
-          </a:xfrm>
-          <a:prstGeom prst="rect">
-            <a:avLst/>
-          </a:prstGeom>
-          <a:noFill/>
-          <a:ln/>
-        </p:spPr>
-        <p:txBody>
-          <a:bodyPr wrap="square" lIns="0" tIns="0" rIns="0" bIns="0" rtlCol="0" anchor="t"/>
-          <a:lstStyle/>
-          <a:p>
-            <a:pPr indent="0" marL="0">
-              <a:lnSpc>
-                <a:spcPct val="110000"/>
-              </a:lnSpc>
-              <a:buNone/>
-            </a:pPr>
-            <a:r>
-              <a:rPr lang="en-US" sz="1200" dirty="0">
-                <a:solidFill>
-                  <a:srgbClr val="1F2937"/>
-                </a:solidFill>
-                <a:latin typeface="Calibri" pitchFamily="34" charset="0"/>
-                <a:ea typeface="Calibri" pitchFamily="34" charset="-122"/>
-                <a:cs typeface="Calibri" pitchFamily="34" charset="-120"/>
-              </a:rPr>
-              <a:t>Other agents the harness</a:t>
-            </a:r>
-            <a:endParaRPr lang="en-US" sz="1200" dirty="0"/>
-          </a:p>
-          <a:p>
-            <a:pPr indent="0" marL="0">
-              <a:lnSpc>
-                <a:spcPct val="110000"/>
-              </a:lnSpc>
-              <a:buNone/>
-            </a:pPr>
-            <a:r>
-              <a:rPr lang="en-US" sz="1200" dirty="0">
-                <a:solidFill>
-                  <a:srgbClr val="1F2937"/>
-                </a:solidFill>
-                <a:latin typeface="Calibri" pitchFamily="34" charset="0"/>
-                <a:ea typeface="Calibri" pitchFamily="34" charset="-122"/>
-                <a:cs typeface="Calibri" pitchFamily="34" charset="-120"/>
-              </a:rPr>
-              <a:t>delegates tasks to over A2A.</a:t>
-            </a:r>
-            <a:endParaRPr lang="en-US" sz="1200" dirty="0"/>
-          </a:p>
-        </p:txBody>
-      </p:sp>
-      <p:sp>
-        <p:nvSpPr>
-          <p:cNvPr id="28" name="Shape 18"/>
-          <p:cNvSpPr/>
-          <p:nvPr/>
-        </p:nvSpPr>
-        <p:spPr>
-          <a:xfrm>
-            <a:off x="4892040" y="2926080"/>
-            <a:ext cx="3200400" cy="1097280"/>
+          <a:bodyPr wrap="square" lIns="0" tIns="0" rIns="0" bIns="0" rtlCol="0" anchor="ctr"/>
+          <a:lstStyle/>
+          <a:p>
+            <a:pPr algn="ctr" indent="0" marL="0">
+              <a:buNone/>
+            </a:pPr>
+            <a:r>
+              <a:rPr lang="en-US" sz="2600" b="1" dirty="0">
+                <a:solidFill>
+                  <a:srgbClr val="1E3A8A"/>
+                </a:solidFill>
+                <a:latin typeface="Calibri" pitchFamily="34" charset="0"/>
+                <a:ea typeface="Calibri" pitchFamily="34" charset="-122"/>
+                <a:cs typeface="Calibri" pitchFamily="34" charset="-120"/>
+              </a:rPr>
+              <a:t>Agent Harness</a:t>
+            </a:r>
+            <a:endParaRPr lang="en-US" sz="2600" dirty="0"/>
+          </a:p>
+        </p:txBody>
+      </p:sp>
+      <p:sp>
+        <p:nvSpPr>
+          <p:cNvPr id="21" name="Shape 11"/>
+          <p:cNvSpPr/>
+          <p:nvPr/>
+        </p:nvSpPr>
+        <p:spPr>
+          <a:xfrm>
+            <a:off x="3767328" y="1645920"/>
+            <a:ext cx="3566160" cy="4800600"/>
           </a:xfrm>
           <a:prstGeom prst="roundRect">
             <a:avLst>
-              <a:gd name="adj" fmla="val 10000"/>
+              <a:gd name="adj" fmla="val 3590"/>
             </a:avLst>
           </a:prstGeom>
           <a:solidFill>
-            <a:srgbClr val="F7FCF8"/>
+            <a:srgbClr val="FFFFFF"/>
           </a:solidFill>
           <a:ln w="15875">
             <a:solidFill>
-              <a:srgbClr val="BFE0C7"/>
-            </a:solidFill>
-            <a:prstDash val="solid"/>
-          </a:ln>
-        </p:spPr>
-      </p:sp>
-      <p:sp>
-        <p:nvSpPr>
-          <p:cNvPr id="29" name="Shape 19"/>
-          <p:cNvSpPr/>
-          <p:nvPr/>
-        </p:nvSpPr>
-        <p:spPr>
-          <a:xfrm>
-            <a:off x="5093208" y="3209544"/>
-            <a:ext cx="566928" cy="566928"/>
-          </a:xfrm>
-          <a:prstGeom prst="ellipse">
-            <a:avLst/>
-          </a:prstGeom>
-          <a:solidFill>
-            <a:srgbClr val="15803D"/>
-          </a:solidFill>
-          <a:ln w="12700">
-            <a:solidFill>
-              <a:srgbClr val="15803D"/>
+              <a:srgbClr val="C7D2E8"/>
             </a:solidFill>
             <a:prstDash val="solid"/>
           </a:ln>
@@ -2409,7 +2044,7 @@
       </p:sp>
       <p:pic>
         <p:nvPicPr>
-          <p:cNvPr id="30" name="Image 8" descr="preencoded.png">    </p:cNvPr>
+          <p:cNvPr id="22" name="Image 8" descr="preencoded.png">    </p:cNvPr>
           <p:cNvPicPr>
             <a:picLocks noChangeAspect="1"/>
           </p:cNvPicPr>
@@ -2423,8 +2058,8 @@
         </p:blipFill>
         <p:spPr>
           <a:xfrm>
-            <a:off x="5221224" y="3337560"/>
-            <a:ext cx="310896" cy="310896"/>
+            <a:off x="4041648" y="1956816"/>
+            <a:ext cx="384048" cy="384048"/>
           </a:xfrm>
           <a:prstGeom prst="rect">
             <a:avLst/>
@@ -2433,14 +2068,14 @@
       </p:pic>
       <p:sp>
         <p:nvSpPr>
-          <p:cNvPr id="31" name="Text 20"/>
+          <p:cNvPr id="23" name="Text 12"/>
           <p:cNvSpPr txBox="1"/>
           <p:nvPr/>
         </p:nvSpPr>
         <p:spPr>
           <a:xfrm>
-            <a:off x="5833872" y="3017520"/>
-            <a:ext cx="2103120" cy="347472"/>
+            <a:off x="4636008" y="1883664"/>
+            <a:ext cx="2560320" cy="548640"/>
           </a:xfrm>
           <a:prstGeom prst="rect">
             <a:avLst/>
@@ -2454,35 +2089,35 @@
           <a:p>
             <a:pPr indent="0" marL="0">
               <a:lnSpc>
-                <a:spcPct val="95000"/>
-              </a:lnSpc>
-              <a:buNone/>
-            </a:pPr>
-            <a:r>
-              <a:rPr lang="en-US" sz="1650" b="1" dirty="0">
-                <a:solidFill>
-                  <a:srgbClr val="166534"/>
-                </a:solidFill>
-                <a:latin typeface="Calibri" pitchFamily="34" charset="0"/>
-                <a:ea typeface="Calibri" pitchFamily="34" charset="-122"/>
-                <a:cs typeface="Calibri" pitchFamily="34" charset="-120"/>
-              </a:rPr>
-              <a:t>Tools and MCP Servers</a:t>
-            </a:r>
-            <a:endParaRPr lang="en-US" sz="1650" dirty="0"/>
-          </a:p>
-        </p:txBody>
-      </p:sp>
-      <p:sp>
-        <p:nvSpPr>
-          <p:cNvPr id="32" name="Text 21"/>
+                <a:spcPct val="105000"/>
+              </a:lnSpc>
+              <a:buNone/>
+            </a:pPr>
+            <a:r>
+              <a:rPr lang="en-US" sz="1450" dirty="0">
+                <a:solidFill>
+                  <a:srgbClr val="1F2937"/>
+                </a:solidFill>
+                <a:latin typeface="Calibri" pitchFamily="34" charset="0"/>
+                <a:ea typeface="Calibri" pitchFamily="34" charset="-122"/>
+                <a:cs typeface="Calibri" pitchFamily="34" charset="-120"/>
+              </a:rPr>
+              <a:t>Orchestrates the run</a:t>
+            </a:r>
+            <a:endParaRPr lang="en-US" sz="1450" dirty="0"/>
+          </a:p>
+        </p:txBody>
+      </p:sp>
+      <p:sp>
+        <p:nvSpPr>
+          <p:cNvPr id="24" name="Text 13"/>
           <p:cNvSpPr txBox="1"/>
           <p:nvPr/>
         </p:nvSpPr>
         <p:spPr>
           <a:xfrm>
-            <a:off x="5833872" y="3346704"/>
-            <a:ext cx="2103120" cy="640080"/>
+            <a:off x="4636008" y="2203704"/>
+            <a:ext cx="2560320" cy="502920"/>
           </a:xfrm>
           <a:prstGeom prst="rect">
             <a:avLst/>
@@ -2496,100 +2131,28 @@
           <a:p>
             <a:pPr indent="0" marL="0">
               <a:lnSpc>
-                <a:spcPct val="110000"/>
-              </a:lnSpc>
-              <a:buNone/>
-            </a:pPr>
-            <a:r>
-              <a:rPr lang="en-US" sz="1200" dirty="0">
-                <a:solidFill>
-                  <a:srgbClr val="1F2937"/>
-                </a:solidFill>
-                <a:latin typeface="Calibri" pitchFamily="34" charset="0"/>
-                <a:ea typeface="Calibri" pitchFamily="34" charset="-122"/>
-                <a:cs typeface="Calibri" pitchFamily="34" charset="-120"/>
-              </a:rPr>
-              <a:t>External capabilities the</a:t>
-            </a:r>
-            <a:endParaRPr lang="en-US" sz="1200" dirty="0"/>
-          </a:p>
-          <a:p>
-            <a:pPr indent="0" marL="0">
-              <a:lnSpc>
-                <a:spcPct val="110000"/>
-              </a:lnSpc>
-              <a:buNone/>
-            </a:pPr>
-            <a:r>
-              <a:rPr lang="en-US" sz="1200" dirty="0">
-                <a:solidFill>
-                  <a:srgbClr val="1F2937"/>
-                </a:solidFill>
-                <a:latin typeface="Calibri" pitchFamily="34" charset="0"/>
-                <a:ea typeface="Calibri" pitchFamily="34" charset="-122"/>
-                <a:cs typeface="Calibri" pitchFamily="34" charset="-120"/>
-              </a:rPr>
-              <a:t>agent can use.</a:t>
-            </a:r>
-            <a:endParaRPr lang="en-US" sz="1200" dirty="0"/>
-          </a:p>
-        </p:txBody>
-      </p:sp>
-      <p:sp>
-        <p:nvSpPr>
-          <p:cNvPr id="33" name="Shape 22"/>
-          <p:cNvSpPr/>
-          <p:nvPr/>
-        </p:nvSpPr>
-        <p:spPr>
-          <a:xfrm>
-            <a:off x="4892040" y="4183380"/>
-            <a:ext cx="3200400" cy="1097280"/>
-          </a:xfrm>
-          <a:prstGeom prst="roundRect">
-            <a:avLst>
-              <a:gd name="adj" fmla="val 10000"/>
-            </a:avLst>
-          </a:prstGeom>
-          <a:solidFill>
-            <a:srgbClr val="FFFBF7"/>
-          </a:solidFill>
-          <a:ln w="15875">
-            <a:solidFill>
-              <a:srgbClr val="F8D6BC"/>
-            </a:solidFill>
-            <a:prstDash val="solid"/>
-          </a:ln>
-        </p:spPr>
-      </p:sp>
-      <p:sp>
-        <p:nvSpPr>
-          <p:cNvPr id="34" name="Shape 23"/>
-          <p:cNvSpPr/>
-          <p:nvPr/>
-        </p:nvSpPr>
-        <p:spPr>
-          <a:xfrm>
-            <a:off x="5093208" y="4466844"/>
-            <a:ext cx="566928" cy="566928"/>
-          </a:xfrm>
-          <a:prstGeom prst="ellipse">
-            <a:avLst/>
-          </a:prstGeom>
-          <a:solidFill>
-            <a:srgbClr val="EA580C"/>
-          </a:solidFill>
-          <a:ln w="12700">
-            <a:solidFill>
-              <a:srgbClr val="EA580C"/>
-            </a:solidFill>
-            <a:prstDash val="solid"/>
-          </a:ln>
-        </p:spPr>
+                <a:spcPct val="105000"/>
+              </a:lnSpc>
+              <a:buNone/>
+            </a:pPr>
+            <a:r>
+              <a:rPr lang="en-US" sz="1250" dirty="0">
+                <a:solidFill>
+                  <a:srgbClr val="4B5563"/>
+                </a:solidFill>
+                <a:latin typeface="Calibri" pitchFamily="34" charset="0"/>
+                <a:ea typeface="Calibri" pitchFamily="34" charset="-122"/>
+                <a:cs typeface="Calibri" pitchFamily="34" charset="-120"/>
+              </a:rPr>
+              <a:t>Plans steps and manages flow</a:t>
+            </a:r>
+            <a:endParaRPr lang="en-US" sz="1250" dirty="0"/>
+          </a:p>
+        </p:txBody>
       </p:sp>
       <p:pic>
         <p:nvPicPr>
-          <p:cNvPr id="35" name="Image 9" descr="preencoded.png">    </p:cNvPr>
+          <p:cNvPr id="25" name="Image 9" descr="preencoded.png">    </p:cNvPr>
           <p:cNvPicPr>
             <a:picLocks noChangeAspect="1"/>
           </p:cNvPicPr>
@@ -2603,8 +2166,8 @@
         </p:blipFill>
         <p:spPr>
           <a:xfrm>
-            <a:off x="5221224" y="4594860"/>
-            <a:ext cx="310896" cy="310896"/>
+            <a:off x="4041648" y="3008376"/>
+            <a:ext cx="384048" cy="384048"/>
           </a:xfrm>
           <a:prstGeom prst="rect">
             <a:avLst/>
@@ -2613,14 +2176,14 @@
       </p:pic>
       <p:sp>
         <p:nvSpPr>
-          <p:cNvPr id="36" name="Text 24"/>
+          <p:cNvPr id="26" name="Text 14"/>
           <p:cNvSpPr txBox="1"/>
           <p:nvPr/>
         </p:nvSpPr>
         <p:spPr>
           <a:xfrm>
-            <a:off x="5833872" y="4274820"/>
-            <a:ext cx="2103120" cy="347472"/>
+            <a:off x="4636008" y="2935224"/>
+            <a:ext cx="2560320" cy="548640"/>
           </a:xfrm>
           <a:prstGeom prst="rect">
             <a:avLst/>
@@ -2634,35 +2197,55 @@
           <a:p>
             <a:pPr indent="0" marL="0">
               <a:lnSpc>
-                <a:spcPct val="95000"/>
-              </a:lnSpc>
-              <a:buNone/>
-            </a:pPr>
-            <a:r>
-              <a:rPr lang="en-US" sz="1650" b="1" dirty="0">
-                <a:solidFill>
-                  <a:srgbClr val="C2410C"/>
-                </a:solidFill>
-                <a:latin typeface="Calibri" pitchFamily="34" charset="0"/>
-                <a:ea typeface="Calibri" pitchFamily="34" charset="-122"/>
-                <a:cs typeface="Calibri" pitchFamily="34" charset="-120"/>
-              </a:rPr>
-              <a:t>Sandbox</a:t>
-            </a:r>
-            <a:endParaRPr lang="en-US" sz="1650" dirty="0"/>
-          </a:p>
-        </p:txBody>
-      </p:sp>
-      <p:sp>
-        <p:nvSpPr>
-          <p:cNvPr id="37" name="Text 25"/>
+                <a:spcPct val="105000"/>
+              </a:lnSpc>
+              <a:buNone/>
+            </a:pPr>
+            <a:r>
+              <a:rPr lang="en-US" sz="1450" dirty="0">
+                <a:solidFill>
+                  <a:srgbClr val="1F2937"/>
+                </a:solidFill>
+                <a:latin typeface="Calibri" pitchFamily="34" charset="0"/>
+                <a:ea typeface="Calibri" pitchFamily="34" charset="-122"/>
+                <a:cs typeface="Calibri" pitchFamily="34" charset="-120"/>
+              </a:rPr>
+              <a:t>Routes between model, agents,</a:t>
+            </a:r>
+            <a:endParaRPr lang="en-US" sz="1450" dirty="0"/>
+          </a:p>
+          <a:p>
+            <a:pPr indent="0" marL="0">
+              <a:lnSpc>
+                <a:spcPct val="105000"/>
+              </a:lnSpc>
+              <a:buNone/>
+            </a:pPr>
+            <a:r>
+              <a:rPr lang="en-US" sz="1450" dirty="0">
+                <a:solidFill>
+                  <a:srgbClr val="1F2937"/>
+                </a:solidFill>
+                <a:latin typeface="Calibri" pitchFamily="34" charset="0"/>
+                <a:ea typeface="Calibri" pitchFamily="34" charset="-122"/>
+                <a:cs typeface="Calibri" pitchFamily="34" charset="-120"/>
+              </a:rPr>
+              <a:t>tools, sandbox and approvals</a:t>
+            </a:r>
+            <a:endParaRPr lang="en-US" sz="1450" dirty="0"/>
+          </a:p>
+        </p:txBody>
+      </p:sp>
+      <p:sp>
+        <p:nvSpPr>
+          <p:cNvPr id="27" name="Text 15"/>
           <p:cNvSpPr txBox="1"/>
           <p:nvPr/>
         </p:nvSpPr>
         <p:spPr>
           <a:xfrm>
-            <a:off x="5833872" y="4604004"/>
-            <a:ext cx="2103120" cy="640080"/>
+            <a:off x="4636008" y="3538728"/>
+            <a:ext cx="2560320" cy="502920"/>
           </a:xfrm>
           <a:prstGeom prst="rect">
             <a:avLst/>
@@ -2676,100 +2259,28 @@
           <a:p>
             <a:pPr indent="0" marL="0">
               <a:lnSpc>
-                <a:spcPct val="110000"/>
-              </a:lnSpc>
-              <a:buNone/>
-            </a:pPr>
-            <a:r>
-              <a:rPr lang="en-US" sz="1200" dirty="0">
-                <a:solidFill>
-                  <a:srgbClr val="1F2937"/>
-                </a:solidFill>
-                <a:latin typeface="Calibri" pitchFamily="34" charset="0"/>
-                <a:ea typeface="Calibri" pitchFamily="34" charset="-122"/>
-                <a:cs typeface="Calibri" pitchFamily="34" charset="-120"/>
-              </a:rPr>
-              <a:t>Isolated environment to run</a:t>
-            </a:r>
-            <a:endParaRPr lang="en-US" sz="1200" dirty="0"/>
-          </a:p>
-          <a:p>
-            <a:pPr indent="0" marL="0">
-              <a:lnSpc>
-                <a:spcPct val="110000"/>
-              </a:lnSpc>
-              <a:buNone/>
-            </a:pPr>
-            <a:r>
-              <a:rPr lang="en-US" sz="1200" dirty="0">
-                <a:solidFill>
-                  <a:srgbClr val="1F2937"/>
-                </a:solidFill>
-                <a:latin typeface="Calibri" pitchFamily="34" charset="0"/>
-                <a:ea typeface="Calibri" pitchFamily="34" charset="-122"/>
-                <a:cs typeface="Calibri" pitchFamily="34" charset="-120"/>
-              </a:rPr>
-              <a:t>code and process data safely.</a:t>
-            </a:r>
-            <a:endParaRPr lang="en-US" sz="1200" dirty="0"/>
-          </a:p>
-        </p:txBody>
-      </p:sp>
-      <p:sp>
-        <p:nvSpPr>
-          <p:cNvPr id="38" name="Shape 26"/>
-          <p:cNvSpPr/>
-          <p:nvPr/>
-        </p:nvSpPr>
-        <p:spPr>
-          <a:xfrm>
-            <a:off x="4892040" y="5440680"/>
-            <a:ext cx="3200400" cy="1097280"/>
-          </a:xfrm>
-          <a:prstGeom prst="roundRect">
-            <a:avLst>
-              <a:gd name="adj" fmla="val 10000"/>
-            </a:avLst>
-          </a:prstGeom>
-          <a:solidFill>
-            <a:srgbClr val="FFFDF6"/>
-          </a:solidFill>
-          <a:ln w="15875">
-            <a:solidFill>
-              <a:srgbClr val="F7E0AE"/>
-            </a:solidFill>
-            <a:prstDash val="solid"/>
-          </a:ln>
-        </p:spPr>
-      </p:sp>
-      <p:sp>
-        <p:nvSpPr>
-          <p:cNvPr id="39" name="Shape 27"/>
-          <p:cNvSpPr/>
-          <p:nvPr/>
-        </p:nvSpPr>
-        <p:spPr>
-          <a:xfrm>
-            <a:off x="5093208" y="5724144"/>
-            <a:ext cx="566928" cy="566928"/>
-          </a:xfrm>
-          <a:prstGeom prst="ellipse">
-            <a:avLst/>
-          </a:prstGeom>
-          <a:solidFill>
-            <a:srgbClr val="F0A81E"/>
-          </a:solidFill>
-          <a:ln w="12700">
-            <a:solidFill>
-              <a:srgbClr val="F0A81E"/>
-            </a:solidFill>
-            <a:prstDash val="solid"/>
-          </a:ln>
-        </p:spPr>
+                <a:spcPct val="105000"/>
+              </a:lnSpc>
+              <a:buNone/>
+            </a:pPr>
+            <a:r>
+              <a:rPr lang="en-US" sz="1250" dirty="0">
+                <a:solidFill>
+                  <a:srgbClr val="4B5563"/>
+                </a:solidFill>
+                <a:latin typeface="Calibri" pitchFamily="34" charset="0"/>
+                <a:ea typeface="Calibri" pitchFamily="34" charset="-122"/>
+                <a:cs typeface="Calibri" pitchFamily="34" charset="-120"/>
+              </a:rPr>
+              <a:t>Picks the right capability</a:t>
+            </a:r>
+            <a:endParaRPr lang="en-US" sz="1250" dirty="0"/>
+          </a:p>
+        </p:txBody>
       </p:sp>
       <p:pic>
         <p:nvPicPr>
-          <p:cNvPr id="40" name="Image 10" descr="preencoded.png">    </p:cNvPr>
+          <p:cNvPr id="28" name="Image 10" descr="preencoded.png">    </p:cNvPr>
           <p:cNvPicPr>
             <a:picLocks noChangeAspect="1"/>
           </p:cNvPicPr>
@@ -2783,8 +2294,8 @@
         </p:blipFill>
         <p:spPr>
           <a:xfrm>
-            <a:off x="5221224" y="5852160"/>
-            <a:ext cx="310896" cy="310896"/>
+            <a:off x="4041648" y="4288536"/>
+            <a:ext cx="384048" cy="384048"/>
           </a:xfrm>
           <a:prstGeom prst="rect">
             <a:avLst/>
@@ -2793,14 +2304,14 @@
       </p:pic>
       <p:sp>
         <p:nvSpPr>
-          <p:cNvPr id="41" name="Text 28"/>
+          <p:cNvPr id="29" name="Text 16"/>
           <p:cNvSpPr txBox="1"/>
           <p:nvPr/>
         </p:nvSpPr>
         <p:spPr>
           <a:xfrm>
-            <a:off x="5833872" y="5532120"/>
-            <a:ext cx="2103120" cy="347472"/>
+            <a:off x="4636008" y="4215384"/>
+            <a:ext cx="2560320" cy="548640"/>
           </a:xfrm>
           <a:prstGeom prst="rect">
             <a:avLst/>
@@ -2814,35 +2325,35 @@
           <a:p>
             <a:pPr indent="0" marL="0">
               <a:lnSpc>
-                <a:spcPct val="95000"/>
-              </a:lnSpc>
-              <a:buNone/>
-            </a:pPr>
-            <a:r>
-              <a:rPr lang="en-US" sz="1650" b="1" dirty="0">
-                <a:solidFill>
-                  <a:srgbClr val="B45309"/>
-                </a:solidFill>
-                <a:latin typeface="Calibri" pitchFamily="34" charset="0"/>
-                <a:ea typeface="Calibri" pitchFamily="34" charset="-122"/>
-                <a:cs typeface="Calibri" pitchFamily="34" charset="-120"/>
-              </a:rPr>
-              <a:t>Approval Gates</a:t>
-            </a:r>
-            <a:endParaRPr lang="en-US" sz="1650" dirty="0"/>
-          </a:p>
-        </p:txBody>
-      </p:sp>
-      <p:sp>
-        <p:nvSpPr>
-          <p:cNvPr id="42" name="Text 29"/>
+                <a:spcPct val="105000"/>
+              </a:lnSpc>
+              <a:buNone/>
+            </a:pPr>
+            <a:r>
+              <a:rPr lang="en-US" sz="1450" dirty="0">
+                <a:solidFill>
+                  <a:srgbClr val="1F2937"/>
+                </a:solidFill>
+                <a:latin typeface="Calibri" pitchFamily="34" charset="0"/>
+                <a:ea typeface="Calibri" pitchFamily="34" charset="-122"/>
+                <a:cs typeface="Calibri" pitchFamily="34" charset="-120"/>
+              </a:rPr>
+              <a:t>Enforces guardrails</a:t>
+            </a:r>
+            <a:endParaRPr lang="en-US" sz="1450" dirty="0"/>
+          </a:p>
+        </p:txBody>
+      </p:sp>
+      <p:sp>
+        <p:nvSpPr>
+          <p:cNvPr id="30" name="Text 17"/>
           <p:cNvSpPr txBox="1"/>
           <p:nvPr/>
         </p:nvSpPr>
         <p:spPr>
           <a:xfrm>
-            <a:off x="5833872" y="5861304"/>
-            <a:ext cx="2103120" cy="640080"/>
+            <a:off x="4636008" y="4535424"/>
+            <a:ext cx="2560320" cy="502920"/>
           </a:xfrm>
           <a:prstGeom prst="rect">
             <a:avLst/>
@@ -2856,339 +2367,28 @@
           <a:p>
             <a:pPr indent="0" marL="0">
               <a:lnSpc>
-                <a:spcPct val="110000"/>
-              </a:lnSpc>
-              <a:buNone/>
-            </a:pPr>
-            <a:r>
-              <a:rPr lang="en-US" sz="1200" dirty="0">
-                <a:solidFill>
-                  <a:srgbClr val="1F2937"/>
-                </a:solidFill>
-                <a:latin typeface="Calibri" pitchFamily="34" charset="0"/>
-                <a:ea typeface="Calibri" pitchFamily="34" charset="-122"/>
-                <a:cs typeface="Calibri" pitchFamily="34" charset="-120"/>
-              </a:rPr>
-              <a:t>Human or policy approvals for</a:t>
-            </a:r>
-            <a:endParaRPr lang="en-US" sz="1200" dirty="0"/>
-          </a:p>
-          <a:p>
-            <a:pPr indent="0" marL="0">
-              <a:lnSpc>
-                <a:spcPct val="110000"/>
-              </a:lnSpc>
-              <a:buNone/>
-            </a:pPr>
-            <a:r>
-              <a:rPr lang="en-US" sz="1200" dirty="0">
-                <a:solidFill>
-                  <a:srgbClr val="1F2937"/>
-                </a:solidFill>
-                <a:latin typeface="Calibri" pitchFamily="34" charset="0"/>
-                <a:ea typeface="Calibri" pitchFamily="34" charset="-122"/>
-                <a:cs typeface="Calibri" pitchFamily="34" charset="-120"/>
-              </a:rPr>
-              <a:t>sensitive or high-impact actions.</a:t>
-            </a:r>
-            <a:endParaRPr lang="en-US" sz="1200" dirty="0"/>
-          </a:p>
-        </p:txBody>
-      </p:sp>
-      <p:sp>
-        <p:nvSpPr>
-          <p:cNvPr id="43" name="Shape 30"/>
-          <p:cNvSpPr/>
-          <p:nvPr/>
-        </p:nvSpPr>
-        <p:spPr>
-          <a:xfrm>
-            <a:off x="4050792" y="777240"/>
-            <a:ext cx="768096" cy="0"/>
-          </a:xfrm>
-          <a:prstGeom prst="line">
-            <a:avLst/>
-          </a:prstGeom>
-          <a:noFill/>
-          <a:ln w="28575">
-            <a:solidFill>
-              <a:srgbClr val="2B3A67"/>
-            </a:solidFill>
-            <a:prstDash val="dash"/>
-            <a:tailEnd type="triangle"/>
-          </a:ln>
-        </p:spPr>
-      </p:sp>
-      <p:sp>
-        <p:nvSpPr>
-          <p:cNvPr id="44" name="Shape 31"/>
-          <p:cNvSpPr/>
-          <p:nvPr/>
-        </p:nvSpPr>
-        <p:spPr>
-          <a:xfrm>
-            <a:off x="4050792" y="1161288"/>
-            <a:ext cx="768096" cy="0"/>
-          </a:xfrm>
-          <a:prstGeom prst="line">
-            <a:avLst/>
-          </a:prstGeom>
-          <a:noFill/>
-          <a:ln w="28575">
-            <a:solidFill>
-              <a:srgbClr val="9BA8DF"/>
-            </a:solidFill>
-            <a:prstDash val="dash"/>
-            <a:headEnd type="triangle"/>
-          </a:ln>
-        </p:spPr>
-      </p:sp>
-      <p:sp>
-        <p:nvSpPr>
-          <p:cNvPr id="45" name="Shape 32"/>
-          <p:cNvSpPr/>
-          <p:nvPr/>
-        </p:nvSpPr>
-        <p:spPr>
-          <a:xfrm>
-            <a:off x="4050792" y="2034540"/>
-            <a:ext cx="768096" cy="0"/>
-          </a:xfrm>
-          <a:prstGeom prst="line">
-            <a:avLst/>
-          </a:prstGeom>
-          <a:noFill/>
-          <a:ln w="28575">
-            <a:solidFill>
-              <a:srgbClr val="2B3A67"/>
-            </a:solidFill>
-            <a:prstDash val="dash"/>
-            <a:tailEnd type="triangle"/>
-          </a:ln>
-        </p:spPr>
-      </p:sp>
-      <p:sp>
-        <p:nvSpPr>
-          <p:cNvPr id="46" name="Shape 33"/>
-          <p:cNvSpPr/>
-          <p:nvPr/>
-        </p:nvSpPr>
-        <p:spPr>
-          <a:xfrm>
-            <a:off x="4050792" y="2418588"/>
-            <a:ext cx="768096" cy="0"/>
-          </a:xfrm>
-          <a:prstGeom prst="line">
-            <a:avLst/>
-          </a:prstGeom>
-          <a:noFill/>
-          <a:ln w="28575">
-            <a:solidFill>
-              <a:srgbClr val="9BA8DF"/>
-            </a:solidFill>
-            <a:prstDash val="dash"/>
-            <a:headEnd type="triangle"/>
-          </a:ln>
-        </p:spPr>
-      </p:sp>
-      <p:sp>
-        <p:nvSpPr>
-          <p:cNvPr id="47" name="Shape 34"/>
-          <p:cNvSpPr/>
-          <p:nvPr/>
-        </p:nvSpPr>
-        <p:spPr>
-          <a:xfrm>
-            <a:off x="4050792" y="3291840"/>
-            <a:ext cx="768096" cy="0"/>
-          </a:xfrm>
-          <a:prstGeom prst="line">
-            <a:avLst/>
-          </a:prstGeom>
-          <a:noFill/>
-          <a:ln w="28575">
-            <a:solidFill>
-              <a:srgbClr val="2B3A67"/>
-            </a:solidFill>
-            <a:prstDash val="dash"/>
-            <a:tailEnd type="triangle"/>
-          </a:ln>
-        </p:spPr>
-      </p:sp>
-      <p:sp>
-        <p:nvSpPr>
-          <p:cNvPr id="48" name="Shape 35"/>
-          <p:cNvSpPr/>
-          <p:nvPr/>
-        </p:nvSpPr>
-        <p:spPr>
-          <a:xfrm>
-            <a:off x="4050792" y="3675888"/>
-            <a:ext cx="768096" cy="0"/>
-          </a:xfrm>
-          <a:prstGeom prst="line">
-            <a:avLst/>
-          </a:prstGeom>
-          <a:noFill/>
-          <a:ln w="28575">
-            <a:solidFill>
-              <a:srgbClr val="9BA8DF"/>
-            </a:solidFill>
-            <a:prstDash val="dash"/>
-            <a:headEnd type="triangle"/>
-          </a:ln>
-        </p:spPr>
-      </p:sp>
-      <p:sp>
-        <p:nvSpPr>
-          <p:cNvPr id="49" name="Shape 36"/>
-          <p:cNvSpPr/>
-          <p:nvPr/>
-        </p:nvSpPr>
-        <p:spPr>
-          <a:xfrm>
-            <a:off x="4050792" y="4549140"/>
-            <a:ext cx="768096" cy="0"/>
-          </a:xfrm>
-          <a:prstGeom prst="line">
-            <a:avLst/>
-          </a:prstGeom>
-          <a:noFill/>
-          <a:ln w="28575">
-            <a:solidFill>
-              <a:srgbClr val="2B3A67"/>
-            </a:solidFill>
-            <a:prstDash val="dash"/>
-            <a:tailEnd type="triangle"/>
-          </a:ln>
-        </p:spPr>
-      </p:sp>
-      <p:sp>
-        <p:nvSpPr>
-          <p:cNvPr id="50" name="Shape 37"/>
-          <p:cNvSpPr/>
-          <p:nvPr/>
-        </p:nvSpPr>
-        <p:spPr>
-          <a:xfrm>
-            <a:off x="4050792" y="4933188"/>
-            <a:ext cx="768096" cy="0"/>
-          </a:xfrm>
-          <a:prstGeom prst="line">
-            <a:avLst/>
-          </a:prstGeom>
-          <a:noFill/>
-          <a:ln w="28575">
-            <a:solidFill>
-              <a:srgbClr val="9BA8DF"/>
-            </a:solidFill>
-            <a:prstDash val="dash"/>
-            <a:headEnd type="triangle"/>
-          </a:ln>
-        </p:spPr>
-      </p:sp>
-      <p:sp>
-        <p:nvSpPr>
-          <p:cNvPr id="51" name="Shape 38"/>
-          <p:cNvSpPr/>
-          <p:nvPr/>
-        </p:nvSpPr>
-        <p:spPr>
-          <a:xfrm>
-            <a:off x="4050792" y="5806440"/>
-            <a:ext cx="768096" cy="0"/>
-          </a:xfrm>
-          <a:prstGeom prst="line">
-            <a:avLst/>
-          </a:prstGeom>
-          <a:noFill/>
-          <a:ln w="28575">
-            <a:solidFill>
-              <a:srgbClr val="2B3A67"/>
-            </a:solidFill>
-            <a:prstDash val="dash"/>
-            <a:tailEnd type="triangle"/>
-          </a:ln>
-        </p:spPr>
-      </p:sp>
-      <p:sp>
-        <p:nvSpPr>
-          <p:cNvPr id="52" name="Shape 39"/>
-          <p:cNvSpPr/>
-          <p:nvPr/>
-        </p:nvSpPr>
-        <p:spPr>
-          <a:xfrm>
-            <a:off x="4050792" y="6190488"/>
-            <a:ext cx="768096" cy="0"/>
-          </a:xfrm>
-          <a:prstGeom prst="line">
-            <a:avLst/>
-          </a:prstGeom>
-          <a:noFill/>
-          <a:ln w="28575">
-            <a:solidFill>
-              <a:srgbClr val="9BA8DF"/>
-            </a:solidFill>
-            <a:prstDash val="dash"/>
-            <a:headEnd type="triangle"/>
-          </a:ln>
-        </p:spPr>
-      </p:sp>
-      <p:sp>
-        <p:nvSpPr>
-          <p:cNvPr id="53" name="Shape 40"/>
-          <p:cNvSpPr/>
-          <p:nvPr/>
-        </p:nvSpPr>
-        <p:spPr>
-          <a:xfrm>
-            <a:off x="8165592" y="3474720"/>
-            <a:ext cx="576072" cy="0"/>
-          </a:xfrm>
-          <a:prstGeom prst="line">
-            <a:avLst/>
-          </a:prstGeom>
-          <a:noFill/>
-          <a:ln w="28575">
-            <a:solidFill>
-              <a:srgbClr val="2B3A67"/>
-            </a:solidFill>
-            <a:prstDash val="dash"/>
-            <a:tailEnd type="triangle"/>
-          </a:ln>
-        </p:spPr>
-      </p:sp>
-      <p:sp>
-        <p:nvSpPr>
-          <p:cNvPr id="54" name="Shape 41"/>
-          <p:cNvSpPr/>
-          <p:nvPr/>
-        </p:nvSpPr>
-        <p:spPr>
-          <a:xfrm>
-            <a:off x="8796528" y="1965960"/>
-            <a:ext cx="2926080" cy="3017520"/>
-          </a:xfrm>
-          <a:prstGeom prst="roundRect">
-            <a:avLst>
-              <a:gd name="adj" fmla="val 3750"/>
-            </a:avLst>
-          </a:prstGeom>
-          <a:solidFill>
-            <a:srgbClr val="FFFFFF"/>
-          </a:solidFill>
-          <a:ln w="15875">
-            <a:solidFill>
-              <a:srgbClr val="C7D2E8"/>
-            </a:solidFill>
-            <a:prstDash val="solid"/>
-          </a:ln>
-        </p:spPr>
+                <a:spcPct val="105000"/>
+              </a:lnSpc>
+              <a:buNone/>
+            </a:pPr>
+            <a:r>
+              <a:rPr lang="en-US" sz="1250" dirty="0">
+                <a:solidFill>
+                  <a:srgbClr val="4B5563"/>
+                </a:solidFill>
+                <a:latin typeface="Calibri" pitchFamily="34" charset="0"/>
+                <a:ea typeface="Calibri" pitchFamily="34" charset="-122"/>
+                <a:cs typeface="Calibri" pitchFamily="34" charset="-120"/>
+              </a:rPr>
+              <a:t>Safety, policies and limits</a:t>
+            </a:r>
+            <a:endParaRPr lang="en-US" sz="1250" dirty="0"/>
+          </a:p>
+        </p:txBody>
       </p:sp>
       <p:pic>
         <p:nvPicPr>
-          <p:cNvPr id="55" name="Image 11" descr="preencoded.png">    </p:cNvPr>
+          <p:cNvPr id="31" name="Image 11" descr="preencoded.png">    </p:cNvPr>
           <p:cNvPicPr>
             <a:picLocks noChangeAspect="1"/>
           </p:cNvPicPr>
@@ -3202,8 +2402,8 @@
         </p:blipFill>
         <p:spPr>
           <a:xfrm>
-            <a:off x="9939528" y="2240280"/>
-            <a:ext cx="640080" cy="640080"/>
+            <a:off x="4041648" y="5340096"/>
+            <a:ext cx="384048" cy="384048"/>
           </a:xfrm>
           <a:prstGeom prst="rect">
             <a:avLst/>
@@ -3212,14 +2412,14 @@
       </p:pic>
       <p:sp>
         <p:nvSpPr>
-          <p:cNvPr id="56" name="Text 42"/>
+          <p:cNvPr id="32" name="Text 18"/>
           <p:cNvSpPr txBox="1"/>
           <p:nvPr/>
         </p:nvSpPr>
         <p:spPr>
           <a:xfrm>
-            <a:off x="8906256" y="2990088"/>
-            <a:ext cx="2706624" cy="685800"/>
+            <a:off x="4636008" y="5266944"/>
+            <a:ext cx="2560320" cy="548640"/>
           </a:xfrm>
           <a:prstGeom prst="rect">
             <a:avLst/>
@@ -3228,53 +2428,195 @@
           <a:ln/>
         </p:spPr>
         <p:txBody>
-          <a:bodyPr wrap="square" lIns="0" tIns="0" rIns="0" bIns="0" rtlCol="0" anchor="ctr"/>
-          <a:lstStyle/>
-          <a:p>
-            <a:pPr algn="ctr" indent="0" marL="0">
+          <a:bodyPr wrap="square" lIns="0" tIns="0" rIns="0" bIns="0" rtlCol="0" anchor="t"/>
+          <a:lstStyle/>
+          <a:p>
+            <a:pPr indent="0" marL="0">
               <a:lnSpc>
                 <a:spcPct val="105000"/>
               </a:lnSpc>
               <a:buNone/>
             </a:pPr>
             <a:r>
-              <a:rPr lang="en-US" sz="1900" b="1" dirty="0">
-                <a:solidFill>
-                  <a:srgbClr val="1E3A8A"/>
-                </a:solidFill>
-                <a:latin typeface="Calibri" pitchFamily="34" charset="0"/>
-                <a:ea typeface="Calibri" pitchFamily="34" charset="-122"/>
-                <a:cs typeface="Calibri" pitchFamily="34" charset="-120"/>
-              </a:rPr>
-              <a:t>Final Response</a:t>
-            </a:r>
-            <a:endParaRPr lang="en-US" sz="1900" dirty="0"/>
-          </a:p>
-          <a:p>
-            <a:pPr algn="ctr" indent="0" marL="0">
+              <a:rPr lang="en-US" sz="1450" dirty="0">
+                <a:solidFill>
+                  <a:srgbClr val="1F2937"/>
+                </a:solidFill>
+                <a:latin typeface="Calibri" pitchFamily="34" charset="0"/>
+                <a:ea typeface="Calibri" pitchFamily="34" charset="-122"/>
+                <a:cs typeface="Calibri" pitchFamily="34" charset="-120"/>
+              </a:rPr>
+              <a:t>Records everything</a:t>
+            </a:r>
+            <a:endParaRPr lang="en-US" sz="1450" dirty="0"/>
+          </a:p>
+        </p:txBody>
+      </p:sp>
+      <p:sp>
+        <p:nvSpPr>
+          <p:cNvPr id="33" name="Text 19"/>
+          <p:cNvSpPr txBox="1"/>
+          <p:nvPr/>
+        </p:nvSpPr>
+        <p:spPr>
+          <a:xfrm>
+            <a:off x="4636008" y="5586984"/>
+            <a:ext cx="2560320" cy="502920"/>
+          </a:xfrm>
+          <a:prstGeom prst="rect">
+            <a:avLst/>
+          </a:prstGeom>
+          <a:noFill/>
+          <a:ln/>
+        </p:spPr>
+        <p:txBody>
+          <a:bodyPr wrap="square" lIns="0" tIns="0" rIns="0" bIns="0" rtlCol="0" anchor="t"/>
+          <a:lstStyle/>
+          <a:p>
+            <a:pPr indent="0" marL="0">
               <a:lnSpc>
                 <a:spcPct val="105000"/>
               </a:lnSpc>
               <a:buNone/>
             </a:pPr>
             <a:r>
-              <a:rPr lang="en-US" sz="1900" b="1" dirty="0">
-                <a:solidFill>
-                  <a:srgbClr val="1E3A8A"/>
-                </a:solidFill>
-                <a:latin typeface="Calibri" pitchFamily="34" charset="0"/>
-                <a:ea typeface="Calibri" pitchFamily="34" charset="-122"/>
-                <a:cs typeface="Calibri" pitchFamily="34" charset="-120"/>
-              </a:rPr>
-              <a:t>and Trace</a:t>
-            </a:r>
-            <a:endParaRPr lang="en-US" sz="1900" dirty="0"/>
-          </a:p>
-        </p:txBody>
+              <a:rPr lang="en-US" sz="1250" dirty="0">
+                <a:solidFill>
+                  <a:srgbClr val="4B5563"/>
+                </a:solidFill>
+                <a:latin typeface="Calibri" pitchFamily="34" charset="0"/>
+                <a:ea typeface="Calibri" pitchFamily="34" charset="-122"/>
+                <a:cs typeface="Calibri" pitchFamily="34" charset="-120"/>
+              </a:rPr>
+              <a:t>Full trace for transparency</a:t>
+            </a:r>
+            <a:endParaRPr lang="en-US" sz="1250" dirty="0"/>
+          </a:p>
+          <a:p>
+            <a:pPr indent="0" marL="0">
+              <a:lnSpc>
+                <a:spcPct val="105000"/>
+              </a:lnSpc>
+              <a:buNone/>
+            </a:pPr>
+            <a:r>
+              <a:rPr lang="en-US" sz="1250" dirty="0">
+                <a:solidFill>
+                  <a:srgbClr val="4B5563"/>
+                </a:solidFill>
+                <a:latin typeface="Calibri" pitchFamily="34" charset="0"/>
+                <a:ea typeface="Calibri" pitchFamily="34" charset="-122"/>
+                <a:cs typeface="Calibri" pitchFamily="34" charset="-120"/>
+              </a:rPr>
+              <a:t>and debugging</a:t>
+            </a:r>
+            <a:endParaRPr lang="en-US" sz="1250" dirty="0"/>
+          </a:p>
+        </p:txBody>
+      </p:sp>
+      <p:sp>
+        <p:nvSpPr>
+          <p:cNvPr id="34" name="Shape 20"/>
+          <p:cNvSpPr/>
+          <p:nvPr/>
+        </p:nvSpPr>
+        <p:spPr>
+          <a:xfrm>
+            <a:off x="3136392" y="1965960"/>
+            <a:ext cx="557784" cy="0"/>
+          </a:xfrm>
+          <a:prstGeom prst="line">
+            <a:avLst/>
+          </a:prstGeom>
+          <a:noFill/>
+          <a:ln w="28575">
+            <a:solidFill>
+              <a:srgbClr val="2B3A67"/>
+            </a:solidFill>
+            <a:prstDash val="dash"/>
+            <a:tailEnd type="triangle"/>
+          </a:ln>
+        </p:spPr>
+      </p:sp>
+      <p:sp>
+        <p:nvSpPr>
+          <p:cNvPr id="35" name="Shape 21"/>
+          <p:cNvSpPr/>
+          <p:nvPr/>
+        </p:nvSpPr>
+        <p:spPr>
+          <a:xfrm>
+            <a:off x="3136392" y="4617720"/>
+            <a:ext cx="557784" cy="0"/>
+          </a:xfrm>
+          <a:prstGeom prst="line">
+            <a:avLst/>
+          </a:prstGeom>
+          <a:noFill/>
+          <a:ln w="28575">
+            <a:solidFill>
+              <a:srgbClr val="9BA8DF"/>
+            </a:solidFill>
+            <a:prstDash val="dash"/>
+            <a:headEnd type="triangle"/>
+          </a:ln>
+        </p:spPr>
+      </p:sp>
+      <p:sp>
+        <p:nvSpPr>
+          <p:cNvPr id="36" name="Shape 22"/>
+          <p:cNvSpPr/>
+          <p:nvPr/>
+        </p:nvSpPr>
+        <p:spPr>
+          <a:xfrm>
+            <a:off x="8037576" y="411480"/>
+            <a:ext cx="3703320" cy="1097280"/>
+          </a:xfrm>
+          <a:prstGeom prst="roundRect">
+            <a:avLst>
+              <a:gd name="adj" fmla="val 10000"/>
+            </a:avLst>
+          </a:prstGeom>
+          <a:solidFill>
+            <a:srgbClr val="FFFFFF"/>
+          </a:solidFill>
+          <a:ln w="15875">
+            <a:solidFill>
+              <a:srgbClr val="D8D2F2"/>
+            </a:solidFill>
+            <a:prstDash val="solid"/>
+          </a:ln>
+        </p:spPr>
+      </p:sp>
+      <p:sp>
+        <p:nvSpPr>
+          <p:cNvPr id="37" name="Shape 23"/>
+          <p:cNvSpPr/>
+          <p:nvPr/>
+        </p:nvSpPr>
+        <p:spPr>
+          <a:xfrm>
+            <a:off x="8238744" y="694944"/>
+            <a:ext cx="566928" cy="566928"/>
+          </a:xfrm>
+          <a:prstGeom prst="ellipse">
+            <a:avLst/>
+          </a:prstGeom>
+          <a:solidFill>
+            <a:srgbClr val="6D28D9"/>
+          </a:solidFill>
+          <a:ln w="12700">
+            <a:solidFill>
+              <a:srgbClr val="6D28D9"/>
+            </a:solidFill>
+            <a:prstDash val="solid"/>
+          </a:ln>
+        </p:spPr>
       </p:sp>
       <p:pic>
         <p:nvPicPr>
-          <p:cNvPr id="57" name="Image 12" descr="preencoded.png">    </p:cNvPr>
+          <p:cNvPr id="38" name="Image 12" descr="preencoded.png">    </p:cNvPr>
           <p:cNvPicPr>
             <a:picLocks noChangeAspect="1"/>
           </p:cNvPicPr>
@@ -3288,8 +2630,8 @@
         </p:blipFill>
         <p:spPr>
           <a:xfrm>
-            <a:off x="9070848" y="3822192"/>
-            <a:ext cx="201168" cy="201168"/>
+            <a:off x="8366760" y="822960"/>
+            <a:ext cx="310896" cy="310896"/>
           </a:xfrm>
           <a:prstGeom prst="rect">
             <a:avLst/>
@@ -3298,14 +2640,14 @@
       </p:pic>
       <p:sp>
         <p:nvSpPr>
-          <p:cNvPr id="58" name="Text 43"/>
+          <p:cNvPr id="39" name="Text 24"/>
           <p:cNvSpPr txBox="1"/>
           <p:nvPr/>
         </p:nvSpPr>
         <p:spPr>
           <a:xfrm>
-            <a:off x="9345168" y="3794760"/>
-            <a:ext cx="2286000" cy="256032"/>
+            <a:off x="8979408" y="502920"/>
+            <a:ext cx="2606040" cy="347472"/>
           </a:xfrm>
           <a:prstGeom prst="rect">
             <a:avLst/>
@@ -3318,10 +2660,55 @@
           <a:lstStyle/>
           <a:p>
             <a:pPr indent="0" marL="0">
-              <a:buNone/>
-            </a:pPr>
-            <a:r>
-              <a:rPr lang="en-US" sz="1300" dirty="0">
+              <a:lnSpc>
+                <a:spcPct val="95000"/>
+              </a:lnSpc>
+              <a:buNone/>
+            </a:pPr>
+            <a:r>
+              <a:rPr lang="en-US" sz="1650" b="1" dirty="0">
+                <a:solidFill>
+                  <a:srgbClr val="5B21B6"/>
+                </a:solidFill>
+                <a:latin typeface="Calibri" pitchFamily="34" charset="0"/>
+                <a:ea typeface="Calibri" pitchFamily="34" charset="-122"/>
+                <a:cs typeface="Calibri" pitchFamily="34" charset="-120"/>
+              </a:rPr>
+              <a:t>Model</a:t>
+            </a:r>
+            <a:endParaRPr lang="en-US" sz="1650" dirty="0"/>
+          </a:p>
+        </p:txBody>
+      </p:sp>
+      <p:sp>
+        <p:nvSpPr>
+          <p:cNvPr id="40" name="Text 25"/>
+          <p:cNvSpPr txBox="1"/>
+          <p:nvPr/>
+        </p:nvSpPr>
+        <p:spPr>
+          <a:xfrm>
+            <a:off x="8979408" y="832104"/>
+            <a:ext cx="2606040" cy="640080"/>
+          </a:xfrm>
+          <a:prstGeom prst="rect">
+            <a:avLst/>
+          </a:prstGeom>
+          <a:noFill/>
+          <a:ln/>
+        </p:spPr>
+        <p:txBody>
+          <a:bodyPr wrap="square" lIns="0" tIns="0" rIns="0" bIns="0" rtlCol="0" anchor="t"/>
+          <a:lstStyle/>
+          <a:p>
+            <a:pPr indent="0" marL="0">
+              <a:lnSpc>
+                <a:spcPct val="110000"/>
+              </a:lnSpc>
+              <a:buNone/>
+            </a:pPr>
+            <a:r>
+              <a:rPr lang="en-US" sz="1200" dirty="0">
                 <a:solidFill>
                   <a:srgbClr val="1F2937"/>
                 </a:solidFill>
@@ -3329,15 +2716,87 @@
                 <a:ea typeface="Calibri" pitchFamily="34" charset="-122"/>
                 <a:cs typeface="Calibri" pitchFamily="34" charset="-120"/>
               </a:rPr>
-              <a:t>Answer or result</a:t>
-            </a:r>
-            <a:endParaRPr lang="en-US" sz="1300" dirty="0"/>
-          </a:p>
-        </p:txBody>
+              <a:t>The LLM that reasons, plans</a:t>
+            </a:r>
+            <a:endParaRPr lang="en-US" sz="1200" dirty="0"/>
+          </a:p>
+          <a:p>
+            <a:pPr indent="0" marL="0">
+              <a:lnSpc>
+                <a:spcPct val="110000"/>
+              </a:lnSpc>
+              <a:buNone/>
+            </a:pPr>
+            <a:r>
+              <a:rPr lang="en-US" sz="1200" dirty="0">
+                <a:solidFill>
+                  <a:srgbClr val="1F2937"/>
+                </a:solidFill>
+                <a:latin typeface="Calibri" pitchFamily="34" charset="0"/>
+                <a:ea typeface="Calibri" pitchFamily="34" charset="-122"/>
+                <a:cs typeface="Calibri" pitchFamily="34" charset="-120"/>
+              </a:rPr>
+              <a:t>and generates responses.</a:t>
+            </a:r>
+            <a:endParaRPr lang="en-US" sz="1200" dirty="0"/>
+          </a:p>
+        </p:txBody>
+      </p:sp>
+      <p:sp>
+        <p:nvSpPr>
+          <p:cNvPr id="41" name="Shape 26"/>
+          <p:cNvSpPr/>
+          <p:nvPr/>
+        </p:nvSpPr>
+        <p:spPr>
+          <a:xfrm>
+            <a:off x="8037576" y="1668780"/>
+            <a:ext cx="3703320" cy="1097280"/>
+          </a:xfrm>
+          <a:prstGeom prst="roundRect">
+            <a:avLst>
+              <a:gd name="adj" fmla="val 10000"/>
+            </a:avLst>
+          </a:prstGeom>
+          <a:solidFill>
+            <a:srgbClr val="F6F7FE"/>
+          </a:solidFill>
+          <a:ln w="15875">
+            <a:solidFill>
+              <a:srgbClr val="C7CCF7"/>
+            </a:solidFill>
+            <a:prstDash val="solid"/>
+          </a:ln>
+        </p:spPr>
+      </p:sp>
+      <p:sp>
+        <p:nvSpPr>
+          <p:cNvPr id="42" name="Shape 27"/>
+          <p:cNvSpPr/>
+          <p:nvPr/>
+        </p:nvSpPr>
+        <p:spPr>
+          <a:xfrm>
+            <a:off x="8238744" y="1952244"/>
+            <a:ext cx="566928" cy="566928"/>
+          </a:xfrm>
+          <a:prstGeom prst="ellipse">
+            <a:avLst/>
+          </a:prstGeom>
+          <a:solidFill>
+            <a:srgbClr val="4338CA"/>
+          </a:solidFill>
+          <a:ln w="12700">
+            <a:solidFill>
+              <a:srgbClr val="4338CA"/>
+            </a:solidFill>
+            <a:prstDash val="solid"/>
+          </a:ln>
+        </p:spPr>
       </p:sp>
       <p:pic>
         <p:nvPicPr>
-          <p:cNvPr id="59" name="Image 13" descr="preencoded.png">    </p:cNvPr>
+          <p:cNvPr id="43" name="Image 13" descr="preencoded.png">    </p:cNvPr>
           <p:cNvPicPr>
             <a:picLocks noChangeAspect="1"/>
           </p:cNvPicPr>
@@ -3351,8 +2810,8 @@
         </p:blipFill>
         <p:spPr>
           <a:xfrm>
-            <a:off x="9070848" y="4114800"/>
-            <a:ext cx="201168" cy="201168"/>
+            <a:off x="8366760" y="2080260"/>
+            <a:ext cx="310896" cy="310896"/>
           </a:xfrm>
           <a:prstGeom prst="rect">
             <a:avLst/>
@@ -3361,14 +2820,14 @@
       </p:pic>
       <p:sp>
         <p:nvSpPr>
-          <p:cNvPr id="60" name="Text 44"/>
+          <p:cNvPr id="44" name="Text 28"/>
           <p:cNvSpPr txBox="1"/>
           <p:nvPr/>
         </p:nvSpPr>
         <p:spPr>
           <a:xfrm>
-            <a:off x="9345168" y="4087368"/>
-            <a:ext cx="2286000" cy="256032"/>
+            <a:off x="8979408" y="1760220"/>
+            <a:ext cx="2606040" cy="347472"/>
           </a:xfrm>
           <a:prstGeom prst="rect">
             <a:avLst/>
@@ -3381,10 +2840,55 @@
           <a:lstStyle/>
           <a:p>
             <a:pPr indent="0" marL="0">
-              <a:buNone/>
-            </a:pPr>
-            <a:r>
-              <a:rPr lang="en-US" sz="1300" dirty="0">
+              <a:lnSpc>
+                <a:spcPct val="95000"/>
+              </a:lnSpc>
+              <a:buNone/>
+            </a:pPr>
+            <a:r>
+              <a:rPr lang="en-US" sz="1650" b="1" dirty="0">
+                <a:solidFill>
+                  <a:srgbClr val="3730A3"/>
+                </a:solidFill>
+                <a:latin typeface="Calibri" pitchFamily="34" charset="0"/>
+                <a:ea typeface="Calibri" pitchFamily="34" charset="-122"/>
+                <a:cs typeface="Calibri" pitchFamily="34" charset="-120"/>
+              </a:rPr>
+              <a:t>Peer Agents (A2A)</a:t>
+            </a:r>
+            <a:endParaRPr lang="en-US" sz="1650" dirty="0"/>
+          </a:p>
+        </p:txBody>
+      </p:sp>
+      <p:sp>
+        <p:nvSpPr>
+          <p:cNvPr id="45" name="Text 29"/>
+          <p:cNvSpPr txBox="1"/>
+          <p:nvPr/>
+        </p:nvSpPr>
+        <p:spPr>
+          <a:xfrm>
+            <a:off x="8979408" y="2089404"/>
+            <a:ext cx="2606040" cy="640080"/>
+          </a:xfrm>
+          <a:prstGeom prst="rect">
+            <a:avLst/>
+          </a:prstGeom>
+          <a:noFill/>
+          <a:ln/>
+        </p:spPr>
+        <p:txBody>
+          <a:bodyPr wrap="square" lIns="0" tIns="0" rIns="0" bIns="0" rtlCol="0" anchor="t"/>
+          <a:lstStyle/>
+          <a:p>
+            <a:pPr indent="0" marL="0">
+              <a:lnSpc>
+                <a:spcPct val="110000"/>
+              </a:lnSpc>
+              <a:buNone/>
+            </a:pPr>
+            <a:r>
+              <a:rPr lang="en-US" sz="1200" dirty="0">
                 <a:solidFill>
                   <a:srgbClr val="1F2937"/>
                 </a:solidFill>
@@ -3392,15 +2896,87 @@
                 <a:ea typeface="Calibri" pitchFamily="34" charset="-122"/>
                 <a:cs typeface="Calibri" pitchFamily="34" charset="-120"/>
               </a:rPr>
-              <a:t>What was done</a:t>
-            </a:r>
-            <a:endParaRPr lang="en-US" sz="1300" dirty="0"/>
-          </a:p>
-        </p:txBody>
+              <a:t>Other agents the harness</a:t>
+            </a:r>
+            <a:endParaRPr lang="en-US" sz="1200" dirty="0"/>
+          </a:p>
+          <a:p>
+            <a:pPr indent="0" marL="0">
+              <a:lnSpc>
+                <a:spcPct val="110000"/>
+              </a:lnSpc>
+              <a:buNone/>
+            </a:pPr>
+            <a:r>
+              <a:rPr lang="en-US" sz="1200" dirty="0">
+                <a:solidFill>
+                  <a:srgbClr val="1F2937"/>
+                </a:solidFill>
+                <a:latin typeface="Calibri" pitchFamily="34" charset="0"/>
+                <a:ea typeface="Calibri" pitchFamily="34" charset="-122"/>
+                <a:cs typeface="Calibri" pitchFamily="34" charset="-120"/>
+              </a:rPr>
+              <a:t>delegates tasks to over A2A.</a:t>
+            </a:r>
+            <a:endParaRPr lang="en-US" sz="1200" dirty="0"/>
+          </a:p>
+        </p:txBody>
+      </p:sp>
+      <p:sp>
+        <p:nvSpPr>
+          <p:cNvPr id="46" name="Shape 30"/>
+          <p:cNvSpPr/>
+          <p:nvPr/>
+        </p:nvSpPr>
+        <p:spPr>
+          <a:xfrm>
+            <a:off x="8037576" y="2926080"/>
+            <a:ext cx="3703320" cy="1097280"/>
+          </a:xfrm>
+          <a:prstGeom prst="roundRect">
+            <a:avLst>
+              <a:gd name="adj" fmla="val 10000"/>
+            </a:avLst>
+          </a:prstGeom>
+          <a:solidFill>
+            <a:srgbClr val="F7FCF8"/>
+          </a:solidFill>
+          <a:ln w="15875">
+            <a:solidFill>
+              <a:srgbClr val="BFE0C7"/>
+            </a:solidFill>
+            <a:prstDash val="solid"/>
+          </a:ln>
+        </p:spPr>
+      </p:sp>
+      <p:sp>
+        <p:nvSpPr>
+          <p:cNvPr id="47" name="Shape 31"/>
+          <p:cNvSpPr/>
+          <p:nvPr/>
+        </p:nvSpPr>
+        <p:spPr>
+          <a:xfrm>
+            <a:off x="8238744" y="3209544"/>
+            <a:ext cx="566928" cy="566928"/>
+          </a:xfrm>
+          <a:prstGeom prst="ellipse">
+            <a:avLst/>
+          </a:prstGeom>
+          <a:solidFill>
+            <a:srgbClr val="15803D"/>
+          </a:solidFill>
+          <a:ln w="12700">
+            <a:solidFill>
+              <a:srgbClr val="15803D"/>
+            </a:solidFill>
+            <a:prstDash val="solid"/>
+          </a:ln>
+        </p:spPr>
       </p:sp>
       <p:pic>
         <p:nvPicPr>
-          <p:cNvPr id="61" name="Image 14" descr="preencoded.png">    </p:cNvPr>
+          <p:cNvPr id="48" name="Image 14" descr="preencoded.png">    </p:cNvPr>
           <p:cNvPicPr>
             <a:picLocks noChangeAspect="1"/>
           </p:cNvPicPr>
@@ -3414,8 +2990,8 @@
         </p:blipFill>
         <p:spPr>
           <a:xfrm>
-            <a:off x="9070848" y="4407408"/>
-            <a:ext cx="201168" cy="201168"/>
+            <a:off x="8366760" y="3337560"/>
+            <a:ext cx="310896" cy="310896"/>
           </a:xfrm>
           <a:prstGeom prst="rect">
             <a:avLst/>
@@ -3424,14 +3000,14 @@
       </p:pic>
       <p:sp>
         <p:nvSpPr>
-          <p:cNvPr id="62" name="Text 45"/>
+          <p:cNvPr id="49" name="Text 32"/>
           <p:cNvSpPr txBox="1"/>
           <p:nvPr/>
         </p:nvSpPr>
         <p:spPr>
           <a:xfrm>
-            <a:off x="9345168" y="4379976"/>
-            <a:ext cx="2286000" cy="256032"/>
+            <a:off x="8979408" y="3017520"/>
+            <a:ext cx="2606040" cy="347472"/>
           </a:xfrm>
           <a:prstGeom prst="rect">
             <a:avLst/>
@@ -3444,10 +3020,55 @@
           <a:lstStyle/>
           <a:p>
             <a:pPr indent="0" marL="0">
-              <a:buNone/>
-            </a:pPr>
-            <a:r>
-              <a:rPr lang="en-US" sz="1300" dirty="0">
+              <a:lnSpc>
+                <a:spcPct val="95000"/>
+              </a:lnSpc>
+              <a:buNone/>
+            </a:pPr>
+            <a:r>
+              <a:rPr lang="en-US" sz="1650" b="1" dirty="0">
+                <a:solidFill>
+                  <a:srgbClr val="166534"/>
+                </a:solidFill>
+                <a:latin typeface="Calibri" pitchFamily="34" charset="0"/>
+                <a:ea typeface="Calibri" pitchFamily="34" charset="-122"/>
+                <a:cs typeface="Calibri" pitchFamily="34" charset="-120"/>
+              </a:rPr>
+              <a:t>Tools and MCP Servers</a:t>
+            </a:r>
+            <a:endParaRPr lang="en-US" sz="1650" dirty="0"/>
+          </a:p>
+        </p:txBody>
+      </p:sp>
+      <p:sp>
+        <p:nvSpPr>
+          <p:cNvPr id="50" name="Text 33"/>
+          <p:cNvSpPr txBox="1"/>
+          <p:nvPr/>
+        </p:nvSpPr>
+        <p:spPr>
+          <a:xfrm>
+            <a:off x="8979408" y="3346704"/>
+            <a:ext cx="2606040" cy="640080"/>
+          </a:xfrm>
+          <a:prstGeom prst="rect">
+            <a:avLst/>
+          </a:prstGeom>
+          <a:noFill/>
+          <a:ln/>
+        </p:spPr>
+        <p:txBody>
+          <a:bodyPr wrap="square" lIns="0" tIns="0" rIns="0" bIns="0" rtlCol="0" anchor="t"/>
+          <a:lstStyle/>
+          <a:p>
+            <a:pPr indent="0" marL="0">
+              <a:lnSpc>
+                <a:spcPct val="110000"/>
+              </a:lnSpc>
+              <a:buNone/>
+            </a:pPr>
+            <a:r>
+              <a:rPr lang="en-US" sz="1200" dirty="0">
                 <a:solidFill>
                   <a:srgbClr val="1F2937"/>
                 </a:solidFill>
@@ -3455,15 +3076,87 @@
                 <a:ea typeface="Calibri" pitchFamily="34" charset="-122"/>
                 <a:cs typeface="Calibri" pitchFamily="34" charset="-120"/>
               </a:rPr>
-              <a:t>What was used</a:t>
-            </a:r>
-            <a:endParaRPr lang="en-US" sz="1300" dirty="0"/>
-          </a:p>
-        </p:txBody>
+              <a:t>External capabilities the</a:t>
+            </a:r>
+            <a:endParaRPr lang="en-US" sz="1200" dirty="0"/>
+          </a:p>
+          <a:p>
+            <a:pPr indent="0" marL="0">
+              <a:lnSpc>
+                <a:spcPct val="110000"/>
+              </a:lnSpc>
+              <a:buNone/>
+            </a:pPr>
+            <a:r>
+              <a:rPr lang="en-US" sz="1200" dirty="0">
+                <a:solidFill>
+                  <a:srgbClr val="1F2937"/>
+                </a:solidFill>
+                <a:latin typeface="Calibri" pitchFamily="34" charset="0"/>
+                <a:ea typeface="Calibri" pitchFamily="34" charset="-122"/>
+                <a:cs typeface="Calibri" pitchFamily="34" charset="-120"/>
+              </a:rPr>
+              <a:t>agent can use.</a:t>
+            </a:r>
+            <a:endParaRPr lang="en-US" sz="1200" dirty="0"/>
+          </a:p>
+        </p:txBody>
+      </p:sp>
+      <p:sp>
+        <p:nvSpPr>
+          <p:cNvPr id="51" name="Shape 34"/>
+          <p:cNvSpPr/>
+          <p:nvPr/>
+        </p:nvSpPr>
+        <p:spPr>
+          <a:xfrm>
+            <a:off x="8037576" y="4183380"/>
+            <a:ext cx="3703320" cy="1097280"/>
+          </a:xfrm>
+          <a:prstGeom prst="roundRect">
+            <a:avLst>
+              <a:gd name="adj" fmla="val 10000"/>
+            </a:avLst>
+          </a:prstGeom>
+          <a:solidFill>
+            <a:srgbClr val="FFFBF7"/>
+          </a:solidFill>
+          <a:ln w="15875">
+            <a:solidFill>
+              <a:srgbClr val="F8D6BC"/>
+            </a:solidFill>
+            <a:prstDash val="solid"/>
+          </a:ln>
+        </p:spPr>
+      </p:sp>
+      <p:sp>
+        <p:nvSpPr>
+          <p:cNvPr id="52" name="Shape 35"/>
+          <p:cNvSpPr/>
+          <p:nvPr/>
+        </p:nvSpPr>
+        <p:spPr>
+          <a:xfrm>
+            <a:off x="8238744" y="4466844"/>
+            <a:ext cx="566928" cy="566928"/>
+          </a:xfrm>
+          <a:prstGeom prst="ellipse">
+            <a:avLst/>
+          </a:prstGeom>
+          <a:solidFill>
+            <a:srgbClr val="EA580C"/>
+          </a:solidFill>
+          <a:ln w="12700">
+            <a:solidFill>
+              <a:srgbClr val="EA580C"/>
+            </a:solidFill>
+            <a:prstDash val="solid"/>
+          </a:ln>
+        </p:spPr>
       </p:sp>
       <p:pic>
         <p:nvPicPr>
-          <p:cNvPr id="63" name="Image 15" descr="preencoded.png">    </p:cNvPr>
+          <p:cNvPr id="53" name="Image 15" descr="preencoded.png">    </p:cNvPr>
           <p:cNvPicPr>
             <a:picLocks noChangeAspect="1"/>
           </p:cNvPicPr>
@@ -3477,8 +3170,8 @@
         </p:blipFill>
         <p:spPr>
           <a:xfrm>
-            <a:off x="9070848" y="4700016"/>
-            <a:ext cx="201168" cy="201168"/>
+            <a:off x="8366760" y="4594860"/>
+            <a:ext cx="310896" cy="310896"/>
           </a:xfrm>
           <a:prstGeom prst="rect">
             <a:avLst/>
@@ -3487,14 +3180,14 @@
       </p:pic>
       <p:sp>
         <p:nvSpPr>
-          <p:cNvPr id="64" name="Text 46"/>
+          <p:cNvPr id="54" name="Text 36"/>
           <p:cNvSpPr txBox="1"/>
           <p:nvPr/>
         </p:nvSpPr>
         <p:spPr>
           <a:xfrm>
-            <a:off x="9345168" y="4672584"/>
-            <a:ext cx="2286000" cy="256032"/>
+            <a:off x="8979408" y="4274820"/>
+            <a:ext cx="2606040" cy="347472"/>
           </a:xfrm>
           <a:prstGeom prst="rect">
             <a:avLst/>
@@ -3507,10 +3200,55 @@
           <a:lstStyle/>
           <a:p>
             <a:pPr indent="0" marL="0">
-              <a:buNone/>
-            </a:pPr>
-            <a:r>
-              <a:rPr lang="en-US" sz="1300" dirty="0">
+              <a:lnSpc>
+                <a:spcPct val="95000"/>
+              </a:lnSpc>
+              <a:buNone/>
+            </a:pPr>
+            <a:r>
+              <a:rPr lang="en-US" sz="1650" b="1" dirty="0">
+                <a:solidFill>
+                  <a:srgbClr val="C2410C"/>
+                </a:solidFill>
+                <a:latin typeface="Calibri" pitchFamily="34" charset="0"/>
+                <a:ea typeface="Calibri" pitchFamily="34" charset="-122"/>
+                <a:cs typeface="Calibri" pitchFamily="34" charset="-120"/>
+              </a:rPr>
+              <a:t>Sandbox</a:t>
+            </a:r>
+            <a:endParaRPr lang="en-US" sz="1650" dirty="0"/>
+          </a:p>
+        </p:txBody>
+      </p:sp>
+      <p:sp>
+        <p:nvSpPr>
+          <p:cNvPr id="55" name="Text 37"/>
+          <p:cNvSpPr txBox="1"/>
+          <p:nvPr/>
+        </p:nvSpPr>
+        <p:spPr>
+          <a:xfrm>
+            <a:off x="8979408" y="4604004"/>
+            <a:ext cx="2606040" cy="640080"/>
+          </a:xfrm>
+          <a:prstGeom prst="rect">
+            <a:avLst/>
+          </a:prstGeom>
+          <a:noFill/>
+          <a:ln/>
+        </p:spPr>
+        <p:txBody>
+          <a:bodyPr wrap="square" lIns="0" tIns="0" rIns="0" bIns="0" rtlCol="0" anchor="t"/>
+          <a:lstStyle/>
+          <a:p>
+            <a:pPr indent="0" marL="0">
+              <a:lnSpc>
+                <a:spcPct val="110000"/>
+              </a:lnSpc>
+              <a:buNone/>
+            </a:pPr>
+            <a:r>
+              <a:rPr lang="en-US" sz="1200" dirty="0">
                 <a:solidFill>
                   <a:srgbClr val="1F2937"/>
                 </a:solidFill>
@@ -3518,11 +3256,451 @@
                 <a:ea typeface="Calibri" pitchFamily="34" charset="-122"/>
                 <a:cs typeface="Calibri" pitchFamily="34" charset="-120"/>
               </a:rPr>
-              <a:t>What was decided</a:t>
-            </a:r>
-            <a:endParaRPr lang="en-US" sz="1300" dirty="0"/>
-          </a:p>
-        </p:txBody>
+              <a:t>Isolated environment to run</a:t>
+            </a:r>
+            <a:endParaRPr lang="en-US" sz="1200" dirty="0"/>
+          </a:p>
+          <a:p>
+            <a:pPr indent="0" marL="0">
+              <a:lnSpc>
+                <a:spcPct val="110000"/>
+              </a:lnSpc>
+              <a:buNone/>
+            </a:pPr>
+            <a:r>
+              <a:rPr lang="en-US" sz="1200" dirty="0">
+                <a:solidFill>
+                  <a:srgbClr val="1F2937"/>
+                </a:solidFill>
+                <a:latin typeface="Calibri" pitchFamily="34" charset="0"/>
+                <a:ea typeface="Calibri" pitchFamily="34" charset="-122"/>
+                <a:cs typeface="Calibri" pitchFamily="34" charset="-120"/>
+              </a:rPr>
+              <a:t>code and process data safely.</a:t>
+            </a:r>
+            <a:endParaRPr lang="en-US" sz="1200" dirty="0"/>
+          </a:p>
+        </p:txBody>
+      </p:sp>
+      <p:sp>
+        <p:nvSpPr>
+          <p:cNvPr id="56" name="Shape 38"/>
+          <p:cNvSpPr/>
+          <p:nvPr/>
+        </p:nvSpPr>
+        <p:spPr>
+          <a:xfrm>
+            <a:off x="8037576" y="5440680"/>
+            <a:ext cx="3703320" cy="1097280"/>
+          </a:xfrm>
+          <a:prstGeom prst="roundRect">
+            <a:avLst>
+              <a:gd name="adj" fmla="val 10000"/>
+            </a:avLst>
+          </a:prstGeom>
+          <a:solidFill>
+            <a:srgbClr val="FFFDF6"/>
+          </a:solidFill>
+          <a:ln w="15875">
+            <a:solidFill>
+              <a:srgbClr val="F7E0AE"/>
+            </a:solidFill>
+            <a:prstDash val="solid"/>
+          </a:ln>
+        </p:spPr>
+      </p:sp>
+      <p:sp>
+        <p:nvSpPr>
+          <p:cNvPr id="57" name="Shape 39"/>
+          <p:cNvSpPr/>
+          <p:nvPr/>
+        </p:nvSpPr>
+        <p:spPr>
+          <a:xfrm>
+            <a:off x="8238744" y="5724144"/>
+            <a:ext cx="566928" cy="566928"/>
+          </a:xfrm>
+          <a:prstGeom prst="ellipse">
+            <a:avLst/>
+          </a:prstGeom>
+          <a:solidFill>
+            <a:srgbClr val="F0A81E"/>
+          </a:solidFill>
+          <a:ln w="12700">
+            <a:solidFill>
+              <a:srgbClr val="F0A81E"/>
+            </a:solidFill>
+            <a:prstDash val="solid"/>
+          </a:ln>
+        </p:spPr>
+      </p:sp>
+      <p:pic>
+        <p:nvPicPr>
+          <p:cNvPr id="58" name="Image 16" descr="preencoded.png">    </p:cNvPr>
+          <p:cNvPicPr>
+            <a:picLocks noChangeAspect="1"/>
+          </p:cNvPicPr>
+          <p:nvPr/>
+        </p:nvPicPr>
+        <p:blipFill>
+          <a:blip r:embed="rId17"/>
+          <a:stretch>
+            <a:fillRect/>
+          </a:stretch>
+        </p:blipFill>
+        <p:spPr>
+          <a:xfrm>
+            <a:off x="8366760" y="5852160"/>
+            <a:ext cx="310896" cy="310896"/>
+          </a:xfrm>
+          <a:prstGeom prst="rect">
+            <a:avLst/>
+          </a:prstGeom>
+        </p:spPr>
+      </p:pic>
+      <p:sp>
+        <p:nvSpPr>
+          <p:cNvPr id="59" name="Text 40"/>
+          <p:cNvSpPr txBox="1"/>
+          <p:nvPr/>
+        </p:nvSpPr>
+        <p:spPr>
+          <a:xfrm>
+            <a:off x="8979408" y="5532120"/>
+            <a:ext cx="2606040" cy="347472"/>
+          </a:xfrm>
+          <a:prstGeom prst="rect">
+            <a:avLst/>
+          </a:prstGeom>
+          <a:noFill/>
+          <a:ln/>
+        </p:spPr>
+        <p:txBody>
+          <a:bodyPr wrap="square" lIns="0" tIns="0" rIns="0" bIns="0" rtlCol="0" anchor="t"/>
+          <a:lstStyle/>
+          <a:p>
+            <a:pPr indent="0" marL="0">
+              <a:lnSpc>
+                <a:spcPct val="95000"/>
+              </a:lnSpc>
+              <a:buNone/>
+            </a:pPr>
+            <a:r>
+              <a:rPr lang="en-US" sz="1650" b="1" dirty="0">
+                <a:solidFill>
+                  <a:srgbClr val="B45309"/>
+                </a:solidFill>
+                <a:latin typeface="Calibri" pitchFamily="34" charset="0"/>
+                <a:ea typeface="Calibri" pitchFamily="34" charset="-122"/>
+                <a:cs typeface="Calibri" pitchFamily="34" charset="-120"/>
+              </a:rPr>
+              <a:t>Approval Gates</a:t>
+            </a:r>
+            <a:endParaRPr lang="en-US" sz="1650" dirty="0"/>
+          </a:p>
+        </p:txBody>
+      </p:sp>
+      <p:sp>
+        <p:nvSpPr>
+          <p:cNvPr id="60" name="Text 41"/>
+          <p:cNvSpPr txBox="1"/>
+          <p:nvPr/>
+        </p:nvSpPr>
+        <p:spPr>
+          <a:xfrm>
+            <a:off x="8979408" y="5861304"/>
+            <a:ext cx="2606040" cy="640080"/>
+          </a:xfrm>
+          <a:prstGeom prst="rect">
+            <a:avLst/>
+          </a:prstGeom>
+          <a:noFill/>
+          <a:ln/>
+        </p:spPr>
+        <p:txBody>
+          <a:bodyPr wrap="square" lIns="0" tIns="0" rIns="0" bIns="0" rtlCol="0" anchor="t"/>
+          <a:lstStyle/>
+          <a:p>
+            <a:pPr indent="0" marL="0">
+              <a:lnSpc>
+                <a:spcPct val="110000"/>
+              </a:lnSpc>
+              <a:buNone/>
+            </a:pPr>
+            <a:r>
+              <a:rPr lang="en-US" sz="1200" dirty="0">
+                <a:solidFill>
+                  <a:srgbClr val="1F2937"/>
+                </a:solidFill>
+                <a:latin typeface="Calibri" pitchFamily="34" charset="0"/>
+                <a:ea typeface="Calibri" pitchFamily="34" charset="-122"/>
+                <a:cs typeface="Calibri" pitchFamily="34" charset="-120"/>
+              </a:rPr>
+              <a:t>Human or policy approvals for</a:t>
+            </a:r>
+            <a:endParaRPr lang="en-US" sz="1200" dirty="0"/>
+          </a:p>
+          <a:p>
+            <a:pPr indent="0" marL="0">
+              <a:lnSpc>
+                <a:spcPct val="110000"/>
+              </a:lnSpc>
+              <a:buNone/>
+            </a:pPr>
+            <a:r>
+              <a:rPr lang="en-US" sz="1200" dirty="0">
+                <a:solidFill>
+                  <a:srgbClr val="1F2937"/>
+                </a:solidFill>
+                <a:latin typeface="Calibri" pitchFamily="34" charset="0"/>
+                <a:ea typeface="Calibri" pitchFamily="34" charset="-122"/>
+                <a:cs typeface="Calibri" pitchFamily="34" charset="-120"/>
+              </a:rPr>
+              <a:t>sensitive or high-impact actions.</a:t>
+            </a:r>
+            <a:endParaRPr lang="en-US" sz="1200" dirty="0"/>
+          </a:p>
+        </p:txBody>
+      </p:sp>
+      <p:sp>
+        <p:nvSpPr>
+          <p:cNvPr id="61" name="Shape 42"/>
+          <p:cNvSpPr/>
+          <p:nvPr/>
+        </p:nvSpPr>
+        <p:spPr>
+          <a:xfrm>
+            <a:off x="7406640" y="777240"/>
+            <a:ext cx="557784" cy="0"/>
+          </a:xfrm>
+          <a:prstGeom prst="line">
+            <a:avLst/>
+          </a:prstGeom>
+          <a:noFill/>
+          <a:ln w="28575">
+            <a:solidFill>
+              <a:srgbClr val="2B3A67"/>
+            </a:solidFill>
+            <a:prstDash val="dash"/>
+            <a:tailEnd type="triangle"/>
+          </a:ln>
+        </p:spPr>
+      </p:sp>
+      <p:sp>
+        <p:nvSpPr>
+          <p:cNvPr id="62" name="Shape 43"/>
+          <p:cNvSpPr/>
+          <p:nvPr/>
+        </p:nvSpPr>
+        <p:spPr>
+          <a:xfrm>
+            <a:off x="7406640" y="1161288"/>
+            <a:ext cx="557784" cy="0"/>
+          </a:xfrm>
+          <a:prstGeom prst="line">
+            <a:avLst/>
+          </a:prstGeom>
+          <a:noFill/>
+          <a:ln w="28575">
+            <a:solidFill>
+              <a:srgbClr val="9BA8DF"/>
+            </a:solidFill>
+            <a:prstDash val="dash"/>
+            <a:headEnd type="triangle"/>
+          </a:ln>
+        </p:spPr>
+      </p:sp>
+      <p:sp>
+        <p:nvSpPr>
+          <p:cNvPr id="63" name="Shape 44"/>
+          <p:cNvSpPr/>
+          <p:nvPr/>
+        </p:nvSpPr>
+        <p:spPr>
+          <a:xfrm>
+            <a:off x="7406640" y="2034540"/>
+            <a:ext cx="557784" cy="0"/>
+          </a:xfrm>
+          <a:prstGeom prst="line">
+            <a:avLst/>
+          </a:prstGeom>
+          <a:noFill/>
+          <a:ln w="28575">
+            <a:solidFill>
+              <a:srgbClr val="2B3A67"/>
+            </a:solidFill>
+            <a:prstDash val="dash"/>
+            <a:tailEnd type="triangle"/>
+          </a:ln>
+        </p:spPr>
+      </p:sp>
+      <p:sp>
+        <p:nvSpPr>
+          <p:cNvPr id="64" name="Shape 45"/>
+          <p:cNvSpPr/>
+          <p:nvPr/>
+        </p:nvSpPr>
+        <p:spPr>
+          <a:xfrm>
+            <a:off x="7406640" y="2418588"/>
+            <a:ext cx="557784" cy="0"/>
+          </a:xfrm>
+          <a:prstGeom prst="line">
+            <a:avLst/>
+          </a:prstGeom>
+          <a:noFill/>
+          <a:ln w="28575">
+            <a:solidFill>
+              <a:srgbClr val="9BA8DF"/>
+            </a:solidFill>
+            <a:prstDash val="dash"/>
+            <a:headEnd type="triangle"/>
+          </a:ln>
+        </p:spPr>
+      </p:sp>
+      <p:sp>
+        <p:nvSpPr>
+          <p:cNvPr id="65" name="Shape 46"/>
+          <p:cNvSpPr/>
+          <p:nvPr/>
+        </p:nvSpPr>
+        <p:spPr>
+          <a:xfrm>
+            <a:off x="7406640" y="3291840"/>
+            <a:ext cx="557784" cy="0"/>
+          </a:xfrm>
+          <a:prstGeom prst="line">
+            <a:avLst/>
+          </a:prstGeom>
+          <a:noFill/>
+          <a:ln w="28575">
+            <a:solidFill>
+              <a:srgbClr val="2B3A67"/>
+            </a:solidFill>
+            <a:prstDash val="dash"/>
+            <a:tailEnd type="triangle"/>
+          </a:ln>
+        </p:spPr>
+      </p:sp>
+      <p:sp>
+        <p:nvSpPr>
+          <p:cNvPr id="66" name="Shape 47"/>
+          <p:cNvSpPr/>
+          <p:nvPr/>
+        </p:nvSpPr>
+        <p:spPr>
+          <a:xfrm>
+            <a:off x="7406640" y="3675888"/>
+            <a:ext cx="557784" cy="0"/>
+          </a:xfrm>
+          <a:prstGeom prst="line">
+            <a:avLst/>
+          </a:prstGeom>
+          <a:noFill/>
+          <a:ln w="28575">
+            <a:solidFill>
+              <a:srgbClr val="9BA8DF"/>
+            </a:solidFill>
+            <a:prstDash val="dash"/>
+            <a:headEnd type="triangle"/>
+          </a:ln>
+        </p:spPr>
+      </p:sp>
+      <p:sp>
+        <p:nvSpPr>
+          <p:cNvPr id="67" name="Shape 48"/>
+          <p:cNvSpPr/>
+          <p:nvPr/>
+        </p:nvSpPr>
+        <p:spPr>
+          <a:xfrm>
+            <a:off x="7406640" y="4549140"/>
+            <a:ext cx="557784" cy="0"/>
+          </a:xfrm>
+          <a:prstGeom prst="line">
+            <a:avLst/>
+          </a:prstGeom>
+          <a:noFill/>
+          <a:ln w="28575">
+            <a:solidFill>
+              <a:srgbClr val="2B3A67"/>
+            </a:solidFill>
+            <a:prstDash val="dash"/>
+            <a:tailEnd type="triangle"/>
+          </a:ln>
+        </p:spPr>
+      </p:sp>
+      <p:sp>
+        <p:nvSpPr>
+          <p:cNvPr id="68" name="Shape 49"/>
+          <p:cNvSpPr/>
+          <p:nvPr/>
+        </p:nvSpPr>
+        <p:spPr>
+          <a:xfrm>
+            <a:off x="7406640" y="4933188"/>
+            <a:ext cx="557784" cy="0"/>
+          </a:xfrm>
+          <a:prstGeom prst="line">
+            <a:avLst/>
+          </a:prstGeom>
+          <a:noFill/>
+          <a:ln w="28575">
+            <a:solidFill>
+              <a:srgbClr val="9BA8DF"/>
+            </a:solidFill>
+            <a:prstDash val="dash"/>
+            <a:headEnd type="triangle"/>
+          </a:ln>
+        </p:spPr>
+      </p:sp>
+      <p:sp>
+        <p:nvSpPr>
+          <p:cNvPr id="69" name="Shape 50"/>
+          <p:cNvSpPr/>
+          <p:nvPr/>
+        </p:nvSpPr>
+        <p:spPr>
+          <a:xfrm>
+            <a:off x="7406640" y="5806440"/>
+            <a:ext cx="557784" cy="0"/>
+          </a:xfrm>
+          <a:prstGeom prst="line">
+            <a:avLst/>
+          </a:prstGeom>
+          <a:noFill/>
+          <a:ln w="28575">
+            <a:solidFill>
+              <a:srgbClr val="2B3A67"/>
+            </a:solidFill>
+            <a:prstDash val="dash"/>
+            <a:tailEnd type="triangle"/>
+          </a:ln>
+        </p:spPr>
+      </p:sp>
+      <p:sp>
+        <p:nvSpPr>
+          <p:cNvPr id="70" name="Shape 51"/>
+          <p:cNvSpPr/>
+          <p:nvPr/>
+        </p:nvSpPr>
+        <p:spPr>
+          <a:xfrm>
+            <a:off x="7406640" y="6190488"/>
+            <a:ext cx="557784" cy="0"/>
+          </a:xfrm>
+          <a:prstGeom prst="line">
+            <a:avLst/>
+          </a:prstGeom>
+          <a:noFill/>
+          <a:ln w="28575">
+            <a:solidFill>
+              <a:srgbClr val="9BA8DF"/>
+            </a:solidFill>
+            <a:prstDash val="dash"/>
+            <a:headEnd type="triangle"/>
+          </a:ln>
+        </p:spPr>
       </p:sp>
     </p:spTree>
   </p:cSld>
@@ -3556,9 +3734,61 @@
           <a:chExt cx="0" cy="0"/>
         </a:xfrm>
       </p:grpSpPr>
+      <p:sp>
+        <p:nvSpPr>
+          <p:cNvPr id="2" name="Shape 0"/>
+          <p:cNvSpPr/>
+          <p:nvPr/>
+        </p:nvSpPr>
+        <p:spPr>
+          <a:xfrm>
+            <a:off x="411480" y="1280160"/>
+            <a:ext cx="2148840" cy="1371600"/>
+          </a:xfrm>
+          <a:prstGeom prst="roundRect">
+            <a:avLst>
+              <a:gd name="adj" fmla="val 8000"/>
+            </a:avLst>
+          </a:prstGeom>
+          <a:solidFill>
+            <a:srgbClr val="FFFFFF"/>
+          </a:solidFill>
+          <a:ln w="15875">
+            <a:solidFill>
+              <a:srgbClr val="C7D2E8"/>
+            </a:solidFill>
+            <a:prstDash val="solid"/>
+          </a:ln>
+        </p:spPr>
+      </p:sp>
+      <p:sp>
+        <p:nvSpPr>
+          <p:cNvPr id="3" name="Shape 1"/>
+          <p:cNvSpPr/>
+          <p:nvPr/>
+        </p:nvSpPr>
+        <p:spPr>
+          <a:xfrm>
+            <a:off x="1211580" y="1463040"/>
+            <a:ext cx="548640" cy="548640"/>
+          </a:xfrm>
+          <a:prstGeom prst="ellipse">
+            <a:avLst/>
+          </a:prstGeom>
+          <a:solidFill>
+            <a:srgbClr val="2B57B5"/>
+          </a:solidFill>
+          <a:ln w="12700">
+            <a:solidFill>
+              <a:srgbClr val="2B57B5"/>
+            </a:solidFill>
+            <a:prstDash val="solid"/>
+          </a:ln>
+        </p:spPr>
+      </p:sp>
       <p:pic>
         <p:nvPicPr>
-          <p:cNvPr id="2" name="Image 0" descr="preencoded.png">    </p:cNvPr>
+          <p:cNvPr id="4" name="Image 0" descr="preencoded.png">    </p:cNvPr>
           <p:cNvPicPr>
             <a:picLocks noChangeAspect="1"/>
           </p:cNvPicPr>
@@ -3572,17 +3802,122 @@
         </p:blipFill>
         <p:spPr>
           <a:xfrm>
-            <a:off x="1444752" y="256032"/>
-            <a:ext cx="768096" cy="768096"/>
+            <a:off x="1339596" y="1591056"/>
+            <a:ext cx="292608" cy="292608"/>
           </a:xfrm>
           <a:prstGeom prst="rect">
             <a:avLst/>
           </a:prstGeom>
         </p:spPr>
       </p:pic>
+      <p:sp>
+        <p:nvSpPr>
+          <p:cNvPr id="5" name="Text 2"/>
+          <p:cNvSpPr txBox="1"/>
+          <p:nvPr/>
+        </p:nvSpPr>
+        <p:spPr>
+          <a:xfrm>
+            <a:off x="502920" y="2084832"/>
+            <a:ext cx="1965960" cy="274320"/>
+          </a:xfrm>
+          <a:prstGeom prst="rect">
+            <a:avLst/>
+          </a:prstGeom>
+          <a:noFill/>
+          <a:ln/>
+        </p:spPr>
+        <p:txBody>
+          <a:bodyPr wrap="square" lIns="0" tIns="0" rIns="0" bIns="0" rtlCol="0" anchor="ctr"/>
+          <a:lstStyle/>
+          <a:p>
+            <a:pPr algn="ctr" indent="0" marL="0">
+              <a:buNone/>
+            </a:pPr>
+            <a:r>
+              <a:rPr lang="en-US" sz="1350" b="1" dirty="0">
+                <a:solidFill>
+                  <a:srgbClr val="1E3A8A"/>
+                </a:solidFill>
+                <a:latin typeface="Calibri" pitchFamily="34" charset="0"/>
+                <a:ea typeface="Calibri" pitchFamily="34" charset="-122"/>
+                <a:cs typeface="Calibri" pitchFamily="34" charset="-120"/>
+              </a:rPr>
+              <a:t>User request</a:t>
+            </a:r>
+            <a:endParaRPr lang="en-US" sz="1350" dirty="0"/>
+          </a:p>
+        </p:txBody>
+      </p:sp>
+      <p:sp>
+        <p:nvSpPr>
+          <p:cNvPr id="6" name="Text 3"/>
+          <p:cNvSpPr txBox="1"/>
+          <p:nvPr/>
+        </p:nvSpPr>
+        <p:spPr>
+          <a:xfrm>
+            <a:off x="502920" y="2340864"/>
+            <a:ext cx="1965960" cy="237744"/>
+          </a:xfrm>
+          <a:prstGeom prst="rect">
+            <a:avLst/>
+          </a:prstGeom>
+          <a:noFill/>
+          <a:ln/>
+        </p:spPr>
+        <p:txBody>
+          <a:bodyPr wrap="square" lIns="0" tIns="0" rIns="0" bIns="0" rtlCol="0" anchor="ctr"/>
+          <a:lstStyle/>
+          <a:p>
+            <a:pPr algn="ctr" indent="0" marL="0">
+              <a:buNone/>
+            </a:pPr>
+            <a:r>
+              <a:rPr lang="en-US" sz="1000" dirty="0">
+                <a:solidFill>
+                  <a:srgbClr val="4B5563"/>
+                </a:solidFill>
+                <a:latin typeface="Calibri" pitchFamily="34" charset="0"/>
+                <a:ea typeface="Calibri" pitchFamily="34" charset="-122"/>
+                <a:cs typeface="Calibri" pitchFamily="34" charset="-120"/>
+              </a:rPr>
+              <a:t>A question, task or instruction</a:t>
+            </a:r>
+            <a:endParaRPr lang="en-US" sz="1000" dirty="0"/>
+          </a:p>
+        </p:txBody>
+      </p:sp>
+      <p:sp>
+        <p:nvSpPr>
+          <p:cNvPr id="7" name="Shape 4"/>
+          <p:cNvSpPr/>
+          <p:nvPr/>
+        </p:nvSpPr>
+        <p:spPr>
+          <a:xfrm>
+            <a:off x="411480" y="3108960"/>
+            <a:ext cx="2148840" cy="3017520"/>
+          </a:xfrm>
+          <a:prstGeom prst="roundRect">
+            <a:avLst>
+              <a:gd name="adj" fmla="val 5106"/>
+            </a:avLst>
+          </a:prstGeom>
+          <a:solidFill>
+            <a:srgbClr val="FFFFFF"/>
+          </a:solidFill>
+          <a:ln w="15875">
+            <a:solidFill>
+              <a:srgbClr val="C7D2E8"/>
+            </a:solidFill>
+            <a:prstDash val="solid"/>
+          </a:ln>
+        </p:spPr>
+      </p:sp>
       <p:pic>
         <p:nvPicPr>
-          <p:cNvPr id="3" name="Image 1" descr="preencoded.png">    </p:cNvPr>
+          <p:cNvPr id="8" name="Image 1" descr="preencoded.png">    </p:cNvPr>
           <p:cNvPicPr>
             <a:picLocks noChangeAspect="1"/>
           </p:cNvPicPr>
@@ -3596,8 +3931,8 @@
         </p:blipFill>
         <p:spPr>
           <a:xfrm>
-            <a:off x="1581912" y="411480"/>
-            <a:ext cx="493776" cy="493776"/>
+            <a:off x="1165860" y="3383280"/>
+            <a:ext cx="640080" cy="640080"/>
           </a:xfrm>
           <a:prstGeom prst="rect">
             <a:avLst/>
@@ -3606,14 +3941,14 @@
       </p:pic>
       <p:sp>
         <p:nvSpPr>
-          <p:cNvPr id="4" name="Text 0"/>
+          <p:cNvPr id="9" name="Text 5"/>
           <p:cNvSpPr txBox="1"/>
           <p:nvPr/>
         </p:nvSpPr>
         <p:spPr>
           <a:xfrm>
-            <a:off x="411480" y="1078992"/>
-            <a:ext cx="2834640" cy="411480"/>
+            <a:off x="521208" y="4133088"/>
+            <a:ext cx="1929384" cy="685800"/>
           </a:xfrm>
           <a:prstGeom prst="rect">
             <a:avLst/>
@@ -3626,10 +3961,13 @@
           <a:lstStyle/>
           <a:p>
             <a:pPr algn="ctr" indent="0" marL="0">
-              <a:buNone/>
-            </a:pPr>
-            <a:r>
-              <a:rPr lang="en-US" sz="2300" b="1" dirty="0">
+              <a:lnSpc>
+                <a:spcPct val="105000"/>
+              </a:lnSpc>
+              <a:buNone/>
+            </a:pPr>
+            <a:r>
+              <a:rPr lang="en-US" sz="1600" b="1" dirty="0">
                 <a:solidFill>
                   <a:srgbClr val="1E3A8A"/>
                 </a:solidFill>
@@ -3637,42 +3975,35 @@
                 <a:ea typeface="Calibri" pitchFamily="34" charset="-122"/>
                 <a:cs typeface="Calibri" pitchFamily="34" charset="-120"/>
               </a:rPr>
-              <a:t>Agent Harness</a:t>
-            </a:r>
-            <a:endParaRPr lang="en-US" sz="2300" dirty="0"/>
-          </a:p>
-        </p:txBody>
-      </p:sp>
-      <p:sp>
-        <p:nvSpPr>
-          <p:cNvPr id="5" name="Shape 1"/>
-          <p:cNvSpPr/>
-          <p:nvPr/>
-        </p:nvSpPr>
-        <p:spPr>
-          <a:xfrm>
-            <a:off x="411480" y="1645920"/>
-            <a:ext cx="2834640" cy="4800600"/>
-          </a:xfrm>
-          <a:prstGeom prst="roundRect">
-            <a:avLst>
-              <a:gd name="adj" fmla="val 4516"/>
-            </a:avLst>
-          </a:prstGeom>
-          <a:solidFill>
-            <a:srgbClr val="FFFFFF"/>
-          </a:solidFill>
-          <a:ln w="15875">
-            <a:solidFill>
-              <a:srgbClr val="C7D2E8"/>
-            </a:solidFill>
-            <a:prstDash val="solid"/>
-          </a:ln>
-        </p:spPr>
+              <a:t>Final Response</a:t>
+            </a:r>
+            <a:endParaRPr lang="en-US" sz="1600" dirty="0"/>
+          </a:p>
+          <a:p>
+            <a:pPr algn="ctr" indent="0" marL="0">
+              <a:lnSpc>
+                <a:spcPct val="105000"/>
+              </a:lnSpc>
+              <a:buNone/>
+            </a:pPr>
+            <a:r>
+              <a:rPr lang="en-US" sz="1600" b="1" dirty="0">
+                <a:solidFill>
+                  <a:srgbClr val="1E3A8A"/>
+                </a:solidFill>
+                <a:latin typeface="Calibri" pitchFamily="34" charset="0"/>
+                <a:ea typeface="Calibri" pitchFamily="34" charset="-122"/>
+                <a:cs typeface="Calibri" pitchFamily="34" charset="-120"/>
+              </a:rPr>
+              <a:t>and Trace</a:t>
+            </a:r>
+            <a:endParaRPr lang="en-US" sz="1600" dirty="0"/>
+          </a:p>
+        </p:txBody>
       </p:sp>
       <p:pic>
         <p:nvPicPr>
-          <p:cNvPr id="6" name="Image 2" descr="preencoded.png">    </p:cNvPr>
+          <p:cNvPr id="10" name="Image 2" descr="preencoded.png">    </p:cNvPr>
           <p:cNvPicPr>
             <a:picLocks noChangeAspect="1"/>
           </p:cNvPicPr>
@@ -3686,8 +4017,8 @@
         </p:blipFill>
         <p:spPr>
           <a:xfrm>
-            <a:off x="594360" y="1956816"/>
-            <a:ext cx="384048" cy="384048"/>
+            <a:off x="685800" y="4965192"/>
+            <a:ext cx="201168" cy="201168"/>
           </a:xfrm>
           <a:prstGeom prst="rect">
             <a:avLst/>
@@ -3696,14 +4027,14 @@
       </p:pic>
       <p:sp>
         <p:nvSpPr>
-          <p:cNvPr id="7" name="Text 2"/>
+          <p:cNvPr id="11" name="Text 6"/>
           <p:cNvSpPr txBox="1"/>
           <p:nvPr/>
         </p:nvSpPr>
         <p:spPr>
           <a:xfrm>
-            <a:off x="1124712" y="1883664"/>
-            <a:ext cx="1984248" cy="548640"/>
+            <a:off x="960120" y="4937760"/>
+            <a:ext cx="1508760" cy="256032"/>
           </a:xfrm>
           <a:prstGeom prst="rect">
             <a:avLst/>
@@ -3716,13 +4047,10 @@
           <a:lstStyle/>
           <a:p>
             <a:pPr indent="0" marL="0">
-              <a:lnSpc>
-                <a:spcPct val="105000"/>
-              </a:lnSpc>
-              <a:buNone/>
-            </a:pPr>
-            <a:r>
-              <a:rPr lang="en-US" sz="1200" dirty="0">
+              <a:buNone/>
+            </a:pPr>
+            <a:r>
+              <a:rPr lang="en-US" sz="1100" dirty="0">
                 <a:solidFill>
                   <a:srgbClr val="1F2937"/>
                 </a:solidFill>
@@ -3730,49 +4058,7 @@
                 <a:ea typeface="Calibri" pitchFamily="34" charset="-122"/>
                 <a:cs typeface="Calibri" pitchFamily="34" charset="-120"/>
               </a:rPr>
-              <a:t>Orchestrates the run</a:t>
-            </a:r>
-            <a:endParaRPr lang="en-US" sz="1200" dirty="0"/>
-          </a:p>
-        </p:txBody>
-      </p:sp>
-      <p:sp>
-        <p:nvSpPr>
-          <p:cNvPr id="8" name="Text 3"/>
-          <p:cNvSpPr txBox="1"/>
-          <p:nvPr/>
-        </p:nvSpPr>
-        <p:spPr>
-          <a:xfrm>
-            <a:off x="1124712" y="2203704"/>
-            <a:ext cx="1984248" cy="502920"/>
-          </a:xfrm>
-          <a:prstGeom prst="rect">
-            <a:avLst/>
-          </a:prstGeom>
-          <a:noFill/>
-          <a:ln/>
-        </p:spPr>
-        <p:txBody>
-          <a:bodyPr wrap="square" lIns="0" tIns="0" rIns="0" bIns="0" rtlCol="0" anchor="t"/>
-          <a:lstStyle/>
-          <a:p>
-            <a:pPr indent="0" marL="0">
-              <a:lnSpc>
-                <a:spcPct val="105000"/>
-              </a:lnSpc>
-              <a:buNone/>
-            </a:pPr>
-            <a:r>
-              <a:rPr lang="en-US" sz="1100" dirty="0">
-                <a:solidFill>
-                  <a:srgbClr val="4B5563"/>
-                </a:solidFill>
-                <a:latin typeface="Calibri" pitchFamily="34" charset="0"/>
-                <a:ea typeface="Calibri" pitchFamily="34" charset="-122"/>
-                <a:cs typeface="Calibri" pitchFamily="34" charset="-120"/>
-              </a:rPr>
-              <a:t>Plans steps and manages flow</a:t>
+              <a:t>Answer or result</a:t>
             </a:r>
             <a:endParaRPr lang="en-US" sz="1100" dirty="0"/>
           </a:p>
@@ -3780,7 +4066,7 @@
       </p:sp>
       <p:pic>
         <p:nvPicPr>
-          <p:cNvPr id="9" name="Image 3" descr="preencoded.png">    </p:cNvPr>
+          <p:cNvPr id="12" name="Image 3" descr="preencoded.png">    </p:cNvPr>
           <p:cNvPicPr>
             <a:picLocks noChangeAspect="1"/>
           </p:cNvPicPr>
@@ -3794,8 +4080,8 @@
         </p:blipFill>
         <p:spPr>
           <a:xfrm>
-            <a:off x="594360" y="3008376"/>
-            <a:ext cx="384048" cy="384048"/>
+            <a:off x="685800" y="5257800"/>
+            <a:ext cx="201168" cy="201168"/>
           </a:xfrm>
           <a:prstGeom prst="rect">
             <a:avLst/>
@@ -3804,14 +4090,14 @@
       </p:pic>
       <p:sp>
         <p:nvSpPr>
-          <p:cNvPr id="10" name="Text 4"/>
+          <p:cNvPr id="13" name="Text 7"/>
           <p:cNvSpPr txBox="1"/>
           <p:nvPr/>
         </p:nvSpPr>
         <p:spPr>
           <a:xfrm>
-            <a:off x="1124712" y="2935224"/>
-            <a:ext cx="1984248" cy="548640"/>
+            <a:off x="960120" y="5230368"/>
+            <a:ext cx="1508760" cy="256032"/>
           </a:xfrm>
           <a:prstGeom prst="rect">
             <a:avLst/>
@@ -3824,13 +4110,10 @@
           <a:lstStyle/>
           <a:p>
             <a:pPr indent="0" marL="0">
-              <a:lnSpc>
-                <a:spcPct val="105000"/>
-              </a:lnSpc>
-              <a:buNone/>
-            </a:pPr>
-            <a:r>
-              <a:rPr lang="en-US" sz="1200" dirty="0">
+              <a:buNone/>
+            </a:pPr>
+            <a:r>
+              <a:rPr lang="en-US" sz="1100" dirty="0">
                 <a:solidFill>
                   <a:srgbClr val="1F2937"/>
                 </a:solidFill>
@@ -3838,69 +4121,7 @@
                 <a:ea typeface="Calibri" pitchFamily="34" charset="-122"/>
                 <a:cs typeface="Calibri" pitchFamily="34" charset="-120"/>
               </a:rPr>
-              <a:t>Routes between model, agents,</a:t>
-            </a:r>
-            <a:endParaRPr lang="en-US" sz="1200" dirty="0"/>
-          </a:p>
-          <a:p>
-            <a:pPr indent="0" marL="0">
-              <a:lnSpc>
-                <a:spcPct val="105000"/>
-              </a:lnSpc>
-              <a:buNone/>
-            </a:pPr>
-            <a:r>
-              <a:rPr lang="en-US" sz="1200" dirty="0">
-                <a:solidFill>
-                  <a:srgbClr val="1F2937"/>
-                </a:solidFill>
-                <a:latin typeface="Calibri" pitchFamily="34" charset="0"/>
-                <a:ea typeface="Calibri" pitchFamily="34" charset="-122"/>
-                <a:cs typeface="Calibri" pitchFamily="34" charset="-120"/>
-              </a:rPr>
-              <a:t>tools, sandbox and approvals</a:t>
-            </a:r>
-            <a:endParaRPr lang="en-US" sz="1200" dirty="0"/>
-          </a:p>
-        </p:txBody>
-      </p:sp>
-      <p:sp>
-        <p:nvSpPr>
-          <p:cNvPr id="11" name="Text 5"/>
-          <p:cNvSpPr txBox="1"/>
-          <p:nvPr/>
-        </p:nvSpPr>
-        <p:spPr>
-          <a:xfrm>
-            <a:off x="1124712" y="3538728"/>
-            <a:ext cx="1984248" cy="502920"/>
-          </a:xfrm>
-          <a:prstGeom prst="rect">
-            <a:avLst/>
-          </a:prstGeom>
-          <a:noFill/>
-          <a:ln/>
-        </p:spPr>
-        <p:txBody>
-          <a:bodyPr wrap="square" lIns="0" tIns="0" rIns="0" bIns="0" rtlCol="0" anchor="t"/>
-          <a:lstStyle/>
-          <a:p>
-            <a:pPr indent="0" marL="0">
-              <a:lnSpc>
-                <a:spcPct val="105000"/>
-              </a:lnSpc>
-              <a:buNone/>
-            </a:pPr>
-            <a:r>
-              <a:rPr lang="en-US" sz="1100" dirty="0">
-                <a:solidFill>
-                  <a:srgbClr val="4B5563"/>
-                </a:solidFill>
-                <a:latin typeface="Calibri" pitchFamily="34" charset="0"/>
-                <a:ea typeface="Calibri" pitchFamily="34" charset="-122"/>
-                <a:cs typeface="Calibri" pitchFamily="34" charset="-120"/>
-              </a:rPr>
-              <a:t>Picks the right capability</a:t>
+              <a:t>What was done</a:t>
             </a:r>
             <a:endParaRPr lang="en-US" sz="1100" dirty="0"/>
           </a:p>
@@ -3908,7 +4129,7 @@
       </p:sp>
       <p:pic>
         <p:nvPicPr>
-          <p:cNvPr id="12" name="Image 4" descr="preencoded.png">    </p:cNvPr>
+          <p:cNvPr id="14" name="Image 4" descr="preencoded.png">    </p:cNvPr>
           <p:cNvPicPr>
             <a:picLocks noChangeAspect="1"/>
           </p:cNvPicPr>
@@ -3922,8 +4143,8 @@
         </p:blipFill>
         <p:spPr>
           <a:xfrm>
-            <a:off x="594360" y="4288536"/>
-            <a:ext cx="384048" cy="384048"/>
+            <a:off x="685800" y="5550408"/>
+            <a:ext cx="201168" cy="201168"/>
           </a:xfrm>
           <a:prstGeom prst="rect">
             <a:avLst/>
@@ -3932,14 +4153,14 @@
       </p:pic>
       <p:sp>
         <p:nvSpPr>
-          <p:cNvPr id="13" name="Text 6"/>
+          <p:cNvPr id="15" name="Text 8"/>
           <p:cNvSpPr txBox="1"/>
           <p:nvPr/>
         </p:nvSpPr>
         <p:spPr>
           <a:xfrm>
-            <a:off x="1124712" y="4215384"/>
-            <a:ext cx="1984248" cy="548640"/>
+            <a:off x="960120" y="5522976"/>
+            <a:ext cx="1508760" cy="256032"/>
           </a:xfrm>
           <a:prstGeom prst="rect">
             <a:avLst/>
@@ -3952,13 +4173,10 @@
           <a:lstStyle/>
           <a:p>
             <a:pPr indent="0" marL="0">
-              <a:lnSpc>
-                <a:spcPct val="105000"/>
-              </a:lnSpc>
-              <a:buNone/>
-            </a:pPr>
-            <a:r>
-              <a:rPr lang="en-US" sz="1200" dirty="0">
+              <a:buNone/>
+            </a:pPr>
+            <a:r>
+              <a:rPr lang="en-US" sz="1100" dirty="0">
                 <a:solidFill>
                   <a:srgbClr val="1F2937"/>
                 </a:solidFill>
@@ -3966,49 +4184,7 @@
                 <a:ea typeface="Calibri" pitchFamily="34" charset="-122"/>
                 <a:cs typeface="Calibri" pitchFamily="34" charset="-120"/>
               </a:rPr>
-              <a:t>Enforces guardrails</a:t>
-            </a:r>
-            <a:endParaRPr lang="en-US" sz="1200" dirty="0"/>
-          </a:p>
-        </p:txBody>
-      </p:sp>
-      <p:sp>
-        <p:nvSpPr>
-          <p:cNvPr id="14" name="Text 7"/>
-          <p:cNvSpPr txBox="1"/>
-          <p:nvPr/>
-        </p:nvSpPr>
-        <p:spPr>
-          <a:xfrm>
-            <a:off x="1124712" y="4535424"/>
-            <a:ext cx="1984248" cy="502920"/>
-          </a:xfrm>
-          <a:prstGeom prst="rect">
-            <a:avLst/>
-          </a:prstGeom>
-          <a:noFill/>
-          <a:ln/>
-        </p:spPr>
-        <p:txBody>
-          <a:bodyPr wrap="square" lIns="0" tIns="0" rIns="0" bIns="0" rtlCol="0" anchor="t"/>
-          <a:lstStyle/>
-          <a:p>
-            <a:pPr indent="0" marL="0">
-              <a:lnSpc>
-                <a:spcPct val="105000"/>
-              </a:lnSpc>
-              <a:buNone/>
-            </a:pPr>
-            <a:r>
-              <a:rPr lang="en-US" sz="1100" dirty="0">
-                <a:solidFill>
-                  <a:srgbClr val="4B5563"/>
-                </a:solidFill>
-                <a:latin typeface="Calibri" pitchFamily="34" charset="0"/>
-                <a:ea typeface="Calibri" pitchFamily="34" charset="-122"/>
-                <a:cs typeface="Calibri" pitchFamily="34" charset="-120"/>
-              </a:rPr>
-              <a:t>Safety, policies and limits</a:t>
+              <a:t>What was used</a:t>
             </a:r>
             <a:endParaRPr lang="en-US" sz="1100" dirty="0"/>
           </a:p>
@@ -4016,7 +4192,7 @@
       </p:sp>
       <p:pic>
         <p:nvPicPr>
-          <p:cNvPr id="15" name="Image 5" descr="preencoded.png">    </p:cNvPr>
+          <p:cNvPr id="16" name="Image 5" descr="preencoded.png">    </p:cNvPr>
           <p:cNvPicPr>
             <a:picLocks noChangeAspect="1"/>
           </p:cNvPicPr>
@@ -4030,56 +4206,14 @@
         </p:blipFill>
         <p:spPr>
           <a:xfrm>
-            <a:off x="594360" y="5340096"/>
-            <a:ext cx="384048" cy="384048"/>
+            <a:off x="685800" y="5843016"/>
+            <a:ext cx="201168" cy="201168"/>
           </a:xfrm>
           <a:prstGeom prst="rect">
             <a:avLst/>
           </a:prstGeom>
         </p:spPr>
       </p:pic>
-      <p:sp>
-        <p:nvSpPr>
-          <p:cNvPr id="16" name="Text 8"/>
-          <p:cNvSpPr txBox="1"/>
-          <p:nvPr/>
-        </p:nvSpPr>
-        <p:spPr>
-          <a:xfrm>
-            <a:off x="1124712" y="5266944"/>
-            <a:ext cx="1984248" cy="548640"/>
-          </a:xfrm>
-          <a:prstGeom prst="rect">
-            <a:avLst/>
-          </a:prstGeom>
-          <a:noFill/>
-          <a:ln/>
-        </p:spPr>
-        <p:txBody>
-          <a:bodyPr wrap="square" lIns="0" tIns="0" rIns="0" bIns="0" rtlCol="0" anchor="t"/>
-          <a:lstStyle/>
-          <a:p>
-            <a:pPr indent="0" marL="0">
-              <a:lnSpc>
-                <a:spcPct val="105000"/>
-              </a:lnSpc>
-              <a:buNone/>
-            </a:pPr>
-            <a:r>
-              <a:rPr lang="en-US" sz="1200" dirty="0">
-                <a:solidFill>
-                  <a:srgbClr val="1F2937"/>
-                </a:solidFill>
-                <a:latin typeface="Calibri" pitchFamily="34" charset="0"/>
-                <a:ea typeface="Calibri" pitchFamily="34" charset="-122"/>
-                <a:cs typeface="Calibri" pitchFamily="34" charset="-120"/>
-              </a:rPr>
-              <a:t>Records everything</a:t>
-            </a:r>
-            <a:endParaRPr lang="en-US" sz="1200" dirty="0"/>
-          </a:p>
-        </p:txBody>
-      </p:sp>
       <p:sp>
         <p:nvSpPr>
           <p:cNvPr id="17" name="Text 9"/>
@@ -4088,8 +4222,8 @@
         </p:nvSpPr>
         <p:spPr>
           <a:xfrm>
-            <a:off x="1124712" y="5586984"/>
-            <a:ext cx="1984248" cy="502920"/>
+            <a:off x="960120" y="5815584"/>
+            <a:ext cx="1508760" cy="256032"/>
           </a:xfrm>
           <a:prstGeom prst="rect">
             <a:avLst/>
@@ -4102,101 +4236,26 @@
           <a:lstStyle/>
           <a:p>
             <a:pPr indent="0" marL="0">
-              <a:lnSpc>
-                <a:spcPct val="105000"/>
-              </a:lnSpc>
               <a:buNone/>
             </a:pPr>
             <a:r>
               <a:rPr lang="en-US" sz="1100" dirty="0">
                 <a:solidFill>
-                  <a:srgbClr val="4B5563"/>
-                </a:solidFill>
-                <a:latin typeface="Calibri" pitchFamily="34" charset="0"/>
-                <a:ea typeface="Calibri" pitchFamily="34" charset="-122"/>
-                <a:cs typeface="Calibri" pitchFamily="34" charset="-120"/>
-              </a:rPr>
-              <a:t>Full trace for transparency</a:t>
+                  <a:srgbClr val="1F2937"/>
+                </a:solidFill>
+                <a:latin typeface="Calibri" pitchFamily="34" charset="0"/>
+                <a:ea typeface="Calibri" pitchFamily="34" charset="-122"/>
+                <a:cs typeface="Calibri" pitchFamily="34" charset="-120"/>
+              </a:rPr>
+              <a:t>What was decided</a:t>
             </a:r>
             <a:endParaRPr lang="en-US" sz="1100" dirty="0"/>
           </a:p>
-          <a:p>
-            <a:pPr indent="0" marL="0">
-              <a:lnSpc>
-                <a:spcPct val="105000"/>
-              </a:lnSpc>
-              <a:buNone/>
-            </a:pPr>
-            <a:r>
-              <a:rPr lang="en-US" sz="1100" dirty="0">
-                <a:solidFill>
-                  <a:srgbClr val="4B5563"/>
-                </a:solidFill>
-                <a:latin typeface="Calibri" pitchFamily="34" charset="0"/>
-                <a:ea typeface="Calibri" pitchFamily="34" charset="-122"/>
-                <a:cs typeface="Calibri" pitchFamily="34" charset="-120"/>
-              </a:rPr>
-              <a:t>and debugging</a:t>
-            </a:r>
-            <a:endParaRPr lang="en-US" sz="1100" dirty="0"/>
-          </a:p>
-        </p:txBody>
-      </p:sp>
-      <p:sp>
-        <p:nvSpPr>
-          <p:cNvPr id="18" name="Shape 10"/>
-          <p:cNvSpPr/>
-          <p:nvPr/>
-        </p:nvSpPr>
-        <p:spPr>
-          <a:xfrm>
-            <a:off x="3749040" y="457200"/>
-            <a:ext cx="1783080" cy="6035040"/>
-          </a:xfrm>
-          <a:prstGeom prst="roundRect">
-            <a:avLst>
-              <a:gd name="adj" fmla="val 5128"/>
-            </a:avLst>
-          </a:prstGeom>
-          <a:solidFill>
-            <a:srgbClr val="F2FBF8"/>
-          </a:solidFill>
-          <a:ln w="19050">
-            <a:solidFill>
-              <a:srgbClr val="A8DDCB"/>
-            </a:solidFill>
-            <a:prstDash val="solid"/>
-          </a:ln>
-        </p:spPr>
-      </p:sp>
-      <p:sp>
-        <p:nvSpPr>
-          <p:cNvPr id="19" name="Shape 11"/>
-          <p:cNvSpPr/>
-          <p:nvPr/>
-        </p:nvSpPr>
-        <p:spPr>
-          <a:xfrm>
-            <a:off x="4320540" y="777240"/>
-            <a:ext cx="640080" cy="640080"/>
-          </a:xfrm>
-          <a:prstGeom prst="ellipse">
-            <a:avLst/>
-          </a:prstGeom>
-          <a:solidFill>
-            <a:srgbClr val="0F9D76"/>
-          </a:solidFill>
-          <a:ln w="12700">
-            <a:solidFill>
-              <a:srgbClr val="0F9D76"/>
-            </a:solidFill>
-            <a:prstDash val="solid"/>
-          </a:ln>
-        </p:spPr>
+        </p:txBody>
       </p:sp>
       <p:pic>
         <p:nvPicPr>
-          <p:cNvPr id="20" name="Image 6" descr="preencoded.png">    </p:cNvPr>
+          <p:cNvPr id="18" name="Image 6" descr="preencoded.png">    </p:cNvPr>
           <p:cNvPicPr>
             <a:picLocks noChangeAspect="1"/>
           </p:cNvPicPr>
@@ -4210,383 +4269,17 @@
         </p:blipFill>
         <p:spPr>
           <a:xfrm>
-            <a:off x="4466844" y="923544"/>
-            <a:ext cx="347472" cy="347472"/>
+            <a:off x="4005072" y="256032"/>
+            <a:ext cx="768096" cy="768096"/>
           </a:xfrm>
           <a:prstGeom prst="rect">
             <a:avLst/>
           </a:prstGeom>
         </p:spPr>
       </p:pic>
-      <p:sp>
-        <p:nvSpPr>
-          <p:cNvPr id="21" name="Text 12"/>
-          <p:cNvSpPr txBox="1"/>
-          <p:nvPr/>
-        </p:nvSpPr>
-        <p:spPr>
-          <a:xfrm>
-            <a:off x="3840480" y="1554480"/>
-            <a:ext cx="1600200" cy="640080"/>
-          </a:xfrm>
-          <a:prstGeom prst="rect">
-            <a:avLst/>
-          </a:prstGeom>
-          <a:noFill/>
-          <a:ln/>
-        </p:spPr>
-        <p:txBody>
-          <a:bodyPr wrap="square" lIns="0" tIns="0" rIns="0" bIns="0" rtlCol="0" anchor="ctr"/>
-          <a:lstStyle/>
-          <a:p>
-            <a:pPr algn="ctr" indent="0" marL="0">
-              <a:lnSpc>
-                <a:spcPct val="100000"/>
-              </a:lnSpc>
-              <a:buNone/>
-            </a:pPr>
-            <a:r>
-              <a:rPr lang="en-US" sz="1600" b="1" dirty="0">
-                <a:solidFill>
-                  <a:srgbClr val="0A7355"/>
-                </a:solidFill>
-                <a:latin typeface="Calibri" pitchFamily="34" charset="0"/>
-                <a:ea typeface="Calibri" pitchFamily="34" charset="-122"/>
-                <a:cs typeface="Calibri" pitchFamily="34" charset="-120"/>
-              </a:rPr>
-              <a:t>Kong AI</a:t>
-            </a:r>
-            <a:endParaRPr lang="en-US" sz="1600" dirty="0"/>
-          </a:p>
-          <a:p>
-            <a:pPr algn="ctr" indent="0" marL="0">
-              <a:lnSpc>
-                <a:spcPct val="100000"/>
-              </a:lnSpc>
-              <a:buNone/>
-            </a:pPr>
-            <a:r>
-              <a:rPr lang="en-US" sz="1600" b="1" dirty="0">
-                <a:solidFill>
-                  <a:srgbClr val="0A7355"/>
-                </a:solidFill>
-                <a:latin typeface="Calibri" pitchFamily="34" charset="0"/>
-                <a:ea typeface="Calibri" pitchFamily="34" charset="-122"/>
-                <a:cs typeface="Calibri" pitchFamily="34" charset="-120"/>
-              </a:rPr>
-              <a:t>Gateway</a:t>
-            </a:r>
-            <a:endParaRPr lang="en-US" sz="1600" dirty="0"/>
-          </a:p>
-        </p:txBody>
-      </p:sp>
-      <p:sp>
-        <p:nvSpPr>
-          <p:cNvPr id="22" name="Text 13"/>
-          <p:cNvSpPr txBox="1"/>
-          <p:nvPr/>
-        </p:nvSpPr>
-        <p:spPr>
-          <a:xfrm>
-            <a:off x="3840480" y="2240280"/>
-            <a:ext cx="1600200" cy="548640"/>
-          </a:xfrm>
-          <a:prstGeom prst="rect">
-            <a:avLst/>
-          </a:prstGeom>
-          <a:noFill/>
-          <a:ln/>
-        </p:spPr>
-        <p:txBody>
-          <a:bodyPr wrap="square" lIns="0" tIns="0" rIns="0" bIns="0" rtlCol="0" anchor="ctr"/>
-          <a:lstStyle/>
-          <a:p>
-            <a:pPr algn="ctr" indent="0" marL="0">
-              <a:lnSpc>
-                <a:spcPct val="105000"/>
-              </a:lnSpc>
-              <a:buNone/>
-            </a:pPr>
-            <a:r>
-              <a:rPr lang="en-US" sz="1000" i="1" dirty="0">
-                <a:solidFill>
-                  <a:srgbClr val="4B5563"/>
-                </a:solidFill>
-                <a:latin typeface="Calibri" pitchFamily="34" charset="0"/>
-                <a:ea typeface="Calibri" pitchFamily="34" charset="-122"/>
-                <a:cs typeface="Calibri" pitchFamily="34" charset="-120"/>
-              </a:rPr>
-              <a:t>One control point for</a:t>
-            </a:r>
-            <a:endParaRPr lang="en-US" sz="1000" dirty="0"/>
-          </a:p>
-          <a:p>
-            <a:pPr algn="ctr" indent="0" marL="0">
-              <a:lnSpc>
-                <a:spcPct val="105000"/>
-              </a:lnSpc>
-              <a:buNone/>
-            </a:pPr>
-            <a:r>
-              <a:rPr lang="en-US" sz="1000" i="1" dirty="0">
-                <a:solidFill>
-                  <a:srgbClr val="4B5563"/>
-                </a:solidFill>
-                <a:latin typeface="Calibri" pitchFamily="34" charset="0"/>
-                <a:ea typeface="Calibri" pitchFamily="34" charset="-122"/>
-                <a:cs typeface="Calibri" pitchFamily="34" charset="-120"/>
-              </a:rPr>
-              <a:t>all model and tool traffic</a:t>
-            </a:r>
-            <a:endParaRPr lang="en-US" sz="1000" dirty="0"/>
-          </a:p>
-        </p:txBody>
-      </p:sp>
-      <p:sp>
-        <p:nvSpPr>
-          <p:cNvPr id="23" name="Text 14"/>
-          <p:cNvSpPr txBox="1"/>
-          <p:nvPr/>
-        </p:nvSpPr>
-        <p:spPr>
-          <a:xfrm>
-            <a:off x="3913632" y="2971800"/>
-            <a:ext cx="1490472" cy="3291840"/>
-          </a:xfrm>
-          <a:prstGeom prst="rect">
-            <a:avLst/>
-          </a:prstGeom>
-          <a:noFill/>
-          <a:ln/>
-        </p:spPr>
-        <p:txBody>
-          <a:bodyPr wrap="square" lIns="0" tIns="0" rIns="0" bIns="0" rtlCol="0" anchor="t"/>
-          <a:lstStyle/>
-          <a:p>
-            <a:pPr marL="139700" indent="-139700">
-              <a:lnSpc>
-                <a:spcPct val="100000"/>
-              </a:lnSpc>
-              <a:spcAft>
-                <a:spcPts val="1200"/>
-              </a:spcAft>
-              <a:buSzPct val="100000"/>
-              <a:buChar char="•"/>
-            </a:pPr>
-            <a:r>
-              <a:rPr lang="en-US" sz="1100" dirty="0">
-                <a:solidFill>
-                  <a:srgbClr val="1F2937"/>
-                </a:solidFill>
-                <a:latin typeface="Calibri" pitchFamily="34" charset="0"/>
-                <a:ea typeface="Calibri" pitchFamily="34" charset="-122"/>
-                <a:cs typeface="Calibri" pitchFamily="34" charset="-120"/>
-              </a:rPr>
-              <a:t>A2A and MCP proxying</a:t>
-            </a:r>
-            <a:endParaRPr lang="en-US" sz="1100" dirty="0"/>
-          </a:p>
-          <a:p>
-            <a:pPr marL="139700" indent="-139700">
-              <a:lnSpc>
-                <a:spcPct val="100000"/>
-              </a:lnSpc>
-              <a:spcAft>
-                <a:spcPts val="1200"/>
-              </a:spcAft>
-              <a:buSzPct val="100000"/>
-              <a:buChar char="•"/>
-            </a:pPr>
-            <a:r>
-              <a:rPr lang="en-US" sz="1100" dirty="0">
-                <a:solidFill>
-                  <a:srgbClr val="1F2937"/>
-                </a:solidFill>
-                <a:latin typeface="Calibri" pitchFamily="34" charset="0"/>
-                <a:ea typeface="Calibri" pitchFamily="34" charset="-122"/>
-                <a:cs typeface="Calibri" pitchFamily="34" charset="-120"/>
-              </a:rPr>
-              <a:t>Auth and key vaulting</a:t>
-            </a:r>
-            <a:endParaRPr lang="en-US" sz="1100" dirty="0"/>
-          </a:p>
-          <a:p>
-            <a:pPr marL="139700" indent="-139700">
-              <a:lnSpc>
-                <a:spcPct val="100000"/>
-              </a:lnSpc>
-              <a:spcAft>
-                <a:spcPts val="1200"/>
-              </a:spcAft>
-              <a:buSzPct val="100000"/>
-              <a:buChar char="•"/>
-            </a:pPr>
-            <a:r>
-              <a:rPr lang="en-US" sz="1100" dirty="0">
-                <a:solidFill>
-                  <a:srgbClr val="1F2937"/>
-                </a:solidFill>
-                <a:latin typeface="Calibri" pitchFamily="34" charset="0"/>
-                <a:ea typeface="Calibri" pitchFamily="34" charset="-122"/>
-                <a:cs typeface="Calibri" pitchFamily="34" charset="-120"/>
-              </a:rPr>
-              <a:t>Rate limits and cost caps</a:t>
-            </a:r>
-            <a:endParaRPr lang="en-US" sz="1100" dirty="0"/>
-          </a:p>
-          <a:p>
-            <a:pPr marL="139700" indent="-139700">
-              <a:lnSpc>
-                <a:spcPct val="100000"/>
-              </a:lnSpc>
-              <a:spcAft>
-                <a:spcPts val="1200"/>
-              </a:spcAft>
-              <a:buSzPct val="100000"/>
-              <a:buChar char="•"/>
-            </a:pPr>
-            <a:r>
-              <a:rPr lang="en-US" sz="1100" dirty="0">
-                <a:solidFill>
-                  <a:srgbClr val="1F2937"/>
-                </a:solidFill>
-                <a:latin typeface="Calibri" pitchFamily="34" charset="0"/>
-                <a:ea typeface="Calibri" pitchFamily="34" charset="-122"/>
-                <a:cs typeface="Calibri" pitchFamily="34" charset="-120"/>
-              </a:rPr>
-              <a:t>Prompt and PII guardrails</a:t>
-            </a:r>
-            <a:endParaRPr lang="en-US" sz="1100" dirty="0"/>
-          </a:p>
-          <a:p>
-            <a:pPr marL="139700" indent="-139700">
-              <a:lnSpc>
-                <a:spcPct val="100000"/>
-              </a:lnSpc>
-              <a:spcAft>
-                <a:spcPts val="1200"/>
-              </a:spcAft>
-              <a:buSzPct val="100000"/>
-              <a:buChar char="•"/>
-            </a:pPr>
-            <a:r>
-              <a:rPr lang="en-US" sz="1100" dirty="0">
-                <a:solidFill>
-                  <a:srgbClr val="1F2937"/>
-                </a:solidFill>
-                <a:latin typeface="Calibri" pitchFamily="34" charset="0"/>
-                <a:ea typeface="Calibri" pitchFamily="34" charset="-122"/>
-                <a:cs typeface="Calibri" pitchFamily="34" charset="-120"/>
-              </a:rPr>
-              <a:t>Semantic caching and routing</a:t>
-            </a:r>
-            <a:endParaRPr lang="en-US" sz="1100" dirty="0"/>
-          </a:p>
-          <a:p>
-            <a:pPr marL="139700" indent="-139700">
-              <a:lnSpc>
-                <a:spcPct val="100000"/>
-              </a:lnSpc>
-              <a:spcAft>
-                <a:spcPts val="1200"/>
-              </a:spcAft>
-              <a:buSzPct val="100000"/>
-              <a:buChar char="•"/>
-            </a:pPr>
-            <a:r>
-              <a:rPr lang="en-US" sz="1100" dirty="0">
-                <a:solidFill>
-                  <a:srgbClr val="1F2937"/>
-                </a:solidFill>
-                <a:latin typeface="Calibri" pitchFamily="34" charset="0"/>
-                <a:ea typeface="Calibri" pitchFamily="34" charset="-122"/>
-                <a:cs typeface="Calibri" pitchFamily="34" charset="-120"/>
-              </a:rPr>
-              <a:t>Model failover and fallbacks</a:t>
-            </a:r>
-            <a:endParaRPr lang="en-US" sz="1100" dirty="0"/>
-          </a:p>
-          <a:p>
-            <a:pPr marL="139700" indent="-139700">
-              <a:lnSpc>
-                <a:spcPct val="100000"/>
-              </a:lnSpc>
-              <a:spcAft>
-                <a:spcPts val="1200"/>
-              </a:spcAft>
-              <a:buSzPct val="100000"/>
-              <a:buChar char="•"/>
-            </a:pPr>
-            <a:r>
-              <a:rPr lang="en-US" sz="1100" dirty="0">
-                <a:solidFill>
-                  <a:srgbClr val="1F2937"/>
-                </a:solidFill>
-                <a:latin typeface="Calibri" pitchFamily="34" charset="0"/>
-                <a:ea typeface="Calibri" pitchFamily="34" charset="-122"/>
-                <a:cs typeface="Calibri" pitchFamily="34" charset="-120"/>
-              </a:rPr>
-              <a:t>Metrics, logs and traces</a:t>
-            </a:r>
-            <a:endParaRPr lang="en-US" sz="1100" dirty="0"/>
-          </a:p>
-        </p:txBody>
-      </p:sp>
-      <p:sp>
-        <p:nvSpPr>
-          <p:cNvPr id="24" name="Shape 15"/>
-          <p:cNvSpPr/>
-          <p:nvPr/>
-        </p:nvSpPr>
-        <p:spPr>
-          <a:xfrm>
-            <a:off x="5989320" y="411480"/>
-            <a:ext cx="3108960" cy="1097280"/>
-          </a:xfrm>
-          <a:prstGeom prst="roundRect">
-            <a:avLst>
-              <a:gd name="adj" fmla="val 10000"/>
-            </a:avLst>
-          </a:prstGeom>
-          <a:solidFill>
-            <a:srgbClr val="FFFFFF"/>
-          </a:solidFill>
-          <a:ln w="15875">
-            <a:solidFill>
-              <a:srgbClr val="D8D2F2"/>
-            </a:solidFill>
-            <a:prstDash val="solid"/>
-          </a:ln>
-        </p:spPr>
-      </p:sp>
-      <p:sp>
-        <p:nvSpPr>
-          <p:cNvPr id="25" name="Shape 16"/>
-          <p:cNvSpPr/>
-          <p:nvPr/>
-        </p:nvSpPr>
-        <p:spPr>
-          <a:xfrm>
-            <a:off x="6190488" y="694944"/>
-            <a:ext cx="566928" cy="566928"/>
-          </a:xfrm>
-          <a:prstGeom prst="ellipse">
-            <a:avLst/>
-          </a:prstGeom>
-          <a:solidFill>
-            <a:srgbClr val="6D28D9"/>
-          </a:solidFill>
-          <a:ln w="12700">
-            <a:solidFill>
-              <a:srgbClr val="6D28D9"/>
-            </a:solidFill>
-            <a:prstDash val="solid"/>
-          </a:ln>
-        </p:spPr>
-      </p:sp>
       <p:pic>
         <p:nvPicPr>
-          <p:cNvPr id="26" name="Image 7" descr="preencoded.png">    </p:cNvPr>
+          <p:cNvPr id="19" name="Image 7" descr="preencoded.png">    </p:cNvPr>
           <p:cNvPicPr>
             <a:picLocks noChangeAspect="1"/>
           </p:cNvPicPr>
@@ -4600,8 +4293,8 @@
         </p:blipFill>
         <p:spPr>
           <a:xfrm>
-            <a:off x="6318504" y="822960"/>
-            <a:ext cx="310896" cy="310896"/>
+            <a:off x="4142232" y="411480"/>
+            <a:ext cx="493776" cy="493776"/>
           </a:xfrm>
           <a:prstGeom prst="rect">
             <a:avLst/>
@@ -4610,14 +4303,14 @@
       </p:pic>
       <p:sp>
         <p:nvSpPr>
-          <p:cNvPr id="27" name="Text 17"/>
+          <p:cNvPr id="20" name="Text 10"/>
           <p:cNvSpPr txBox="1"/>
           <p:nvPr/>
         </p:nvSpPr>
         <p:spPr>
           <a:xfrm>
-            <a:off x="6931152" y="502920"/>
-            <a:ext cx="2011680" cy="347472"/>
+            <a:off x="3063240" y="1078992"/>
+            <a:ext cx="2651760" cy="411480"/>
           </a:xfrm>
           <a:prstGeom prst="rect">
             <a:avLst/>
@@ -4626,139 +4319,49 @@
           <a:ln/>
         </p:spPr>
         <p:txBody>
-          <a:bodyPr wrap="square" lIns="0" tIns="0" rIns="0" bIns="0" rtlCol="0" anchor="t"/>
-          <a:lstStyle/>
-          <a:p>
-            <a:pPr indent="0" marL="0">
-              <a:lnSpc>
-                <a:spcPct val="95000"/>
-              </a:lnSpc>
-              <a:buNone/>
-            </a:pPr>
-            <a:r>
-              <a:rPr lang="en-US" sz="1600" b="1" dirty="0">
-                <a:solidFill>
-                  <a:srgbClr val="5B21B6"/>
-                </a:solidFill>
-                <a:latin typeface="Calibri" pitchFamily="34" charset="0"/>
-                <a:ea typeface="Calibri" pitchFamily="34" charset="-122"/>
-                <a:cs typeface="Calibri" pitchFamily="34" charset="-120"/>
-              </a:rPr>
-              <a:t>Model</a:t>
-            </a:r>
-            <a:endParaRPr lang="en-US" sz="1600" dirty="0"/>
-          </a:p>
-        </p:txBody>
-      </p:sp>
-      <p:sp>
-        <p:nvSpPr>
-          <p:cNvPr id="28" name="Text 18"/>
-          <p:cNvSpPr txBox="1"/>
-          <p:nvPr/>
-        </p:nvSpPr>
-        <p:spPr>
-          <a:xfrm>
-            <a:off x="6931152" y="832104"/>
-            <a:ext cx="2011680" cy="640080"/>
-          </a:xfrm>
-          <a:prstGeom prst="rect">
-            <a:avLst/>
-          </a:prstGeom>
-          <a:noFill/>
-          <a:ln/>
-        </p:spPr>
-        <p:txBody>
-          <a:bodyPr wrap="square" lIns="0" tIns="0" rIns="0" bIns="0" rtlCol="0" anchor="t"/>
-          <a:lstStyle/>
-          <a:p>
-            <a:pPr indent="0" marL="0">
-              <a:lnSpc>
-                <a:spcPct val="110000"/>
-              </a:lnSpc>
-              <a:buNone/>
-            </a:pPr>
-            <a:r>
-              <a:rPr lang="en-US" sz="1150" dirty="0">
-                <a:solidFill>
-                  <a:srgbClr val="1F2937"/>
-                </a:solidFill>
-                <a:latin typeface="Calibri" pitchFamily="34" charset="0"/>
-                <a:ea typeface="Calibri" pitchFamily="34" charset="-122"/>
-                <a:cs typeface="Calibri" pitchFamily="34" charset="-120"/>
-              </a:rPr>
-              <a:t>The LLM that reasons, plans</a:t>
-            </a:r>
-            <a:endParaRPr lang="en-US" sz="1150" dirty="0"/>
-          </a:p>
-          <a:p>
-            <a:pPr indent="0" marL="0">
-              <a:lnSpc>
-                <a:spcPct val="110000"/>
-              </a:lnSpc>
-              <a:buNone/>
-            </a:pPr>
-            <a:r>
-              <a:rPr lang="en-US" sz="1150" dirty="0">
-                <a:solidFill>
-                  <a:srgbClr val="1F2937"/>
-                </a:solidFill>
-                <a:latin typeface="Calibri" pitchFamily="34" charset="0"/>
-                <a:ea typeface="Calibri" pitchFamily="34" charset="-122"/>
-                <a:cs typeface="Calibri" pitchFamily="34" charset="-120"/>
-              </a:rPr>
-              <a:t>and generates responses.</a:t>
-            </a:r>
-            <a:endParaRPr lang="en-US" sz="1150" dirty="0"/>
-          </a:p>
-        </p:txBody>
-      </p:sp>
-      <p:sp>
-        <p:nvSpPr>
-          <p:cNvPr id="29" name="Shape 19"/>
-          <p:cNvSpPr/>
-          <p:nvPr/>
-        </p:nvSpPr>
-        <p:spPr>
-          <a:xfrm>
-            <a:off x="5989320" y="1668780"/>
-            <a:ext cx="3108960" cy="1097280"/>
+          <a:bodyPr wrap="square" lIns="0" tIns="0" rIns="0" bIns="0" rtlCol="0" anchor="ctr"/>
+          <a:lstStyle/>
+          <a:p>
+            <a:pPr algn="ctr" indent="0" marL="0">
+              <a:buNone/>
+            </a:pPr>
+            <a:r>
+              <a:rPr lang="en-US" sz="2100" b="1" dirty="0">
+                <a:solidFill>
+                  <a:srgbClr val="1E3A8A"/>
+                </a:solidFill>
+                <a:latin typeface="Calibri" pitchFamily="34" charset="0"/>
+                <a:ea typeface="Calibri" pitchFamily="34" charset="-122"/>
+                <a:cs typeface="Calibri" pitchFamily="34" charset="-120"/>
+              </a:rPr>
+              <a:t>Agent Harness</a:t>
+            </a:r>
+            <a:endParaRPr lang="en-US" sz="2100" dirty="0"/>
+          </a:p>
+        </p:txBody>
+      </p:sp>
+      <p:sp>
+        <p:nvSpPr>
+          <p:cNvPr id="21" name="Shape 11"/>
+          <p:cNvSpPr/>
+          <p:nvPr/>
+        </p:nvSpPr>
+        <p:spPr>
+          <a:xfrm>
+            <a:off x="3063240" y="1645920"/>
+            <a:ext cx="2651760" cy="4800600"/>
           </a:xfrm>
           <a:prstGeom prst="roundRect">
             <a:avLst>
-              <a:gd name="adj" fmla="val 10000"/>
+              <a:gd name="adj" fmla="val 4828"/>
             </a:avLst>
           </a:prstGeom>
           <a:solidFill>
-            <a:srgbClr val="F6F7FE"/>
+            <a:srgbClr val="FFFFFF"/>
           </a:solidFill>
           <a:ln w="15875">
             <a:solidFill>
-              <a:srgbClr val="C7CCF7"/>
-            </a:solidFill>
-            <a:prstDash val="solid"/>
-          </a:ln>
-        </p:spPr>
-      </p:sp>
-      <p:sp>
-        <p:nvSpPr>
-          <p:cNvPr id="30" name="Shape 20"/>
-          <p:cNvSpPr/>
-          <p:nvPr/>
-        </p:nvSpPr>
-        <p:spPr>
-          <a:xfrm>
-            <a:off x="6190488" y="1952244"/>
-            <a:ext cx="566928" cy="566928"/>
-          </a:xfrm>
-          <a:prstGeom prst="ellipse">
-            <a:avLst/>
-          </a:prstGeom>
-          <a:solidFill>
-            <a:srgbClr val="4338CA"/>
-          </a:solidFill>
-          <a:ln w="12700">
-            <a:solidFill>
-              <a:srgbClr val="4338CA"/>
+              <a:srgbClr val="C7D2E8"/>
             </a:solidFill>
             <a:prstDash val="solid"/>
           </a:ln>
@@ -4766,7 +4369,7 @@
       </p:sp>
       <p:pic>
         <p:nvPicPr>
-          <p:cNvPr id="31" name="Image 8" descr="preencoded.png">    </p:cNvPr>
+          <p:cNvPr id="22" name="Image 8" descr="preencoded.png">    </p:cNvPr>
           <p:cNvPicPr>
             <a:picLocks noChangeAspect="1"/>
           </p:cNvPicPr>
@@ -4780,8 +4383,8 @@
         </p:blipFill>
         <p:spPr>
           <a:xfrm>
-            <a:off x="6318504" y="2080260"/>
-            <a:ext cx="310896" cy="310896"/>
+            <a:off x="3209544" y="1956816"/>
+            <a:ext cx="384048" cy="384048"/>
           </a:xfrm>
           <a:prstGeom prst="rect">
             <a:avLst/>
@@ -4790,14 +4393,14 @@
       </p:pic>
       <p:sp>
         <p:nvSpPr>
-          <p:cNvPr id="32" name="Text 21"/>
+          <p:cNvPr id="23" name="Text 12"/>
           <p:cNvSpPr txBox="1"/>
           <p:nvPr/>
         </p:nvSpPr>
         <p:spPr>
           <a:xfrm>
-            <a:off x="6931152" y="1760220"/>
-            <a:ext cx="2011680" cy="347472"/>
+            <a:off x="3703320" y="1883664"/>
+            <a:ext cx="1874520" cy="548640"/>
           </a:xfrm>
           <a:prstGeom prst="rect">
             <a:avLst/>
@@ -4811,35 +4414,35 @@
           <a:p>
             <a:pPr indent="0" marL="0">
               <a:lnSpc>
-                <a:spcPct val="95000"/>
-              </a:lnSpc>
-              <a:buNone/>
-            </a:pPr>
-            <a:r>
-              <a:rPr lang="en-US" sz="1600" b="1" dirty="0">
-                <a:solidFill>
-                  <a:srgbClr val="3730A3"/>
-                </a:solidFill>
-                <a:latin typeface="Calibri" pitchFamily="34" charset="0"/>
-                <a:ea typeface="Calibri" pitchFamily="34" charset="-122"/>
-                <a:cs typeface="Calibri" pitchFamily="34" charset="-120"/>
-              </a:rPr>
-              <a:t>Peer Agents (A2A)</a:t>
-            </a:r>
-            <a:endParaRPr lang="en-US" sz="1600" dirty="0"/>
-          </a:p>
-        </p:txBody>
-      </p:sp>
-      <p:sp>
-        <p:nvSpPr>
-          <p:cNvPr id="33" name="Text 22"/>
+                <a:spcPct val="105000"/>
+              </a:lnSpc>
+              <a:buNone/>
+            </a:pPr>
+            <a:r>
+              <a:rPr lang="en-US" sz="1150" dirty="0">
+                <a:solidFill>
+                  <a:srgbClr val="1F2937"/>
+                </a:solidFill>
+                <a:latin typeface="Calibri" pitchFamily="34" charset="0"/>
+                <a:ea typeface="Calibri" pitchFamily="34" charset="-122"/>
+                <a:cs typeface="Calibri" pitchFamily="34" charset="-120"/>
+              </a:rPr>
+              <a:t>Orchestrates the run</a:t>
+            </a:r>
+            <a:endParaRPr lang="en-US" sz="1150" dirty="0"/>
+          </a:p>
+        </p:txBody>
+      </p:sp>
+      <p:sp>
+        <p:nvSpPr>
+          <p:cNvPr id="24" name="Text 13"/>
           <p:cNvSpPr txBox="1"/>
           <p:nvPr/>
         </p:nvSpPr>
         <p:spPr>
           <a:xfrm>
-            <a:off x="6931152" y="2089404"/>
-            <a:ext cx="2011680" cy="640080"/>
+            <a:off x="3703320" y="2203704"/>
+            <a:ext cx="1874520" cy="502920"/>
           </a:xfrm>
           <a:prstGeom prst="rect">
             <a:avLst/>
@@ -4853,100 +4456,28 @@
           <a:p>
             <a:pPr indent="0" marL="0">
               <a:lnSpc>
-                <a:spcPct val="110000"/>
-              </a:lnSpc>
-              <a:buNone/>
-            </a:pPr>
-            <a:r>
-              <a:rPr lang="en-US" sz="1150" dirty="0">
-                <a:solidFill>
-                  <a:srgbClr val="1F2937"/>
-                </a:solidFill>
-                <a:latin typeface="Calibri" pitchFamily="34" charset="0"/>
-                <a:ea typeface="Calibri" pitchFamily="34" charset="-122"/>
-                <a:cs typeface="Calibri" pitchFamily="34" charset="-120"/>
-              </a:rPr>
-              <a:t>Other agents the harness</a:t>
-            </a:r>
-            <a:endParaRPr lang="en-US" sz="1150" dirty="0"/>
-          </a:p>
-          <a:p>
-            <a:pPr indent="0" marL="0">
-              <a:lnSpc>
-                <a:spcPct val="110000"/>
-              </a:lnSpc>
-              <a:buNone/>
-            </a:pPr>
-            <a:r>
-              <a:rPr lang="en-US" sz="1150" dirty="0">
-                <a:solidFill>
-                  <a:srgbClr val="1F2937"/>
-                </a:solidFill>
-                <a:latin typeface="Calibri" pitchFamily="34" charset="0"/>
-                <a:ea typeface="Calibri" pitchFamily="34" charset="-122"/>
-                <a:cs typeface="Calibri" pitchFamily="34" charset="-120"/>
-              </a:rPr>
-              <a:t>delegates tasks to over A2A.</a:t>
-            </a:r>
-            <a:endParaRPr lang="en-US" sz="1150" dirty="0"/>
-          </a:p>
-        </p:txBody>
-      </p:sp>
-      <p:sp>
-        <p:nvSpPr>
-          <p:cNvPr id="34" name="Shape 23"/>
-          <p:cNvSpPr/>
-          <p:nvPr/>
-        </p:nvSpPr>
-        <p:spPr>
-          <a:xfrm>
-            <a:off x="5989320" y="2926080"/>
-            <a:ext cx="3108960" cy="1097280"/>
-          </a:xfrm>
-          <a:prstGeom prst="roundRect">
-            <a:avLst>
-              <a:gd name="adj" fmla="val 10000"/>
-            </a:avLst>
-          </a:prstGeom>
-          <a:solidFill>
-            <a:srgbClr val="F7FCF8"/>
-          </a:solidFill>
-          <a:ln w="15875">
-            <a:solidFill>
-              <a:srgbClr val="BFE0C7"/>
-            </a:solidFill>
-            <a:prstDash val="solid"/>
-          </a:ln>
-        </p:spPr>
-      </p:sp>
-      <p:sp>
-        <p:nvSpPr>
-          <p:cNvPr id="35" name="Shape 24"/>
-          <p:cNvSpPr/>
-          <p:nvPr/>
-        </p:nvSpPr>
-        <p:spPr>
-          <a:xfrm>
-            <a:off x="6190488" y="3209544"/>
-            <a:ext cx="566928" cy="566928"/>
-          </a:xfrm>
-          <a:prstGeom prst="ellipse">
-            <a:avLst/>
-          </a:prstGeom>
-          <a:solidFill>
-            <a:srgbClr val="15803D"/>
-          </a:solidFill>
-          <a:ln w="12700">
-            <a:solidFill>
-              <a:srgbClr val="15803D"/>
-            </a:solidFill>
-            <a:prstDash val="solid"/>
-          </a:ln>
-        </p:spPr>
+                <a:spcPct val="105000"/>
+              </a:lnSpc>
+              <a:buNone/>
+            </a:pPr>
+            <a:r>
+              <a:rPr lang="en-US" sz="1050" dirty="0">
+                <a:solidFill>
+                  <a:srgbClr val="4B5563"/>
+                </a:solidFill>
+                <a:latin typeface="Calibri" pitchFamily="34" charset="0"/>
+                <a:ea typeface="Calibri" pitchFamily="34" charset="-122"/>
+                <a:cs typeface="Calibri" pitchFamily="34" charset="-120"/>
+              </a:rPr>
+              <a:t>Plans steps and manages flow</a:t>
+            </a:r>
+            <a:endParaRPr lang="en-US" sz="1050" dirty="0"/>
+          </a:p>
+        </p:txBody>
       </p:sp>
       <p:pic>
         <p:nvPicPr>
-          <p:cNvPr id="36" name="Image 9" descr="preencoded.png">    </p:cNvPr>
+          <p:cNvPr id="25" name="Image 9" descr="preencoded.png">    </p:cNvPr>
           <p:cNvPicPr>
             <a:picLocks noChangeAspect="1"/>
           </p:cNvPicPr>
@@ -4960,8 +4491,8 @@
         </p:blipFill>
         <p:spPr>
           <a:xfrm>
-            <a:off x="6318504" y="3337560"/>
-            <a:ext cx="310896" cy="310896"/>
+            <a:off x="3209544" y="3008376"/>
+            <a:ext cx="384048" cy="384048"/>
           </a:xfrm>
           <a:prstGeom prst="rect">
             <a:avLst/>
@@ -4970,14 +4501,14 @@
       </p:pic>
       <p:sp>
         <p:nvSpPr>
-          <p:cNvPr id="37" name="Text 25"/>
+          <p:cNvPr id="26" name="Text 14"/>
           <p:cNvSpPr txBox="1"/>
           <p:nvPr/>
         </p:nvSpPr>
         <p:spPr>
           <a:xfrm>
-            <a:off x="6931152" y="3017520"/>
-            <a:ext cx="2011680" cy="347472"/>
+            <a:off x="3703320" y="2935224"/>
+            <a:ext cx="1874520" cy="548640"/>
           </a:xfrm>
           <a:prstGeom prst="rect">
             <a:avLst/>
@@ -4991,35 +4522,55 @@
           <a:p>
             <a:pPr indent="0" marL="0">
               <a:lnSpc>
-                <a:spcPct val="95000"/>
-              </a:lnSpc>
-              <a:buNone/>
-            </a:pPr>
-            <a:r>
-              <a:rPr lang="en-US" sz="1600" b="1" dirty="0">
-                <a:solidFill>
-                  <a:srgbClr val="166534"/>
-                </a:solidFill>
-                <a:latin typeface="Calibri" pitchFamily="34" charset="0"/>
-                <a:ea typeface="Calibri" pitchFamily="34" charset="-122"/>
-                <a:cs typeface="Calibri" pitchFamily="34" charset="-120"/>
-              </a:rPr>
-              <a:t>Tools and MCP Servers</a:t>
-            </a:r>
-            <a:endParaRPr lang="en-US" sz="1600" dirty="0"/>
-          </a:p>
-        </p:txBody>
-      </p:sp>
-      <p:sp>
-        <p:nvSpPr>
-          <p:cNvPr id="38" name="Text 26"/>
+                <a:spcPct val="105000"/>
+              </a:lnSpc>
+              <a:buNone/>
+            </a:pPr>
+            <a:r>
+              <a:rPr lang="en-US" sz="1150" dirty="0">
+                <a:solidFill>
+                  <a:srgbClr val="1F2937"/>
+                </a:solidFill>
+                <a:latin typeface="Calibri" pitchFamily="34" charset="0"/>
+                <a:ea typeface="Calibri" pitchFamily="34" charset="-122"/>
+                <a:cs typeface="Calibri" pitchFamily="34" charset="-120"/>
+              </a:rPr>
+              <a:t>Routes between model,</a:t>
+            </a:r>
+            <a:endParaRPr lang="en-US" sz="1150" dirty="0"/>
+          </a:p>
+          <a:p>
+            <a:pPr indent="0" marL="0">
+              <a:lnSpc>
+                <a:spcPct val="105000"/>
+              </a:lnSpc>
+              <a:buNone/>
+            </a:pPr>
+            <a:r>
+              <a:rPr lang="en-US" sz="1150" dirty="0">
+                <a:solidFill>
+                  <a:srgbClr val="1F2937"/>
+                </a:solidFill>
+                <a:latin typeface="Calibri" pitchFamily="34" charset="0"/>
+                <a:ea typeface="Calibri" pitchFamily="34" charset="-122"/>
+                <a:cs typeface="Calibri" pitchFamily="34" charset="-120"/>
+              </a:rPr>
+              <a:t>agents, tools and approvals</a:t>
+            </a:r>
+            <a:endParaRPr lang="en-US" sz="1150" dirty="0"/>
+          </a:p>
+        </p:txBody>
+      </p:sp>
+      <p:sp>
+        <p:nvSpPr>
+          <p:cNvPr id="27" name="Text 15"/>
           <p:cNvSpPr txBox="1"/>
           <p:nvPr/>
         </p:nvSpPr>
         <p:spPr>
           <a:xfrm>
-            <a:off x="6931152" y="3346704"/>
-            <a:ext cx="2011680" cy="640080"/>
+            <a:off x="3703320" y="3538728"/>
+            <a:ext cx="1874520" cy="502920"/>
           </a:xfrm>
           <a:prstGeom prst="rect">
             <a:avLst/>
@@ -5033,100 +4584,28 @@
           <a:p>
             <a:pPr indent="0" marL="0">
               <a:lnSpc>
-                <a:spcPct val="110000"/>
-              </a:lnSpc>
-              <a:buNone/>
-            </a:pPr>
-            <a:r>
-              <a:rPr lang="en-US" sz="1150" dirty="0">
-                <a:solidFill>
-                  <a:srgbClr val="1F2937"/>
-                </a:solidFill>
-                <a:latin typeface="Calibri" pitchFamily="34" charset="0"/>
-                <a:ea typeface="Calibri" pitchFamily="34" charset="-122"/>
-                <a:cs typeface="Calibri" pitchFamily="34" charset="-120"/>
-              </a:rPr>
-              <a:t>External capabilities the</a:t>
-            </a:r>
-            <a:endParaRPr lang="en-US" sz="1150" dirty="0"/>
-          </a:p>
-          <a:p>
-            <a:pPr indent="0" marL="0">
-              <a:lnSpc>
-                <a:spcPct val="110000"/>
-              </a:lnSpc>
-              <a:buNone/>
-            </a:pPr>
-            <a:r>
-              <a:rPr lang="en-US" sz="1150" dirty="0">
-                <a:solidFill>
-                  <a:srgbClr val="1F2937"/>
-                </a:solidFill>
-                <a:latin typeface="Calibri" pitchFamily="34" charset="0"/>
-                <a:ea typeface="Calibri" pitchFamily="34" charset="-122"/>
-                <a:cs typeface="Calibri" pitchFamily="34" charset="-120"/>
-              </a:rPr>
-              <a:t>agent can use.</a:t>
-            </a:r>
-            <a:endParaRPr lang="en-US" sz="1150" dirty="0"/>
-          </a:p>
-        </p:txBody>
-      </p:sp>
-      <p:sp>
-        <p:nvSpPr>
-          <p:cNvPr id="39" name="Shape 27"/>
-          <p:cNvSpPr/>
-          <p:nvPr/>
-        </p:nvSpPr>
-        <p:spPr>
-          <a:xfrm>
-            <a:off x="5989320" y="4183380"/>
-            <a:ext cx="3108960" cy="1097280"/>
-          </a:xfrm>
-          <a:prstGeom prst="roundRect">
-            <a:avLst>
-              <a:gd name="adj" fmla="val 10000"/>
-            </a:avLst>
-          </a:prstGeom>
-          <a:solidFill>
-            <a:srgbClr val="FFFBF7"/>
-          </a:solidFill>
-          <a:ln w="15875">
-            <a:solidFill>
-              <a:srgbClr val="F8D6BC"/>
-            </a:solidFill>
-            <a:prstDash val="solid"/>
-          </a:ln>
-        </p:spPr>
-      </p:sp>
-      <p:sp>
-        <p:nvSpPr>
-          <p:cNvPr id="40" name="Shape 28"/>
-          <p:cNvSpPr/>
-          <p:nvPr/>
-        </p:nvSpPr>
-        <p:spPr>
-          <a:xfrm>
-            <a:off x="6190488" y="4466844"/>
-            <a:ext cx="566928" cy="566928"/>
-          </a:xfrm>
-          <a:prstGeom prst="ellipse">
-            <a:avLst/>
-          </a:prstGeom>
-          <a:solidFill>
-            <a:srgbClr val="EA580C"/>
-          </a:solidFill>
-          <a:ln w="12700">
-            <a:solidFill>
-              <a:srgbClr val="EA580C"/>
-            </a:solidFill>
-            <a:prstDash val="solid"/>
-          </a:ln>
-        </p:spPr>
+                <a:spcPct val="105000"/>
+              </a:lnSpc>
+              <a:buNone/>
+            </a:pPr>
+            <a:r>
+              <a:rPr lang="en-US" sz="1050" dirty="0">
+                <a:solidFill>
+                  <a:srgbClr val="4B5563"/>
+                </a:solidFill>
+                <a:latin typeface="Calibri" pitchFamily="34" charset="0"/>
+                <a:ea typeface="Calibri" pitchFamily="34" charset="-122"/>
+                <a:cs typeface="Calibri" pitchFamily="34" charset="-120"/>
+              </a:rPr>
+              <a:t>Picks the right capability</a:t>
+            </a:r>
+            <a:endParaRPr lang="en-US" sz="1050" dirty="0"/>
+          </a:p>
+        </p:txBody>
       </p:sp>
       <p:pic>
         <p:nvPicPr>
-          <p:cNvPr id="41" name="Image 10" descr="preencoded.png">    </p:cNvPr>
+          <p:cNvPr id="28" name="Image 10" descr="preencoded.png">    </p:cNvPr>
           <p:cNvPicPr>
             <a:picLocks noChangeAspect="1"/>
           </p:cNvPicPr>
@@ -5140,8 +4619,8 @@
         </p:blipFill>
         <p:spPr>
           <a:xfrm>
-            <a:off x="6318504" y="4594860"/>
-            <a:ext cx="310896" cy="310896"/>
+            <a:off x="3209544" y="4288536"/>
+            <a:ext cx="384048" cy="384048"/>
           </a:xfrm>
           <a:prstGeom prst="rect">
             <a:avLst/>
@@ -5150,14 +4629,14 @@
       </p:pic>
       <p:sp>
         <p:nvSpPr>
-          <p:cNvPr id="42" name="Text 29"/>
+          <p:cNvPr id="29" name="Text 16"/>
           <p:cNvSpPr txBox="1"/>
           <p:nvPr/>
         </p:nvSpPr>
         <p:spPr>
           <a:xfrm>
-            <a:off x="6931152" y="4274820"/>
-            <a:ext cx="2011680" cy="347472"/>
+            <a:off x="3703320" y="4215384"/>
+            <a:ext cx="1874520" cy="548640"/>
           </a:xfrm>
           <a:prstGeom prst="rect">
             <a:avLst/>
@@ -5171,35 +4650,35 @@
           <a:p>
             <a:pPr indent="0" marL="0">
               <a:lnSpc>
-                <a:spcPct val="95000"/>
-              </a:lnSpc>
-              <a:buNone/>
-            </a:pPr>
-            <a:r>
-              <a:rPr lang="en-US" sz="1600" b="1" dirty="0">
-                <a:solidFill>
-                  <a:srgbClr val="C2410C"/>
-                </a:solidFill>
-                <a:latin typeface="Calibri" pitchFamily="34" charset="0"/>
-                <a:ea typeface="Calibri" pitchFamily="34" charset="-122"/>
-                <a:cs typeface="Calibri" pitchFamily="34" charset="-120"/>
-              </a:rPr>
-              <a:t>Sandbox</a:t>
-            </a:r>
-            <a:endParaRPr lang="en-US" sz="1600" dirty="0"/>
-          </a:p>
-        </p:txBody>
-      </p:sp>
-      <p:sp>
-        <p:nvSpPr>
-          <p:cNvPr id="43" name="Text 30"/>
+                <a:spcPct val="105000"/>
+              </a:lnSpc>
+              <a:buNone/>
+            </a:pPr>
+            <a:r>
+              <a:rPr lang="en-US" sz="1150" dirty="0">
+                <a:solidFill>
+                  <a:srgbClr val="1F2937"/>
+                </a:solidFill>
+                <a:latin typeface="Calibri" pitchFamily="34" charset="0"/>
+                <a:ea typeface="Calibri" pitchFamily="34" charset="-122"/>
+                <a:cs typeface="Calibri" pitchFamily="34" charset="-120"/>
+              </a:rPr>
+              <a:t>Enforces guardrails</a:t>
+            </a:r>
+            <a:endParaRPr lang="en-US" sz="1150" dirty="0"/>
+          </a:p>
+        </p:txBody>
+      </p:sp>
+      <p:sp>
+        <p:nvSpPr>
+          <p:cNvPr id="30" name="Text 17"/>
           <p:cNvSpPr txBox="1"/>
           <p:nvPr/>
         </p:nvSpPr>
         <p:spPr>
           <a:xfrm>
-            <a:off x="6931152" y="4604004"/>
-            <a:ext cx="2011680" cy="640080"/>
+            <a:off x="3703320" y="4535424"/>
+            <a:ext cx="1874520" cy="502920"/>
           </a:xfrm>
           <a:prstGeom prst="rect">
             <a:avLst/>
@@ -5213,100 +4692,28 @@
           <a:p>
             <a:pPr indent="0" marL="0">
               <a:lnSpc>
-                <a:spcPct val="110000"/>
-              </a:lnSpc>
-              <a:buNone/>
-            </a:pPr>
-            <a:r>
-              <a:rPr lang="en-US" sz="1150" dirty="0">
-                <a:solidFill>
-                  <a:srgbClr val="1F2937"/>
-                </a:solidFill>
-                <a:latin typeface="Calibri" pitchFamily="34" charset="0"/>
-                <a:ea typeface="Calibri" pitchFamily="34" charset="-122"/>
-                <a:cs typeface="Calibri" pitchFamily="34" charset="-120"/>
-              </a:rPr>
-              <a:t>Isolated environment to run</a:t>
-            </a:r>
-            <a:endParaRPr lang="en-US" sz="1150" dirty="0"/>
-          </a:p>
-          <a:p>
-            <a:pPr indent="0" marL="0">
-              <a:lnSpc>
-                <a:spcPct val="110000"/>
-              </a:lnSpc>
-              <a:buNone/>
-            </a:pPr>
-            <a:r>
-              <a:rPr lang="en-US" sz="1150" dirty="0">
-                <a:solidFill>
-                  <a:srgbClr val="1F2937"/>
-                </a:solidFill>
-                <a:latin typeface="Calibri" pitchFamily="34" charset="0"/>
-                <a:ea typeface="Calibri" pitchFamily="34" charset="-122"/>
-                <a:cs typeface="Calibri" pitchFamily="34" charset="-120"/>
-              </a:rPr>
-              <a:t>code and process data safely.</a:t>
-            </a:r>
-            <a:endParaRPr lang="en-US" sz="1150" dirty="0"/>
-          </a:p>
-        </p:txBody>
-      </p:sp>
-      <p:sp>
-        <p:nvSpPr>
-          <p:cNvPr id="44" name="Shape 31"/>
-          <p:cNvSpPr/>
-          <p:nvPr/>
-        </p:nvSpPr>
-        <p:spPr>
-          <a:xfrm>
-            <a:off x="5989320" y="5440680"/>
-            <a:ext cx="3108960" cy="1097280"/>
-          </a:xfrm>
-          <a:prstGeom prst="roundRect">
-            <a:avLst>
-              <a:gd name="adj" fmla="val 10000"/>
-            </a:avLst>
-          </a:prstGeom>
-          <a:solidFill>
-            <a:srgbClr val="FFFDF6"/>
-          </a:solidFill>
-          <a:ln w="15875">
-            <a:solidFill>
-              <a:srgbClr val="F7E0AE"/>
-            </a:solidFill>
-            <a:prstDash val="solid"/>
-          </a:ln>
-        </p:spPr>
-      </p:sp>
-      <p:sp>
-        <p:nvSpPr>
-          <p:cNvPr id="45" name="Shape 32"/>
-          <p:cNvSpPr/>
-          <p:nvPr/>
-        </p:nvSpPr>
-        <p:spPr>
-          <a:xfrm>
-            <a:off x="6190488" y="5724144"/>
-            <a:ext cx="566928" cy="566928"/>
-          </a:xfrm>
-          <a:prstGeom prst="ellipse">
-            <a:avLst/>
-          </a:prstGeom>
-          <a:solidFill>
-            <a:srgbClr val="F0A81E"/>
-          </a:solidFill>
-          <a:ln w="12700">
-            <a:solidFill>
-              <a:srgbClr val="F0A81E"/>
-            </a:solidFill>
-            <a:prstDash val="solid"/>
-          </a:ln>
-        </p:spPr>
+                <a:spcPct val="105000"/>
+              </a:lnSpc>
+              <a:buNone/>
+            </a:pPr>
+            <a:r>
+              <a:rPr lang="en-US" sz="1050" dirty="0">
+                <a:solidFill>
+                  <a:srgbClr val="4B5563"/>
+                </a:solidFill>
+                <a:latin typeface="Calibri" pitchFamily="34" charset="0"/>
+                <a:ea typeface="Calibri" pitchFamily="34" charset="-122"/>
+                <a:cs typeface="Calibri" pitchFamily="34" charset="-120"/>
+              </a:rPr>
+              <a:t>Safety, policies and limits</a:t>
+            </a:r>
+            <a:endParaRPr lang="en-US" sz="1050" dirty="0"/>
+          </a:p>
+        </p:txBody>
       </p:sp>
       <p:pic>
         <p:nvPicPr>
-          <p:cNvPr id="46" name="Image 11" descr="preencoded.png">    </p:cNvPr>
+          <p:cNvPr id="31" name="Image 11" descr="preencoded.png">    </p:cNvPr>
           <p:cNvPicPr>
             <a:picLocks noChangeAspect="1"/>
           </p:cNvPicPr>
@@ -5320,8 +4727,8 @@
         </p:blipFill>
         <p:spPr>
           <a:xfrm>
-            <a:off x="6318504" y="5852160"/>
-            <a:ext cx="310896" cy="310896"/>
+            <a:off x="3209544" y="5340096"/>
+            <a:ext cx="384048" cy="384048"/>
           </a:xfrm>
           <a:prstGeom prst="rect">
             <a:avLst/>
@@ -5330,14 +4737,14 @@
       </p:pic>
       <p:sp>
         <p:nvSpPr>
-          <p:cNvPr id="47" name="Text 33"/>
+          <p:cNvPr id="32" name="Text 18"/>
           <p:cNvSpPr txBox="1"/>
           <p:nvPr/>
         </p:nvSpPr>
         <p:spPr>
           <a:xfrm>
-            <a:off x="6931152" y="5532120"/>
-            <a:ext cx="2011680" cy="347472"/>
+            <a:off x="3703320" y="5266944"/>
+            <a:ext cx="1874520" cy="548640"/>
           </a:xfrm>
           <a:prstGeom prst="rect">
             <a:avLst/>
@@ -5351,35 +4758,35 @@
           <a:p>
             <a:pPr indent="0" marL="0">
               <a:lnSpc>
-                <a:spcPct val="95000"/>
-              </a:lnSpc>
-              <a:buNone/>
-            </a:pPr>
-            <a:r>
-              <a:rPr lang="en-US" sz="1600" b="1" dirty="0">
-                <a:solidFill>
-                  <a:srgbClr val="B45309"/>
-                </a:solidFill>
-                <a:latin typeface="Calibri" pitchFamily="34" charset="0"/>
-                <a:ea typeface="Calibri" pitchFamily="34" charset="-122"/>
-                <a:cs typeface="Calibri" pitchFamily="34" charset="-120"/>
-              </a:rPr>
-              <a:t>Approval Gates</a:t>
-            </a:r>
-            <a:endParaRPr lang="en-US" sz="1600" dirty="0"/>
-          </a:p>
-        </p:txBody>
-      </p:sp>
-      <p:sp>
-        <p:nvSpPr>
-          <p:cNvPr id="48" name="Text 34"/>
+                <a:spcPct val="105000"/>
+              </a:lnSpc>
+              <a:buNone/>
+            </a:pPr>
+            <a:r>
+              <a:rPr lang="en-US" sz="1150" dirty="0">
+                <a:solidFill>
+                  <a:srgbClr val="1F2937"/>
+                </a:solidFill>
+                <a:latin typeface="Calibri" pitchFamily="34" charset="0"/>
+                <a:ea typeface="Calibri" pitchFamily="34" charset="-122"/>
+                <a:cs typeface="Calibri" pitchFamily="34" charset="-120"/>
+              </a:rPr>
+              <a:t>Records everything</a:t>
+            </a:r>
+            <a:endParaRPr lang="en-US" sz="1150" dirty="0"/>
+          </a:p>
+        </p:txBody>
+      </p:sp>
+      <p:sp>
+        <p:nvSpPr>
+          <p:cNvPr id="33" name="Text 19"/>
           <p:cNvSpPr txBox="1"/>
           <p:nvPr/>
         </p:nvSpPr>
         <p:spPr>
           <a:xfrm>
-            <a:off x="6931152" y="5861304"/>
-            <a:ext cx="2011680" cy="640080"/>
+            <a:off x="3703320" y="5586984"/>
+            <a:ext cx="1874520" cy="502920"/>
           </a:xfrm>
           <a:prstGeom prst="rect">
             <a:avLst/>
@@ -5393,54 +4800,54 @@
           <a:p>
             <a:pPr indent="0" marL="0">
               <a:lnSpc>
-                <a:spcPct val="110000"/>
-              </a:lnSpc>
-              <a:buNone/>
-            </a:pPr>
-            <a:r>
-              <a:rPr lang="en-US" sz="1150" dirty="0">
-                <a:solidFill>
-                  <a:srgbClr val="1F2937"/>
-                </a:solidFill>
-                <a:latin typeface="Calibri" pitchFamily="34" charset="0"/>
-                <a:ea typeface="Calibri" pitchFamily="34" charset="-122"/>
-                <a:cs typeface="Calibri" pitchFamily="34" charset="-120"/>
-              </a:rPr>
-              <a:t>Human or policy approvals for</a:t>
-            </a:r>
-            <a:endParaRPr lang="en-US" sz="1150" dirty="0"/>
+                <a:spcPct val="105000"/>
+              </a:lnSpc>
+              <a:buNone/>
+            </a:pPr>
+            <a:r>
+              <a:rPr lang="en-US" sz="1050" dirty="0">
+                <a:solidFill>
+                  <a:srgbClr val="4B5563"/>
+                </a:solidFill>
+                <a:latin typeface="Calibri" pitchFamily="34" charset="0"/>
+                <a:ea typeface="Calibri" pitchFamily="34" charset="-122"/>
+                <a:cs typeface="Calibri" pitchFamily="34" charset="-120"/>
+              </a:rPr>
+              <a:t>Full trace for transparency</a:t>
+            </a:r>
+            <a:endParaRPr lang="en-US" sz="1050" dirty="0"/>
           </a:p>
           <a:p>
             <a:pPr indent="0" marL="0">
               <a:lnSpc>
-                <a:spcPct val="110000"/>
-              </a:lnSpc>
-              <a:buNone/>
-            </a:pPr>
-            <a:r>
-              <a:rPr lang="en-US" sz="1150" dirty="0">
-                <a:solidFill>
-                  <a:srgbClr val="1F2937"/>
-                </a:solidFill>
-                <a:latin typeface="Calibri" pitchFamily="34" charset="0"/>
-                <a:ea typeface="Calibri" pitchFamily="34" charset="-122"/>
-                <a:cs typeface="Calibri" pitchFamily="34" charset="-120"/>
-              </a:rPr>
-              <a:t>sensitive or high-impact actions.</a:t>
-            </a:r>
-            <a:endParaRPr lang="en-US" sz="1150" dirty="0"/>
-          </a:p>
-        </p:txBody>
-      </p:sp>
-      <p:sp>
-        <p:nvSpPr>
-          <p:cNvPr id="49" name="Shape 35"/>
-          <p:cNvSpPr/>
-          <p:nvPr/>
-        </p:nvSpPr>
-        <p:spPr>
-          <a:xfrm>
-            <a:off x="3319272" y="3246120"/>
+                <a:spcPct val="105000"/>
+              </a:lnSpc>
+              <a:buNone/>
+            </a:pPr>
+            <a:r>
+              <a:rPr lang="en-US" sz="1050" dirty="0">
+                <a:solidFill>
+                  <a:srgbClr val="4B5563"/>
+                </a:solidFill>
+                <a:latin typeface="Calibri" pitchFamily="34" charset="0"/>
+                <a:ea typeface="Calibri" pitchFamily="34" charset="-122"/>
+                <a:cs typeface="Calibri" pitchFamily="34" charset="-120"/>
+              </a:rPr>
+              <a:t>and debugging</a:t>
+            </a:r>
+            <a:endParaRPr lang="en-US" sz="1050" dirty="0"/>
+          </a:p>
+        </p:txBody>
+      </p:sp>
+      <p:sp>
+        <p:nvSpPr>
+          <p:cNvPr id="34" name="Shape 20"/>
+          <p:cNvSpPr/>
+          <p:nvPr/>
+        </p:nvSpPr>
+        <p:spPr>
+          <a:xfrm>
+            <a:off x="2633472" y="1965960"/>
             <a:ext cx="356616" cy="0"/>
           </a:xfrm>
           <a:prstGeom prst="line">
@@ -5458,13 +4865,13 @@
       </p:sp>
       <p:sp>
         <p:nvSpPr>
-          <p:cNvPr id="50" name="Shape 36"/>
-          <p:cNvSpPr/>
-          <p:nvPr/>
-        </p:nvSpPr>
-        <p:spPr>
-          <a:xfrm>
-            <a:off x="3319272" y="3703320"/>
+          <p:cNvPr id="35" name="Shape 21"/>
+          <p:cNvSpPr/>
+          <p:nvPr/>
+        </p:nvSpPr>
+        <p:spPr>
+          <a:xfrm>
+            <a:off x="2633472" y="4617720"/>
             <a:ext cx="356616" cy="0"/>
           </a:xfrm>
           <a:prstGeom prst="line">
@@ -5482,290 +4889,51 @@
       </p:sp>
       <p:sp>
         <p:nvSpPr>
-          <p:cNvPr id="51" name="Shape 37"/>
-          <p:cNvSpPr/>
-          <p:nvPr/>
-        </p:nvSpPr>
-        <p:spPr>
-          <a:xfrm>
-            <a:off x="5605272" y="777240"/>
-            <a:ext cx="310896" cy="0"/>
-          </a:xfrm>
-          <a:prstGeom prst="line">
-            <a:avLst/>
-          </a:prstGeom>
-          <a:noFill/>
-          <a:ln w="28575">
-            <a:solidFill>
-              <a:srgbClr val="2B3A67"/>
-            </a:solidFill>
-            <a:prstDash val="dash"/>
-            <a:tailEnd type="triangle"/>
-          </a:ln>
-        </p:spPr>
-      </p:sp>
-      <p:sp>
-        <p:nvSpPr>
-          <p:cNvPr id="52" name="Shape 38"/>
-          <p:cNvSpPr/>
-          <p:nvPr/>
-        </p:nvSpPr>
-        <p:spPr>
-          <a:xfrm>
-            <a:off x="5605272" y="1161288"/>
-            <a:ext cx="310896" cy="0"/>
-          </a:xfrm>
-          <a:prstGeom prst="line">
-            <a:avLst/>
-          </a:prstGeom>
-          <a:noFill/>
-          <a:ln w="28575">
-            <a:solidFill>
-              <a:srgbClr val="9BA8DF"/>
-            </a:solidFill>
-            <a:prstDash val="dash"/>
-            <a:headEnd type="triangle"/>
-          </a:ln>
-        </p:spPr>
-      </p:sp>
-      <p:sp>
-        <p:nvSpPr>
-          <p:cNvPr id="53" name="Shape 39"/>
-          <p:cNvSpPr/>
-          <p:nvPr/>
-        </p:nvSpPr>
-        <p:spPr>
-          <a:xfrm>
-            <a:off x="5605272" y="2034540"/>
-            <a:ext cx="310896" cy="0"/>
-          </a:xfrm>
-          <a:prstGeom prst="line">
-            <a:avLst/>
-          </a:prstGeom>
-          <a:noFill/>
-          <a:ln w="28575">
-            <a:solidFill>
-              <a:srgbClr val="2B3A67"/>
-            </a:solidFill>
-            <a:prstDash val="dash"/>
-            <a:tailEnd type="triangle"/>
-          </a:ln>
-        </p:spPr>
-      </p:sp>
-      <p:sp>
-        <p:nvSpPr>
-          <p:cNvPr id="54" name="Shape 40"/>
-          <p:cNvSpPr/>
-          <p:nvPr/>
-        </p:nvSpPr>
-        <p:spPr>
-          <a:xfrm>
-            <a:off x="5605272" y="2418588"/>
-            <a:ext cx="310896" cy="0"/>
-          </a:xfrm>
-          <a:prstGeom prst="line">
-            <a:avLst/>
-          </a:prstGeom>
-          <a:noFill/>
-          <a:ln w="28575">
-            <a:solidFill>
-              <a:srgbClr val="9BA8DF"/>
-            </a:solidFill>
-            <a:prstDash val="dash"/>
-            <a:headEnd type="triangle"/>
-          </a:ln>
-        </p:spPr>
-      </p:sp>
-      <p:sp>
-        <p:nvSpPr>
-          <p:cNvPr id="55" name="Shape 41"/>
-          <p:cNvSpPr/>
-          <p:nvPr/>
-        </p:nvSpPr>
-        <p:spPr>
-          <a:xfrm>
-            <a:off x="5605272" y="3291840"/>
-            <a:ext cx="310896" cy="0"/>
-          </a:xfrm>
-          <a:prstGeom prst="line">
-            <a:avLst/>
-          </a:prstGeom>
-          <a:noFill/>
-          <a:ln w="28575">
-            <a:solidFill>
-              <a:srgbClr val="2B3A67"/>
-            </a:solidFill>
-            <a:prstDash val="dash"/>
-            <a:tailEnd type="triangle"/>
-          </a:ln>
-        </p:spPr>
-      </p:sp>
-      <p:sp>
-        <p:nvSpPr>
-          <p:cNvPr id="56" name="Shape 42"/>
-          <p:cNvSpPr/>
-          <p:nvPr/>
-        </p:nvSpPr>
-        <p:spPr>
-          <a:xfrm>
-            <a:off x="5605272" y="3675888"/>
-            <a:ext cx="310896" cy="0"/>
-          </a:xfrm>
-          <a:prstGeom prst="line">
-            <a:avLst/>
-          </a:prstGeom>
-          <a:noFill/>
-          <a:ln w="28575">
-            <a:solidFill>
-              <a:srgbClr val="9BA8DF"/>
-            </a:solidFill>
-            <a:prstDash val="dash"/>
-            <a:headEnd type="triangle"/>
-          </a:ln>
-        </p:spPr>
-      </p:sp>
-      <p:sp>
-        <p:nvSpPr>
-          <p:cNvPr id="57" name="Shape 43"/>
-          <p:cNvSpPr/>
-          <p:nvPr/>
-        </p:nvSpPr>
-        <p:spPr>
-          <a:xfrm>
-            <a:off x="5605272" y="4549140"/>
-            <a:ext cx="310896" cy="0"/>
-          </a:xfrm>
-          <a:prstGeom prst="line">
-            <a:avLst/>
-          </a:prstGeom>
-          <a:noFill/>
-          <a:ln w="28575">
-            <a:solidFill>
-              <a:srgbClr val="2B3A67"/>
-            </a:solidFill>
-            <a:prstDash val="dash"/>
-            <a:tailEnd type="triangle"/>
-          </a:ln>
-        </p:spPr>
-      </p:sp>
-      <p:sp>
-        <p:nvSpPr>
-          <p:cNvPr id="58" name="Shape 44"/>
-          <p:cNvSpPr/>
-          <p:nvPr/>
-        </p:nvSpPr>
-        <p:spPr>
-          <a:xfrm>
-            <a:off x="5605272" y="4933188"/>
-            <a:ext cx="310896" cy="0"/>
-          </a:xfrm>
-          <a:prstGeom prst="line">
-            <a:avLst/>
-          </a:prstGeom>
-          <a:noFill/>
-          <a:ln w="28575">
-            <a:solidFill>
-              <a:srgbClr val="9BA8DF"/>
-            </a:solidFill>
-            <a:prstDash val="dash"/>
-            <a:headEnd type="triangle"/>
-          </a:ln>
-        </p:spPr>
-      </p:sp>
-      <p:sp>
-        <p:nvSpPr>
-          <p:cNvPr id="59" name="Shape 45"/>
-          <p:cNvSpPr/>
-          <p:nvPr/>
-        </p:nvSpPr>
-        <p:spPr>
-          <a:xfrm>
-            <a:off x="5605272" y="5806440"/>
-            <a:ext cx="310896" cy="0"/>
-          </a:xfrm>
-          <a:prstGeom prst="line">
-            <a:avLst/>
-          </a:prstGeom>
-          <a:noFill/>
-          <a:ln w="28575">
-            <a:solidFill>
-              <a:srgbClr val="2B3A67"/>
-            </a:solidFill>
-            <a:prstDash val="dash"/>
-            <a:tailEnd type="triangle"/>
-          </a:ln>
-        </p:spPr>
-      </p:sp>
-      <p:sp>
-        <p:nvSpPr>
-          <p:cNvPr id="60" name="Shape 46"/>
-          <p:cNvSpPr/>
-          <p:nvPr/>
-        </p:nvSpPr>
-        <p:spPr>
-          <a:xfrm>
-            <a:off x="5605272" y="6190488"/>
-            <a:ext cx="310896" cy="0"/>
-          </a:xfrm>
-          <a:prstGeom prst="line">
-            <a:avLst/>
-          </a:prstGeom>
-          <a:noFill/>
-          <a:ln w="28575">
-            <a:solidFill>
-              <a:srgbClr val="9BA8DF"/>
-            </a:solidFill>
-            <a:prstDash val="dash"/>
-            <a:headEnd type="triangle"/>
-          </a:ln>
-        </p:spPr>
-      </p:sp>
-      <p:sp>
-        <p:nvSpPr>
-          <p:cNvPr id="61" name="Shape 47"/>
-          <p:cNvSpPr/>
-          <p:nvPr/>
-        </p:nvSpPr>
-        <p:spPr>
-          <a:xfrm>
-            <a:off x="9171432" y="3474720"/>
-            <a:ext cx="329184" cy="0"/>
-          </a:xfrm>
-          <a:prstGeom prst="line">
-            <a:avLst/>
-          </a:prstGeom>
-          <a:noFill/>
-          <a:ln w="28575">
-            <a:solidFill>
-              <a:srgbClr val="2B3A67"/>
-            </a:solidFill>
-            <a:prstDash val="dash"/>
-            <a:tailEnd type="triangle"/>
-          </a:ln>
-        </p:spPr>
-      </p:sp>
-      <p:sp>
-        <p:nvSpPr>
-          <p:cNvPr id="62" name="Shape 48"/>
-          <p:cNvSpPr/>
-          <p:nvPr/>
-        </p:nvSpPr>
-        <p:spPr>
-          <a:xfrm>
-            <a:off x="9555480" y="1965960"/>
-            <a:ext cx="2240280" cy="3017520"/>
+          <p:cNvPr id="36" name="Shape 22"/>
+          <p:cNvSpPr/>
+          <p:nvPr/>
+        </p:nvSpPr>
+        <p:spPr>
+          <a:xfrm>
+            <a:off x="6217920" y="457200"/>
+            <a:ext cx="1600200" cy="6035040"/>
           </a:xfrm>
           <a:prstGeom prst="roundRect">
             <a:avLst>
-              <a:gd name="adj" fmla="val 4898"/>
+              <a:gd name="adj" fmla="val 5714"/>
             </a:avLst>
           </a:prstGeom>
           <a:solidFill>
-            <a:srgbClr val="FFFFFF"/>
+            <a:srgbClr val="F2FBF8"/>
           </a:solidFill>
-          <a:ln w="15875">
-            <a:solidFill>
-              <a:srgbClr val="C7D2E8"/>
+          <a:ln w="19050">
+            <a:solidFill>
+              <a:srgbClr val="A8DDCB"/>
+            </a:solidFill>
+            <a:prstDash val="solid"/>
+          </a:ln>
+        </p:spPr>
+      </p:sp>
+      <p:sp>
+        <p:nvSpPr>
+          <p:cNvPr id="37" name="Shape 23"/>
+          <p:cNvSpPr/>
+          <p:nvPr/>
+        </p:nvSpPr>
+        <p:spPr>
+          <a:xfrm>
+            <a:off x="6725412" y="777240"/>
+            <a:ext cx="585216" cy="585216"/>
+          </a:xfrm>
+          <a:prstGeom prst="ellipse">
+            <a:avLst/>
+          </a:prstGeom>
+          <a:solidFill>
+            <a:srgbClr val="0F9D76"/>
+          </a:solidFill>
+          <a:ln w="12700">
+            <a:solidFill>
+              <a:srgbClr val="0F9D76"/>
             </a:solidFill>
             <a:prstDash val="solid"/>
           </a:ln>
@@ -5773,7 +4941,7 @@
       </p:sp>
       <p:pic>
         <p:nvPicPr>
-          <p:cNvPr id="63" name="Image 12" descr="preencoded.png">    </p:cNvPr>
+          <p:cNvPr id="38" name="Image 12" descr="preencoded.png">    </p:cNvPr>
           <p:cNvPicPr>
             <a:picLocks noChangeAspect="1"/>
           </p:cNvPicPr>
@@ -5787,8 +4955,8 @@
         </p:blipFill>
         <p:spPr>
           <a:xfrm>
-            <a:off x="10355580" y="2240280"/>
-            <a:ext cx="640080" cy="640080"/>
+            <a:off x="6862572" y="914400"/>
+            <a:ext cx="310896" cy="310896"/>
           </a:xfrm>
           <a:prstGeom prst="rect">
             <a:avLst/>
@@ -5797,14 +4965,14 @@
       </p:pic>
       <p:sp>
         <p:nvSpPr>
-          <p:cNvPr id="64" name="Text 49"/>
+          <p:cNvPr id="39" name="Text 24"/>
           <p:cNvSpPr txBox="1"/>
           <p:nvPr/>
         </p:nvSpPr>
         <p:spPr>
           <a:xfrm>
-            <a:off x="9665208" y="2990088"/>
-            <a:ext cx="2020824" cy="685800"/>
+            <a:off x="6291072" y="1536192"/>
+            <a:ext cx="1453896" cy="640080"/>
           </a:xfrm>
           <a:prstGeom prst="rect">
             <a:avLst/>
@@ -5818,22 +4986,84 @@
           <a:p>
             <a:pPr algn="ctr" indent="0" marL="0">
               <a:lnSpc>
+                <a:spcPct val="100000"/>
+              </a:lnSpc>
+              <a:buNone/>
+            </a:pPr>
+            <a:r>
+              <a:rPr lang="en-US" sz="1500" b="1" dirty="0">
+                <a:solidFill>
+                  <a:srgbClr val="0A7355"/>
+                </a:solidFill>
+                <a:latin typeface="Calibri" pitchFamily="34" charset="0"/>
+                <a:ea typeface="Calibri" pitchFamily="34" charset="-122"/>
+                <a:cs typeface="Calibri" pitchFamily="34" charset="-120"/>
+              </a:rPr>
+              <a:t>Kong AI</a:t>
+            </a:r>
+            <a:endParaRPr lang="en-US" sz="1500" dirty="0"/>
+          </a:p>
+          <a:p>
+            <a:pPr algn="ctr" indent="0" marL="0">
+              <a:lnSpc>
+                <a:spcPct val="100000"/>
+              </a:lnSpc>
+              <a:buNone/>
+            </a:pPr>
+            <a:r>
+              <a:rPr lang="en-US" sz="1500" b="1" dirty="0">
+                <a:solidFill>
+                  <a:srgbClr val="0A7355"/>
+                </a:solidFill>
+                <a:latin typeface="Calibri" pitchFamily="34" charset="0"/>
+                <a:ea typeface="Calibri" pitchFamily="34" charset="-122"/>
+                <a:cs typeface="Calibri" pitchFamily="34" charset="-120"/>
+              </a:rPr>
+              <a:t>Gateway</a:t>
+            </a:r>
+            <a:endParaRPr lang="en-US" sz="1500" dirty="0"/>
+          </a:p>
+        </p:txBody>
+      </p:sp>
+      <p:sp>
+        <p:nvSpPr>
+          <p:cNvPr id="40" name="Text 25"/>
+          <p:cNvSpPr txBox="1"/>
+          <p:nvPr/>
+        </p:nvSpPr>
+        <p:spPr>
+          <a:xfrm>
+            <a:off x="6291072" y="2212848"/>
+            <a:ext cx="1453896" cy="548640"/>
+          </a:xfrm>
+          <a:prstGeom prst="rect">
+            <a:avLst/>
+          </a:prstGeom>
+          <a:noFill/>
+          <a:ln/>
+        </p:spPr>
+        <p:txBody>
+          <a:bodyPr wrap="square" lIns="0" tIns="0" rIns="0" bIns="0" rtlCol="0" anchor="ctr"/>
+          <a:lstStyle/>
+          <a:p>
+            <a:pPr algn="ctr" indent="0" marL="0">
+              <a:lnSpc>
                 <a:spcPct val="105000"/>
               </a:lnSpc>
               <a:buNone/>
             </a:pPr>
             <a:r>
-              <a:rPr lang="en-US" sz="1700" b="1" dirty="0">
-                <a:solidFill>
-                  <a:srgbClr val="1E3A8A"/>
-                </a:solidFill>
-                <a:latin typeface="Calibri" pitchFamily="34" charset="0"/>
-                <a:ea typeface="Calibri" pitchFamily="34" charset="-122"/>
-                <a:cs typeface="Calibri" pitchFamily="34" charset="-120"/>
-              </a:rPr>
-              <a:t>Final Response</a:t>
-            </a:r>
-            <a:endParaRPr lang="en-US" sz="1700" dirty="0"/>
+              <a:rPr lang="en-US" sz="950" i="1" dirty="0">
+                <a:solidFill>
+                  <a:srgbClr val="4B5563"/>
+                </a:solidFill>
+                <a:latin typeface="Calibri" pitchFamily="34" charset="0"/>
+                <a:ea typeface="Calibri" pitchFamily="34" charset="-122"/>
+                <a:cs typeface="Calibri" pitchFamily="34" charset="-120"/>
+              </a:rPr>
+              <a:t>One control point for</a:t>
+            </a:r>
+            <a:endParaRPr lang="en-US" sz="950" dirty="0"/>
           </a:p>
           <a:p>
             <a:pPr algn="ctr" indent="0" marL="0">
@@ -5843,23 +5073,265 @@
               <a:buNone/>
             </a:pPr>
             <a:r>
-              <a:rPr lang="en-US" sz="1700" b="1" dirty="0">
-                <a:solidFill>
-                  <a:srgbClr val="1E3A8A"/>
-                </a:solidFill>
-                <a:latin typeface="Calibri" pitchFamily="34" charset="0"/>
-                <a:ea typeface="Calibri" pitchFamily="34" charset="-122"/>
-                <a:cs typeface="Calibri" pitchFamily="34" charset="-120"/>
-              </a:rPr>
-              <a:t>and Trace</a:t>
-            </a:r>
-            <a:endParaRPr lang="en-US" sz="1700" dirty="0"/>
-          </a:p>
-        </p:txBody>
+              <a:rPr lang="en-US" sz="950" i="1" dirty="0">
+                <a:solidFill>
+                  <a:srgbClr val="4B5563"/>
+                </a:solidFill>
+                <a:latin typeface="Calibri" pitchFamily="34" charset="0"/>
+                <a:ea typeface="Calibri" pitchFamily="34" charset="-122"/>
+                <a:cs typeface="Calibri" pitchFamily="34" charset="-120"/>
+              </a:rPr>
+              <a:t>all model and tool traffic</a:t>
+            </a:r>
+            <a:endParaRPr lang="en-US" sz="950" dirty="0"/>
+          </a:p>
+        </p:txBody>
+      </p:sp>
+      <p:sp>
+        <p:nvSpPr>
+          <p:cNvPr id="41" name="Text 26"/>
+          <p:cNvSpPr txBox="1"/>
+          <p:nvPr/>
+        </p:nvSpPr>
+        <p:spPr>
+          <a:xfrm>
+            <a:off x="6364224" y="2971800"/>
+            <a:ext cx="1344168" cy="3291840"/>
+          </a:xfrm>
+          <a:prstGeom prst="rect">
+            <a:avLst/>
+          </a:prstGeom>
+          <a:noFill/>
+          <a:ln/>
+        </p:spPr>
+        <p:txBody>
+          <a:bodyPr wrap="square" lIns="0" tIns="0" rIns="0" bIns="0" rtlCol="0" anchor="t"/>
+          <a:lstStyle/>
+          <a:p>
+            <a:pPr marL="139700" indent="-139700">
+              <a:lnSpc>
+                <a:spcPct val="100000"/>
+              </a:lnSpc>
+              <a:spcAft>
+                <a:spcPts val="1200"/>
+              </a:spcAft>
+              <a:buSzPct val="100000"/>
+              <a:buChar char="•"/>
+            </a:pPr>
+            <a:r>
+              <a:rPr lang="en-US" sz="1050" dirty="0">
+                <a:solidFill>
+                  <a:srgbClr val="1F2937"/>
+                </a:solidFill>
+                <a:latin typeface="Calibri" pitchFamily="34" charset="0"/>
+                <a:ea typeface="Calibri" pitchFamily="34" charset="-122"/>
+                <a:cs typeface="Calibri" pitchFamily="34" charset="-120"/>
+              </a:rPr>
+              <a:t>A2A and MCP proxying</a:t>
+            </a:r>
+            <a:endParaRPr lang="en-US" sz="1050" dirty="0"/>
+          </a:p>
+          <a:p>
+            <a:pPr marL="139700" indent="-139700">
+              <a:lnSpc>
+                <a:spcPct val="100000"/>
+              </a:lnSpc>
+              <a:spcAft>
+                <a:spcPts val="1200"/>
+              </a:spcAft>
+              <a:buSzPct val="100000"/>
+              <a:buChar char="•"/>
+            </a:pPr>
+            <a:r>
+              <a:rPr lang="en-US" sz="1050" dirty="0">
+                <a:solidFill>
+                  <a:srgbClr val="1F2937"/>
+                </a:solidFill>
+                <a:latin typeface="Calibri" pitchFamily="34" charset="0"/>
+                <a:ea typeface="Calibri" pitchFamily="34" charset="-122"/>
+                <a:cs typeface="Calibri" pitchFamily="34" charset="-120"/>
+              </a:rPr>
+              <a:t>Auth and key vaulting</a:t>
+            </a:r>
+            <a:endParaRPr lang="en-US" sz="1050" dirty="0"/>
+          </a:p>
+          <a:p>
+            <a:pPr marL="139700" indent="-139700">
+              <a:lnSpc>
+                <a:spcPct val="100000"/>
+              </a:lnSpc>
+              <a:spcAft>
+                <a:spcPts val="1200"/>
+              </a:spcAft>
+              <a:buSzPct val="100000"/>
+              <a:buChar char="•"/>
+            </a:pPr>
+            <a:r>
+              <a:rPr lang="en-US" sz="1050" dirty="0">
+                <a:solidFill>
+                  <a:srgbClr val="1F2937"/>
+                </a:solidFill>
+                <a:latin typeface="Calibri" pitchFamily="34" charset="0"/>
+                <a:ea typeface="Calibri" pitchFamily="34" charset="-122"/>
+                <a:cs typeface="Calibri" pitchFamily="34" charset="-120"/>
+              </a:rPr>
+              <a:t>Rate limits and cost caps</a:t>
+            </a:r>
+            <a:endParaRPr lang="en-US" sz="1050" dirty="0"/>
+          </a:p>
+          <a:p>
+            <a:pPr marL="139700" indent="-139700">
+              <a:lnSpc>
+                <a:spcPct val="100000"/>
+              </a:lnSpc>
+              <a:spcAft>
+                <a:spcPts val="1200"/>
+              </a:spcAft>
+              <a:buSzPct val="100000"/>
+              <a:buChar char="•"/>
+            </a:pPr>
+            <a:r>
+              <a:rPr lang="en-US" sz="1050" dirty="0">
+                <a:solidFill>
+                  <a:srgbClr val="1F2937"/>
+                </a:solidFill>
+                <a:latin typeface="Calibri" pitchFamily="34" charset="0"/>
+                <a:ea typeface="Calibri" pitchFamily="34" charset="-122"/>
+                <a:cs typeface="Calibri" pitchFamily="34" charset="-120"/>
+              </a:rPr>
+              <a:t>Prompt and PII guardrails</a:t>
+            </a:r>
+            <a:endParaRPr lang="en-US" sz="1050" dirty="0"/>
+          </a:p>
+          <a:p>
+            <a:pPr marL="139700" indent="-139700">
+              <a:lnSpc>
+                <a:spcPct val="100000"/>
+              </a:lnSpc>
+              <a:spcAft>
+                <a:spcPts val="1200"/>
+              </a:spcAft>
+              <a:buSzPct val="100000"/>
+              <a:buChar char="•"/>
+            </a:pPr>
+            <a:r>
+              <a:rPr lang="en-US" sz="1050" dirty="0">
+                <a:solidFill>
+                  <a:srgbClr val="1F2937"/>
+                </a:solidFill>
+                <a:latin typeface="Calibri" pitchFamily="34" charset="0"/>
+                <a:ea typeface="Calibri" pitchFamily="34" charset="-122"/>
+                <a:cs typeface="Calibri" pitchFamily="34" charset="-120"/>
+              </a:rPr>
+              <a:t>Semantic caching and routing</a:t>
+            </a:r>
+            <a:endParaRPr lang="en-US" sz="1050" dirty="0"/>
+          </a:p>
+          <a:p>
+            <a:pPr marL="139700" indent="-139700">
+              <a:lnSpc>
+                <a:spcPct val="100000"/>
+              </a:lnSpc>
+              <a:spcAft>
+                <a:spcPts val="1200"/>
+              </a:spcAft>
+              <a:buSzPct val="100000"/>
+              <a:buChar char="•"/>
+            </a:pPr>
+            <a:r>
+              <a:rPr lang="en-US" sz="1050" dirty="0">
+                <a:solidFill>
+                  <a:srgbClr val="1F2937"/>
+                </a:solidFill>
+                <a:latin typeface="Calibri" pitchFamily="34" charset="0"/>
+                <a:ea typeface="Calibri" pitchFamily="34" charset="-122"/>
+                <a:cs typeface="Calibri" pitchFamily="34" charset="-120"/>
+              </a:rPr>
+              <a:t>Model failover and fallbacks</a:t>
+            </a:r>
+            <a:endParaRPr lang="en-US" sz="1050" dirty="0"/>
+          </a:p>
+          <a:p>
+            <a:pPr marL="139700" indent="-139700">
+              <a:lnSpc>
+                <a:spcPct val="100000"/>
+              </a:lnSpc>
+              <a:spcAft>
+                <a:spcPts val="1200"/>
+              </a:spcAft>
+              <a:buSzPct val="100000"/>
+              <a:buChar char="•"/>
+            </a:pPr>
+            <a:r>
+              <a:rPr lang="en-US" sz="1050" dirty="0">
+                <a:solidFill>
+                  <a:srgbClr val="1F2937"/>
+                </a:solidFill>
+                <a:latin typeface="Calibri" pitchFamily="34" charset="0"/>
+                <a:ea typeface="Calibri" pitchFamily="34" charset="-122"/>
+                <a:cs typeface="Calibri" pitchFamily="34" charset="-120"/>
+              </a:rPr>
+              <a:t>Metrics, logs and traces</a:t>
+            </a:r>
+            <a:endParaRPr lang="en-US" sz="1050" dirty="0"/>
+          </a:p>
+        </p:txBody>
+      </p:sp>
+      <p:sp>
+        <p:nvSpPr>
+          <p:cNvPr id="42" name="Shape 27"/>
+          <p:cNvSpPr/>
+          <p:nvPr/>
+        </p:nvSpPr>
+        <p:spPr>
+          <a:xfrm>
+            <a:off x="8321040" y="411480"/>
+            <a:ext cx="3429000" cy="1097280"/>
+          </a:xfrm>
+          <a:prstGeom prst="roundRect">
+            <a:avLst>
+              <a:gd name="adj" fmla="val 10000"/>
+            </a:avLst>
+          </a:prstGeom>
+          <a:solidFill>
+            <a:srgbClr val="FFFFFF"/>
+          </a:solidFill>
+          <a:ln w="15875">
+            <a:solidFill>
+              <a:srgbClr val="D8D2F2"/>
+            </a:solidFill>
+            <a:prstDash val="solid"/>
+          </a:ln>
+        </p:spPr>
+      </p:sp>
+      <p:sp>
+        <p:nvSpPr>
+          <p:cNvPr id="43" name="Shape 28"/>
+          <p:cNvSpPr/>
+          <p:nvPr/>
+        </p:nvSpPr>
+        <p:spPr>
+          <a:xfrm>
+            <a:off x="8522208" y="694944"/>
+            <a:ext cx="566928" cy="566928"/>
+          </a:xfrm>
+          <a:prstGeom prst="ellipse">
+            <a:avLst/>
+          </a:prstGeom>
+          <a:solidFill>
+            <a:srgbClr val="6D28D9"/>
+          </a:solidFill>
+          <a:ln w="12700">
+            <a:solidFill>
+              <a:srgbClr val="6D28D9"/>
+            </a:solidFill>
+            <a:prstDash val="solid"/>
+          </a:ln>
+        </p:spPr>
       </p:sp>
       <p:pic>
         <p:nvPicPr>
-          <p:cNvPr id="65" name="Image 13" descr="preencoded.png">    </p:cNvPr>
+          <p:cNvPr id="44" name="Image 13" descr="preencoded.png">    </p:cNvPr>
           <p:cNvPicPr>
             <a:picLocks noChangeAspect="1"/>
           </p:cNvPicPr>
@@ -5873,8 +5345,8 @@
         </p:blipFill>
         <p:spPr>
           <a:xfrm>
-            <a:off x="9829800" y="3822192"/>
-            <a:ext cx="201168" cy="201168"/>
+            <a:off x="8650224" y="822960"/>
+            <a:ext cx="310896" cy="310896"/>
           </a:xfrm>
           <a:prstGeom prst="rect">
             <a:avLst/>
@@ -5883,14 +5355,14 @@
       </p:pic>
       <p:sp>
         <p:nvSpPr>
-          <p:cNvPr id="66" name="Text 50"/>
+          <p:cNvPr id="45" name="Text 29"/>
           <p:cNvSpPr txBox="1"/>
           <p:nvPr/>
         </p:nvSpPr>
         <p:spPr>
           <a:xfrm>
-            <a:off x="10104120" y="3794760"/>
-            <a:ext cx="1600200" cy="256032"/>
+            <a:off x="9262872" y="502920"/>
+            <a:ext cx="2331720" cy="347472"/>
           </a:xfrm>
           <a:prstGeom prst="rect">
             <a:avLst/>
@@ -5903,10 +5375,55 @@
           <a:lstStyle/>
           <a:p>
             <a:pPr indent="0" marL="0">
-              <a:buNone/>
-            </a:pPr>
-            <a:r>
-              <a:rPr lang="en-US" sz="1200" dirty="0">
+              <a:lnSpc>
+                <a:spcPct val="95000"/>
+              </a:lnSpc>
+              <a:buNone/>
+            </a:pPr>
+            <a:r>
+              <a:rPr lang="en-US" sz="1600" b="1" dirty="0">
+                <a:solidFill>
+                  <a:srgbClr val="5B21B6"/>
+                </a:solidFill>
+                <a:latin typeface="Calibri" pitchFamily="34" charset="0"/>
+                <a:ea typeface="Calibri" pitchFamily="34" charset="-122"/>
+                <a:cs typeface="Calibri" pitchFamily="34" charset="-120"/>
+              </a:rPr>
+              <a:t>Model</a:t>
+            </a:r>
+            <a:endParaRPr lang="en-US" sz="1600" dirty="0"/>
+          </a:p>
+        </p:txBody>
+      </p:sp>
+      <p:sp>
+        <p:nvSpPr>
+          <p:cNvPr id="46" name="Text 30"/>
+          <p:cNvSpPr txBox="1"/>
+          <p:nvPr/>
+        </p:nvSpPr>
+        <p:spPr>
+          <a:xfrm>
+            <a:off x="9262872" y="832104"/>
+            <a:ext cx="2331720" cy="640080"/>
+          </a:xfrm>
+          <a:prstGeom prst="rect">
+            <a:avLst/>
+          </a:prstGeom>
+          <a:noFill/>
+          <a:ln/>
+        </p:spPr>
+        <p:txBody>
+          <a:bodyPr wrap="square" lIns="0" tIns="0" rIns="0" bIns="0" rtlCol="0" anchor="t"/>
+          <a:lstStyle/>
+          <a:p>
+            <a:pPr indent="0" marL="0">
+              <a:lnSpc>
+                <a:spcPct val="110000"/>
+              </a:lnSpc>
+              <a:buNone/>
+            </a:pPr>
+            <a:r>
+              <a:rPr lang="en-US" sz="1150" dirty="0">
                 <a:solidFill>
                   <a:srgbClr val="1F2937"/>
                 </a:solidFill>
@@ -5914,15 +5431,87 @@
                 <a:ea typeface="Calibri" pitchFamily="34" charset="-122"/>
                 <a:cs typeface="Calibri" pitchFamily="34" charset="-120"/>
               </a:rPr>
-              <a:t>Answer or result</a:t>
-            </a:r>
-            <a:endParaRPr lang="en-US" sz="1200" dirty="0"/>
-          </a:p>
-        </p:txBody>
+              <a:t>The LLM that reasons, plans</a:t>
+            </a:r>
+            <a:endParaRPr lang="en-US" sz="1150" dirty="0"/>
+          </a:p>
+          <a:p>
+            <a:pPr indent="0" marL="0">
+              <a:lnSpc>
+                <a:spcPct val="110000"/>
+              </a:lnSpc>
+              <a:buNone/>
+            </a:pPr>
+            <a:r>
+              <a:rPr lang="en-US" sz="1150" dirty="0">
+                <a:solidFill>
+                  <a:srgbClr val="1F2937"/>
+                </a:solidFill>
+                <a:latin typeface="Calibri" pitchFamily="34" charset="0"/>
+                <a:ea typeface="Calibri" pitchFamily="34" charset="-122"/>
+                <a:cs typeface="Calibri" pitchFamily="34" charset="-120"/>
+              </a:rPr>
+              <a:t>and generates responses.</a:t>
+            </a:r>
+            <a:endParaRPr lang="en-US" sz="1150" dirty="0"/>
+          </a:p>
+        </p:txBody>
+      </p:sp>
+      <p:sp>
+        <p:nvSpPr>
+          <p:cNvPr id="47" name="Shape 31"/>
+          <p:cNvSpPr/>
+          <p:nvPr/>
+        </p:nvSpPr>
+        <p:spPr>
+          <a:xfrm>
+            <a:off x="8321040" y="1668780"/>
+            <a:ext cx="3429000" cy="1097280"/>
+          </a:xfrm>
+          <a:prstGeom prst="roundRect">
+            <a:avLst>
+              <a:gd name="adj" fmla="val 10000"/>
+            </a:avLst>
+          </a:prstGeom>
+          <a:solidFill>
+            <a:srgbClr val="F6F7FE"/>
+          </a:solidFill>
+          <a:ln w="15875">
+            <a:solidFill>
+              <a:srgbClr val="C7CCF7"/>
+            </a:solidFill>
+            <a:prstDash val="solid"/>
+          </a:ln>
+        </p:spPr>
+      </p:sp>
+      <p:sp>
+        <p:nvSpPr>
+          <p:cNvPr id="48" name="Shape 32"/>
+          <p:cNvSpPr/>
+          <p:nvPr/>
+        </p:nvSpPr>
+        <p:spPr>
+          <a:xfrm>
+            <a:off x="8522208" y="1952244"/>
+            <a:ext cx="566928" cy="566928"/>
+          </a:xfrm>
+          <a:prstGeom prst="ellipse">
+            <a:avLst/>
+          </a:prstGeom>
+          <a:solidFill>
+            <a:srgbClr val="4338CA"/>
+          </a:solidFill>
+          <a:ln w="12700">
+            <a:solidFill>
+              <a:srgbClr val="4338CA"/>
+            </a:solidFill>
+            <a:prstDash val="solid"/>
+          </a:ln>
+        </p:spPr>
       </p:sp>
       <p:pic>
         <p:nvPicPr>
-          <p:cNvPr id="67" name="Image 14" descr="preencoded.png">    </p:cNvPr>
+          <p:cNvPr id="49" name="Image 14" descr="preencoded.png">    </p:cNvPr>
           <p:cNvPicPr>
             <a:picLocks noChangeAspect="1"/>
           </p:cNvPicPr>
@@ -5936,8 +5525,8 @@
         </p:blipFill>
         <p:spPr>
           <a:xfrm>
-            <a:off x="9829800" y="4114800"/>
-            <a:ext cx="201168" cy="201168"/>
+            <a:off x="8650224" y="2080260"/>
+            <a:ext cx="310896" cy="310896"/>
           </a:xfrm>
           <a:prstGeom prst="rect">
             <a:avLst/>
@@ -5946,14 +5535,14 @@
       </p:pic>
       <p:sp>
         <p:nvSpPr>
-          <p:cNvPr id="68" name="Text 51"/>
+          <p:cNvPr id="50" name="Text 33"/>
           <p:cNvSpPr txBox="1"/>
           <p:nvPr/>
         </p:nvSpPr>
         <p:spPr>
           <a:xfrm>
-            <a:off x="10104120" y="4087368"/>
-            <a:ext cx="1600200" cy="256032"/>
+            <a:off x="9262872" y="1760220"/>
+            <a:ext cx="2331720" cy="347472"/>
           </a:xfrm>
           <a:prstGeom prst="rect">
             <a:avLst/>
@@ -5966,10 +5555,55 @@
           <a:lstStyle/>
           <a:p>
             <a:pPr indent="0" marL="0">
-              <a:buNone/>
-            </a:pPr>
-            <a:r>
-              <a:rPr lang="en-US" sz="1200" dirty="0">
+              <a:lnSpc>
+                <a:spcPct val="95000"/>
+              </a:lnSpc>
+              <a:buNone/>
+            </a:pPr>
+            <a:r>
+              <a:rPr lang="en-US" sz="1600" b="1" dirty="0">
+                <a:solidFill>
+                  <a:srgbClr val="3730A3"/>
+                </a:solidFill>
+                <a:latin typeface="Calibri" pitchFamily="34" charset="0"/>
+                <a:ea typeface="Calibri" pitchFamily="34" charset="-122"/>
+                <a:cs typeface="Calibri" pitchFamily="34" charset="-120"/>
+              </a:rPr>
+              <a:t>Peer Agents (A2A)</a:t>
+            </a:r>
+            <a:endParaRPr lang="en-US" sz="1600" dirty="0"/>
+          </a:p>
+        </p:txBody>
+      </p:sp>
+      <p:sp>
+        <p:nvSpPr>
+          <p:cNvPr id="51" name="Text 34"/>
+          <p:cNvSpPr txBox="1"/>
+          <p:nvPr/>
+        </p:nvSpPr>
+        <p:spPr>
+          <a:xfrm>
+            <a:off x="9262872" y="2089404"/>
+            <a:ext cx="2331720" cy="640080"/>
+          </a:xfrm>
+          <a:prstGeom prst="rect">
+            <a:avLst/>
+          </a:prstGeom>
+          <a:noFill/>
+          <a:ln/>
+        </p:spPr>
+        <p:txBody>
+          <a:bodyPr wrap="square" lIns="0" tIns="0" rIns="0" bIns="0" rtlCol="0" anchor="t"/>
+          <a:lstStyle/>
+          <a:p>
+            <a:pPr indent="0" marL="0">
+              <a:lnSpc>
+                <a:spcPct val="110000"/>
+              </a:lnSpc>
+              <a:buNone/>
+            </a:pPr>
+            <a:r>
+              <a:rPr lang="en-US" sz="1150" dirty="0">
                 <a:solidFill>
                   <a:srgbClr val="1F2937"/>
                 </a:solidFill>
@@ -5977,15 +5611,87 @@
                 <a:ea typeface="Calibri" pitchFamily="34" charset="-122"/>
                 <a:cs typeface="Calibri" pitchFamily="34" charset="-120"/>
               </a:rPr>
-              <a:t>What was done</a:t>
-            </a:r>
-            <a:endParaRPr lang="en-US" sz="1200" dirty="0"/>
-          </a:p>
-        </p:txBody>
+              <a:t>Other agents the harness</a:t>
+            </a:r>
+            <a:endParaRPr lang="en-US" sz="1150" dirty="0"/>
+          </a:p>
+          <a:p>
+            <a:pPr indent="0" marL="0">
+              <a:lnSpc>
+                <a:spcPct val="110000"/>
+              </a:lnSpc>
+              <a:buNone/>
+            </a:pPr>
+            <a:r>
+              <a:rPr lang="en-US" sz="1150" dirty="0">
+                <a:solidFill>
+                  <a:srgbClr val="1F2937"/>
+                </a:solidFill>
+                <a:latin typeface="Calibri" pitchFamily="34" charset="0"/>
+                <a:ea typeface="Calibri" pitchFamily="34" charset="-122"/>
+                <a:cs typeface="Calibri" pitchFamily="34" charset="-120"/>
+              </a:rPr>
+              <a:t>delegates tasks to over A2A.</a:t>
+            </a:r>
+            <a:endParaRPr lang="en-US" sz="1150" dirty="0"/>
+          </a:p>
+        </p:txBody>
+      </p:sp>
+      <p:sp>
+        <p:nvSpPr>
+          <p:cNvPr id="52" name="Shape 35"/>
+          <p:cNvSpPr/>
+          <p:nvPr/>
+        </p:nvSpPr>
+        <p:spPr>
+          <a:xfrm>
+            <a:off x="8321040" y="2926080"/>
+            <a:ext cx="3429000" cy="1097280"/>
+          </a:xfrm>
+          <a:prstGeom prst="roundRect">
+            <a:avLst>
+              <a:gd name="adj" fmla="val 10000"/>
+            </a:avLst>
+          </a:prstGeom>
+          <a:solidFill>
+            <a:srgbClr val="F7FCF8"/>
+          </a:solidFill>
+          <a:ln w="15875">
+            <a:solidFill>
+              <a:srgbClr val="BFE0C7"/>
+            </a:solidFill>
+            <a:prstDash val="solid"/>
+          </a:ln>
+        </p:spPr>
+      </p:sp>
+      <p:sp>
+        <p:nvSpPr>
+          <p:cNvPr id="53" name="Shape 36"/>
+          <p:cNvSpPr/>
+          <p:nvPr/>
+        </p:nvSpPr>
+        <p:spPr>
+          <a:xfrm>
+            <a:off x="8522208" y="3209544"/>
+            <a:ext cx="566928" cy="566928"/>
+          </a:xfrm>
+          <a:prstGeom prst="ellipse">
+            <a:avLst/>
+          </a:prstGeom>
+          <a:solidFill>
+            <a:srgbClr val="15803D"/>
+          </a:solidFill>
+          <a:ln w="12700">
+            <a:solidFill>
+              <a:srgbClr val="15803D"/>
+            </a:solidFill>
+            <a:prstDash val="solid"/>
+          </a:ln>
+        </p:spPr>
       </p:sp>
       <p:pic>
         <p:nvPicPr>
-          <p:cNvPr id="69" name="Image 15" descr="preencoded.png">    </p:cNvPr>
+          <p:cNvPr id="54" name="Image 15" descr="preencoded.png">    </p:cNvPr>
           <p:cNvPicPr>
             <a:picLocks noChangeAspect="1"/>
           </p:cNvPicPr>
@@ -5999,8 +5705,8 @@
         </p:blipFill>
         <p:spPr>
           <a:xfrm>
-            <a:off x="9829800" y="4407408"/>
-            <a:ext cx="201168" cy="201168"/>
+            <a:off x="8650224" y="3337560"/>
+            <a:ext cx="310896" cy="310896"/>
           </a:xfrm>
           <a:prstGeom prst="rect">
             <a:avLst/>
@@ -6009,14 +5715,14 @@
       </p:pic>
       <p:sp>
         <p:nvSpPr>
-          <p:cNvPr id="70" name="Text 52"/>
+          <p:cNvPr id="55" name="Text 37"/>
           <p:cNvSpPr txBox="1"/>
           <p:nvPr/>
         </p:nvSpPr>
         <p:spPr>
           <a:xfrm>
-            <a:off x="10104120" y="4379976"/>
-            <a:ext cx="1600200" cy="256032"/>
+            <a:off x="9262872" y="3017520"/>
+            <a:ext cx="2331720" cy="347472"/>
           </a:xfrm>
           <a:prstGeom prst="rect">
             <a:avLst/>
@@ -6029,10 +5735,55 @@
           <a:lstStyle/>
           <a:p>
             <a:pPr indent="0" marL="0">
-              <a:buNone/>
-            </a:pPr>
-            <a:r>
-              <a:rPr lang="en-US" sz="1200" dirty="0">
+              <a:lnSpc>
+                <a:spcPct val="95000"/>
+              </a:lnSpc>
+              <a:buNone/>
+            </a:pPr>
+            <a:r>
+              <a:rPr lang="en-US" sz="1600" b="1" dirty="0">
+                <a:solidFill>
+                  <a:srgbClr val="166534"/>
+                </a:solidFill>
+                <a:latin typeface="Calibri" pitchFamily="34" charset="0"/>
+                <a:ea typeface="Calibri" pitchFamily="34" charset="-122"/>
+                <a:cs typeface="Calibri" pitchFamily="34" charset="-120"/>
+              </a:rPr>
+              <a:t>Tools and MCP Servers</a:t>
+            </a:r>
+            <a:endParaRPr lang="en-US" sz="1600" dirty="0"/>
+          </a:p>
+        </p:txBody>
+      </p:sp>
+      <p:sp>
+        <p:nvSpPr>
+          <p:cNvPr id="56" name="Text 38"/>
+          <p:cNvSpPr txBox="1"/>
+          <p:nvPr/>
+        </p:nvSpPr>
+        <p:spPr>
+          <a:xfrm>
+            <a:off x="9262872" y="3346704"/>
+            <a:ext cx="2331720" cy="640080"/>
+          </a:xfrm>
+          <a:prstGeom prst="rect">
+            <a:avLst/>
+          </a:prstGeom>
+          <a:noFill/>
+          <a:ln/>
+        </p:spPr>
+        <p:txBody>
+          <a:bodyPr wrap="square" lIns="0" tIns="0" rIns="0" bIns="0" rtlCol="0" anchor="t"/>
+          <a:lstStyle/>
+          <a:p>
+            <a:pPr indent="0" marL="0">
+              <a:lnSpc>
+                <a:spcPct val="110000"/>
+              </a:lnSpc>
+              <a:buNone/>
+            </a:pPr>
+            <a:r>
+              <a:rPr lang="en-US" sz="1150" dirty="0">
                 <a:solidFill>
                   <a:srgbClr val="1F2937"/>
                 </a:solidFill>
@@ -6040,15 +5791,87 @@
                 <a:ea typeface="Calibri" pitchFamily="34" charset="-122"/>
                 <a:cs typeface="Calibri" pitchFamily="34" charset="-120"/>
               </a:rPr>
-              <a:t>What was used</a:t>
-            </a:r>
-            <a:endParaRPr lang="en-US" sz="1200" dirty="0"/>
-          </a:p>
-        </p:txBody>
+              <a:t>External capabilities the</a:t>
+            </a:r>
+            <a:endParaRPr lang="en-US" sz="1150" dirty="0"/>
+          </a:p>
+          <a:p>
+            <a:pPr indent="0" marL="0">
+              <a:lnSpc>
+                <a:spcPct val="110000"/>
+              </a:lnSpc>
+              <a:buNone/>
+            </a:pPr>
+            <a:r>
+              <a:rPr lang="en-US" sz="1150" dirty="0">
+                <a:solidFill>
+                  <a:srgbClr val="1F2937"/>
+                </a:solidFill>
+                <a:latin typeface="Calibri" pitchFamily="34" charset="0"/>
+                <a:ea typeface="Calibri" pitchFamily="34" charset="-122"/>
+                <a:cs typeface="Calibri" pitchFamily="34" charset="-120"/>
+              </a:rPr>
+              <a:t>agent can use.</a:t>
+            </a:r>
+            <a:endParaRPr lang="en-US" sz="1150" dirty="0"/>
+          </a:p>
+        </p:txBody>
+      </p:sp>
+      <p:sp>
+        <p:nvSpPr>
+          <p:cNvPr id="57" name="Shape 39"/>
+          <p:cNvSpPr/>
+          <p:nvPr/>
+        </p:nvSpPr>
+        <p:spPr>
+          <a:xfrm>
+            <a:off x="8321040" y="4183380"/>
+            <a:ext cx="3429000" cy="1097280"/>
+          </a:xfrm>
+          <a:prstGeom prst="roundRect">
+            <a:avLst>
+              <a:gd name="adj" fmla="val 10000"/>
+            </a:avLst>
+          </a:prstGeom>
+          <a:solidFill>
+            <a:srgbClr val="FFFBF7"/>
+          </a:solidFill>
+          <a:ln w="15875">
+            <a:solidFill>
+              <a:srgbClr val="F8D6BC"/>
+            </a:solidFill>
+            <a:prstDash val="solid"/>
+          </a:ln>
+        </p:spPr>
+      </p:sp>
+      <p:sp>
+        <p:nvSpPr>
+          <p:cNvPr id="58" name="Shape 40"/>
+          <p:cNvSpPr/>
+          <p:nvPr/>
+        </p:nvSpPr>
+        <p:spPr>
+          <a:xfrm>
+            <a:off x="8522208" y="4466844"/>
+            <a:ext cx="566928" cy="566928"/>
+          </a:xfrm>
+          <a:prstGeom prst="ellipse">
+            <a:avLst/>
+          </a:prstGeom>
+          <a:solidFill>
+            <a:srgbClr val="EA580C"/>
+          </a:solidFill>
+          <a:ln w="12700">
+            <a:solidFill>
+              <a:srgbClr val="EA580C"/>
+            </a:solidFill>
+            <a:prstDash val="solid"/>
+          </a:ln>
+        </p:spPr>
       </p:sp>
       <p:pic>
         <p:nvPicPr>
-          <p:cNvPr id="71" name="Image 16" descr="preencoded.png">    </p:cNvPr>
+          <p:cNvPr id="59" name="Image 16" descr="preencoded.png">    </p:cNvPr>
           <p:cNvPicPr>
             <a:picLocks noChangeAspect="1"/>
           </p:cNvPicPr>
@@ -6062,8 +5885,8 @@
         </p:blipFill>
         <p:spPr>
           <a:xfrm>
-            <a:off x="9829800" y="4700016"/>
-            <a:ext cx="201168" cy="201168"/>
+            <a:off x="8650224" y="4594860"/>
+            <a:ext cx="310896" cy="310896"/>
           </a:xfrm>
           <a:prstGeom prst="rect">
             <a:avLst/>
@@ -6072,14 +5895,14 @@
       </p:pic>
       <p:sp>
         <p:nvSpPr>
-          <p:cNvPr id="72" name="Text 53"/>
+          <p:cNvPr id="60" name="Text 41"/>
           <p:cNvSpPr txBox="1"/>
           <p:nvPr/>
         </p:nvSpPr>
         <p:spPr>
           <a:xfrm>
-            <a:off x="10104120" y="4672584"/>
-            <a:ext cx="1600200" cy="256032"/>
+            <a:off x="9262872" y="4274820"/>
+            <a:ext cx="2331720" cy="347472"/>
           </a:xfrm>
           <a:prstGeom prst="rect">
             <a:avLst/>
@@ -6092,10 +5915,55 @@
           <a:lstStyle/>
           <a:p>
             <a:pPr indent="0" marL="0">
-              <a:buNone/>
-            </a:pPr>
-            <a:r>
-              <a:rPr lang="en-US" sz="1200" dirty="0">
+              <a:lnSpc>
+                <a:spcPct val="95000"/>
+              </a:lnSpc>
+              <a:buNone/>
+            </a:pPr>
+            <a:r>
+              <a:rPr lang="en-US" sz="1600" b="1" dirty="0">
+                <a:solidFill>
+                  <a:srgbClr val="C2410C"/>
+                </a:solidFill>
+                <a:latin typeface="Calibri" pitchFamily="34" charset="0"/>
+                <a:ea typeface="Calibri" pitchFamily="34" charset="-122"/>
+                <a:cs typeface="Calibri" pitchFamily="34" charset="-120"/>
+              </a:rPr>
+              <a:t>Sandbox</a:t>
+            </a:r>
+            <a:endParaRPr lang="en-US" sz="1600" dirty="0"/>
+          </a:p>
+        </p:txBody>
+      </p:sp>
+      <p:sp>
+        <p:nvSpPr>
+          <p:cNvPr id="61" name="Text 42"/>
+          <p:cNvSpPr txBox="1"/>
+          <p:nvPr/>
+        </p:nvSpPr>
+        <p:spPr>
+          <a:xfrm>
+            <a:off x="9262872" y="4604004"/>
+            <a:ext cx="2331720" cy="640080"/>
+          </a:xfrm>
+          <a:prstGeom prst="rect">
+            <a:avLst/>
+          </a:prstGeom>
+          <a:noFill/>
+          <a:ln/>
+        </p:spPr>
+        <p:txBody>
+          <a:bodyPr wrap="square" lIns="0" tIns="0" rIns="0" bIns="0" rtlCol="0" anchor="t"/>
+          <a:lstStyle/>
+          <a:p>
+            <a:pPr indent="0" marL="0">
+              <a:lnSpc>
+                <a:spcPct val="110000"/>
+              </a:lnSpc>
+              <a:buNone/>
+            </a:pPr>
+            <a:r>
+              <a:rPr lang="en-US" sz="1150" dirty="0">
                 <a:solidFill>
                   <a:srgbClr val="1F2937"/>
                 </a:solidFill>
@@ -6103,11 +5971,499 @@
                 <a:ea typeface="Calibri" pitchFamily="34" charset="-122"/>
                 <a:cs typeface="Calibri" pitchFamily="34" charset="-120"/>
               </a:rPr>
-              <a:t>What was decided</a:t>
-            </a:r>
-            <a:endParaRPr lang="en-US" sz="1200" dirty="0"/>
-          </a:p>
-        </p:txBody>
+              <a:t>Isolated environment to run</a:t>
+            </a:r>
+            <a:endParaRPr lang="en-US" sz="1150" dirty="0"/>
+          </a:p>
+          <a:p>
+            <a:pPr indent="0" marL="0">
+              <a:lnSpc>
+                <a:spcPct val="110000"/>
+              </a:lnSpc>
+              <a:buNone/>
+            </a:pPr>
+            <a:r>
+              <a:rPr lang="en-US" sz="1150" dirty="0">
+                <a:solidFill>
+                  <a:srgbClr val="1F2937"/>
+                </a:solidFill>
+                <a:latin typeface="Calibri" pitchFamily="34" charset="0"/>
+                <a:ea typeface="Calibri" pitchFamily="34" charset="-122"/>
+                <a:cs typeface="Calibri" pitchFamily="34" charset="-120"/>
+              </a:rPr>
+              <a:t>code and process data safely.</a:t>
+            </a:r>
+            <a:endParaRPr lang="en-US" sz="1150" dirty="0"/>
+          </a:p>
+        </p:txBody>
+      </p:sp>
+      <p:sp>
+        <p:nvSpPr>
+          <p:cNvPr id="62" name="Shape 43"/>
+          <p:cNvSpPr/>
+          <p:nvPr/>
+        </p:nvSpPr>
+        <p:spPr>
+          <a:xfrm>
+            <a:off x="8321040" y="5440680"/>
+            <a:ext cx="3429000" cy="1097280"/>
+          </a:xfrm>
+          <a:prstGeom prst="roundRect">
+            <a:avLst>
+              <a:gd name="adj" fmla="val 10000"/>
+            </a:avLst>
+          </a:prstGeom>
+          <a:solidFill>
+            <a:srgbClr val="FFFDF6"/>
+          </a:solidFill>
+          <a:ln w="15875">
+            <a:solidFill>
+              <a:srgbClr val="F7E0AE"/>
+            </a:solidFill>
+            <a:prstDash val="solid"/>
+          </a:ln>
+        </p:spPr>
+      </p:sp>
+      <p:sp>
+        <p:nvSpPr>
+          <p:cNvPr id="63" name="Shape 44"/>
+          <p:cNvSpPr/>
+          <p:nvPr/>
+        </p:nvSpPr>
+        <p:spPr>
+          <a:xfrm>
+            <a:off x="8522208" y="5724144"/>
+            <a:ext cx="566928" cy="566928"/>
+          </a:xfrm>
+          <a:prstGeom prst="ellipse">
+            <a:avLst/>
+          </a:prstGeom>
+          <a:solidFill>
+            <a:srgbClr val="F0A81E"/>
+          </a:solidFill>
+          <a:ln w="12700">
+            <a:solidFill>
+              <a:srgbClr val="F0A81E"/>
+            </a:solidFill>
+            <a:prstDash val="solid"/>
+          </a:ln>
+        </p:spPr>
+      </p:sp>
+      <p:pic>
+        <p:nvPicPr>
+          <p:cNvPr id="64" name="Image 17" descr="preencoded.png">    </p:cNvPr>
+          <p:cNvPicPr>
+            <a:picLocks noChangeAspect="1"/>
+          </p:cNvPicPr>
+          <p:nvPr/>
+        </p:nvPicPr>
+        <p:blipFill>
+          <a:blip r:embed="rId18"/>
+          <a:stretch>
+            <a:fillRect/>
+          </a:stretch>
+        </p:blipFill>
+        <p:spPr>
+          <a:xfrm>
+            <a:off x="8650224" y="5852160"/>
+            <a:ext cx="310896" cy="310896"/>
+          </a:xfrm>
+          <a:prstGeom prst="rect">
+            <a:avLst/>
+          </a:prstGeom>
+        </p:spPr>
+      </p:pic>
+      <p:sp>
+        <p:nvSpPr>
+          <p:cNvPr id="65" name="Text 45"/>
+          <p:cNvSpPr txBox="1"/>
+          <p:nvPr/>
+        </p:nvSpPr>
+        <p:spPr>
+          <a:xfrm>
+            <a:off x="9262872" y="5532120"/>
+            <a:ext cx="2331720" cy="347472"/>
+          </a:xfrm>
+          <a:prstGeom prst="rect">
+            <a:avLst/>
+          </a:prstGeom>
+          <a:noFill/>
+          <a:ln/>
+        </p:spPr>
+        <p:txBody>
+          <a:bodyPr wrap="square" lIns="0" tIns="0" rIns="0" bIns="0" rtlCol="0" anchor="t"/>
+          <a:lstStyle/>
+          <a:p>
+            <a:pPr indent="0" marL="0">
+              <a:lnSpc>
+                <a:spcPct val="95000"/>
+              </a:lnSpc>
+              <a:buNone/>
+            </a:pPr>
+            <a:r>
+              <a:rPr lang="en-US" sz="1600" b="1" dirty="0">
+                <a:solidFill>
+                  <a:srgbClr val="B45309"/>
+                </a:solidFill>
+                <a:latin typeface="Calibri" pitchFamily="34" charset="0"/>
+                <a:ea typeface="Calibri" pitchFamily="34" charset="-122"/>
+                <a:cs typeface="Calibri" pitchFamily="34" charset="-120"/>
+              </a:rPr>
+              <a:t>Approval Gates</a:t>
+            </a:r>
+            <a:endParaRPr lang="en-US" sz="1600" dirty="0"/>
+          </a:p>
+        </p:txBody>
+      </p:sp>
+      <p:sp>
+        <p:nvSpPr>
+          <p:cNvPr id="66" name="Text 46"/>
+          <p:cNvSpPr txBox="1"/>
+          <p:nvPr/>
+        </p:nvSpPr>
+        <p:spPr>
+          <a:xfrm>
+            <a:off x="9262872" y="5861304"/>
+            <a:ext cx="2331720" cy="640080"/>
+          </a:xfrm>
+          <a:prstGeom prst="rect">
+            <a:avLst/>
+          </a:prstGeom>
+          <a:noFill/>
+          <a:ln/>
+        </p:spPr>
+        <p:txBody>
+          <a:bodyPr wrap="square" lIns="0" tIns="0" rIns="0" bIns="0" rtlCol="0" anchor="t"/>
+          <a:lstStyle/>
+          <a:p>
+            <a:pPr indent="0" marL="0">
+              <a:lnSpc>
+                <a:spcPct val="110000"/>
+              </a:lnSpc>
+              <a:buNone/>
+            </a:pPr>
+            <a:r>
+              <a:rPr lang="en-US" sz="1150" dirty="0">
+                <a:solidFill>
+                  <a:srgbClr val="1F2937"/>
+                </a:solidFill>
+                <a:latin typeface="Calibri" pitchFamily="34" charset="0"/>
+                <a:ea typeface="Calibri" pitchFamily="34" charset="-122"/>
+                <a:cs typeface="Calibri" pitchFamily="34" charset="-120"/>
+              </a:rPr>
+              <a:t>Human or policy approvals for</a:t>
+            </a:r>
+            <a:endParaRPr lang="en-US" sz="1150" dirty="0"/>
+          </a:p>
+          <a:p>
+            <a:pPr indent="0" marL="0">
+              <a:lnSpc>
+                <a:spcPct val="110000"/>
+              </a:lnSpc>
+              <a:buNone/>
+            </a:pPr>
+            <a:r>
+              <a:rPr lang="en-US" sz="1150" dirty="0">
+                <a:solidFill>
+                  <a:srgbClr val="1F2937"/>
+                </a:solidFill>
+                <a:latin typeface="Calibri" pitchFamily="34" charset="0"/>
+                <a:ea typeface="Calibri" pitchFamily="34" charset="-122"/>
+                <a:cs typeface="Calibri" pitchFamily="34" charset="-120"/>
+              </a:rPr>
+              <a:t>sensitive or high-impact actions.</a:t>
+            </a:r>
+            <a:endParaRPr lang="en-US" sz="1150" dirty="0"/>
+          </a:p>
+        </p:txBody>
+      </p:sp>
+      <p:sp>
+        <p:nvSpPr>
+          <p:cNvPr id="67" name="Shape 47"/>
+          <p:cNvSpPr/>
+          <p:nvPr/>
+        </p:nvSpPr>
+        <p:spPr>
+          <a:xfrm>
+            <a:off x="5788152" y="3246120"/>
+            <a:ext cx="356616" cy="0"/>
+          </a:xfrm>
+          <a:prstGeom prst="line">
+            <a:avLst/>
+          </a:prstGeom>
+          <a:noFill/>
+          <a:ln w="28575">
+            <a:solidFill>
+              <a:srgbClr val="2B3A67"/>
+            </a:solidFill>
+            <a:prstDash val="dash"/>
+            <a:tailEnd type="triangle"/>
+          </a:ln>
+        </p:spPr>
+      </p:sp>
+      <p:sp>
+        <p:nvSpPr>
+          <p:cNvPr id="68" name="Shape 48"/>
+          <p:cNvSpPr/>
+          <p:nvPr/>
+        </p:nvSpPr>
+        <p:spPr>
+          <a:xfrm>
+            <a:off x="5788152" y="3703320"/>
+            <a:ext cx="356616" cy="0"/>
+          </a:xfrm>
+          <a:prstGeom prst="line">
+            <a:avLst/>
+          </a:prstGeom>
+          <a:noFill/>
+          <a:ln w="28575">
+            <a:solidFill>
+              <a:srgbClr val="9BA8DF"/>
+            </a:solidFill>
+            <a:prstDash val="dash"/>
+            <a:headEnd type="triangle"/>
+          </a:ln>
+        </p:spPr>
+      </p:sp>
+      <p:sp>
+        <p:nvSpPr>
+          <p:cNvPr id="69" name="Shape 49"/>
+          <p:cNvSpPr/>
+          <p:nvPr/>
+        </p:nvSpPr>
+        <p:spPr>
+          <a:xfrm>
+            <a:off x="7891272" y="777240"/>
+            <a:ext cx="356616" cy="0"/>
+          </a:xfrm>
+          <a:prstGeom prst="line">
+            <a:avLst/>
+          </a:prstGeom>
+          <a:noFill/>
+          <a:ln w="28575">
+            <a:solidFill>
+              <a:srgbClr val="2B3A67"/>
+            </a:solidFill>
+            <a:prstDash val="dash"/>
+            <a:tailEnd type="triangle"/>
+          </a:ln>
+        </p:spPr>
+      </p:sp>
+      <p:sp>
+        <p:nvSpPr>
+          <p:cNvPr id="70" name="Shape 50"/>
+          <p:cNvSpPr/>
+          <p:nvPr/>
+        </p:nvSpPr>
+        <p:spPr>
+          <a:xfrm>
+            <a:off x="7891272" y="1161288"/>
+            <a:ext cx="356616" cy="0"/>
+          </a:xfrm>
+          <a:prstGeom prst="line">
+            <a:avLst/>
+          </a:prstGeom>
+          <a:noFill/>
+          <a:ln w="28575">
+            <a:solidFill>
+              <a:srgbClr val="9BA8DF"/>
+            </a:solidFill>
+            <a:prstDash val="dash"/>
+            <a:headEnd type="triangle"/>
+          </a:ln>
+        </p:spPr>
+      </p:sp>
+      <p:sp>
+        <p:nvSpPr>
+          <p:cNvPr id="71" name="Shape 51"/>
+          <p:cNvSpPr/>
+          <p:nvPr/>
+        </p:nvSpPr>
+        <p:spPr>
+          <a:xfrm>
+            <a:off x="7891272" y="2034540"/>
+            <a:ext cx="356616" cy="0"/>
+          </a:xfrm>
+          <a:prstGeom prst="line">
+            <a:avLst/>
+          </a:prstGeom>
+          <a:noFill/>
+          <a:ln w="28575">
+            <a:solidFill>
+              <a:srgbClr val="2B3A67"/>
+            </a:solidFill>
+            <a:prstDash val="dash"/>
+            <a:tailEnd type="triangle"/>
+          </a:ln>
+        </p:spPr>
+      </p:sp>
+      <p:sp>
+        <p:nvSpPr>
+          <p:cNvPr id="72" name="Shape 52"/>
+          <p:cNvSpPr/>
+          <p:nvPr/>
+        </p:nvSpPr>
+        <p:spPr>
+          <a:xfrm>
+            <a:off x="7891272" y="2418588"/>
+            <a:ext cx="356616" cy="0"/>
+          </a:xfrm>
+          <a:prstGeom prst="line">
+            <a:avLst/>
+          </a:prstGeom>
+          <a:noFill/>
+          <a:ln w="28575">
+            <a:solidFill>
+              <a:srgbClr val="9BA8DF"/>
+            </a:solidFill>
+            <a:prstDash val="dash"/>
+            <a:headEnd type="triangle"/>
+          </a:ln>
+        </p:spPr>
+      </p:sp>
+      <p:sp>
+        <p:nvSpPr>
+          <p:cNvPr id="73" name="Shape 53"/>
+          <p:cNvSpPr/>
+          <p:nvPr/>
+        </p:nvSpPr>
+        <p:spPr>
+          <a:xfrm>
+            <a:off x="7891272" y="3291840"/>
+            <a:ext cx="356616" cy="0"/>
+          </a:xfrm>
+          <a:prstGeom prst="line">
+            <a:avLst/>
+          </a:prstGeom>
+          <a:noFill/>
+          <a:ln w="28575">
+            <a:solidFill>
+              <a:srgbClr val="2B3A67"/>
+            </a:solidFill>
+            <a:prstDash val="dash"/>
+            <a:tailEnd type="triangle"/>
+          </a:ln>
+        </p:spPr>
+      </p:sp>
+      <p:sp>
+        <p:nvSpPr>
+          <p:cNvPr id="74" name="Shape 54"/>
+          <p:cNvSpPr/>
+          <p:nvPr/>
+        </p:nvSpPr>
+        <p:spPr>
+          <a:xfrm>
+            <a:off x="7891272" y="3675888"/>
+            <a:ext cx="356616" cy="0"/>
+          </a:xfrm>
+          <a:prstGeom prst="line">
+            <a:avLst/>
+          </a:prstGeom>
+          <a:noFill/>
+          <a:ln w="28575">
+            <a:solidFill>
+              <a:srgbClr val="9BA8DF"/>
+            </a:solidFill>
+            <a:prstDash val="dash"/>
+            <a:headEnd type="triangle"/>
+          </a:ln>
+        </p:spPr>
+      </p:sp>
+      <p:sp>
+        <p:nvSpPr>
+          <p:cNvPr id="75" name="Shape 55"/>
+          <p:cNvSpPr/>
+          <p:nvPr/>
+        </p:nvSpPr>
+        <p:spPr>
+          <a:xfrm>
+            <a:off x="7891272" y="4549140"/>
+            <a:ext cx="356616" cy="0"/>
+          </a:xfrm>
+          <a:prstGeom prst="line">
+            <a:avLst/>
+          </a:prstGeom>
+          <a:noFill/>
+          <a:ln w="28575">
+            <a:solidFill>
+              <a:srgbClr val="2B3A67"/>
+            </a:solidFill>
+            <a:prstDash val="dash"/>
+            <a:tailEnd type="triangle"/>
+          </a:ln>
+        </p:spPr>
+      </p:sp>
+      <p:sp>
+        <p:nvSpPr>
+          <p:cNvPr id="76" name="Shape 56"/>
+          <p:cNvSpPr/>
+          <p:nvPr/>
+        </p:nvSpPr>
+        <p:spPr>
+          <a:xfrm>
+            <a:off x="7891272" y="4933188"/>
+            <a:ext cx="356616" cy="0"/>
+          </a:xfrm>
+          <a:prstGeom prst="line">
+            <a:avLst/>
+          </a:prstGeom>
+          <a:noFill/>
+          <a:ln w="28575">
+            <a:solidFill>
+              <a:srgbClr val="9BA8DF"/>
+            </a:solidFill>
+            <a:prstDash val="dash"/>
+            <a:headEnd type="triangle"/>
+          </a:ln>
+        </p:spPr>
+      </p:sp>
+      <p:sp>
+        <p:nvSpPr>
+          <p:cNvPr id="77" name="Shape 57"/>
+          <p:cNvSpPr/>
+          <p:nvPr/>
+        </p:nvSpPr>
+        <p:spPr>
+          <a:xfrm>
+            <a:off x="7891272" y="5806440"/>
+            <a:ext cx="356616" cy="0"/>
+          </a:xfrm>
+          <a:prstGeom prst="line">
+            <a:avLst/>
+          </a:prstGeom>
+          <a:noFill/>
+          <a:ln w="28575">
+            <a:solidFill>
+              <a:srgbClr val="2B3A67"/>
+            </a:solidFill>
+            <a:prstDash val="dash"/>
+            <a:tailEnd type="triangle"/>
+          </a:ln>
+        </p:spPr>
+      </p:sp>
+      <p:sp>
+        <p:nvSpPr>
+          <p:cNvPr id="78" name="Shape 58"/>
+          <p:cNvSpPr/>
+          <p:nvPr/>
+        </p:nvSpPr>
+        <p:spPr>
+          <a:xfrm>
+            <a:off x="7891272" y="6190488"/>
+            <a:ext cx="356616" cy="0"/>
+          </a:xfrm>
+          <a:prstGeom prst="line">
+            <a:avLst/>
+          </a:prstGeom>
+          <a:noFill/>
+          <a:ln w="28575">
+            <a:solidFill>
+              <a:srgbClr val="9BA8DF"/>
+            </a:solidFill>
+            <a:prstDash val="dash"/>
+            <a:headEnd type="triangle"/>
+          </a:ln>
+        </p:spPr>
       </p:sp>
     </p:spTree>
   </p:cSld>

--- a/agent-harness-diagram.pptx
+++ b/agent-harness-diagram.pptx
@@ -860,7 +860,7 @@
           <a:p>
             <a:r>
               <a:rPr lang="en-US" dirty="0"/>
-              <a:t>Enforcement workflow. Spoke teams raise three kinds of request: policy and budget updates, MCP server onboarding, and agent or team onboarding. Each becomes a GitOps PR in kong-services, passes automated policy and two-lines-of-assurance vetting, and is promoted to the gateway by decK sync. The data plane then enforces SPIFFE workload attestation, central Splunk HEC telemetry, token quotas and loop defenses, and dynamic vault secrets with tool ACLs. Out of band, the automated kill switch API and SRE revocation path severs a consumer at the gateway in under five seconds without waiting for a pipeline run.</a:t>
+              <a:t>Enforcement workflow. Spoke teams raise five kinds of request: policy and budget updates, model onboarding (adding something like Gemini 3.8 Flash to the routing pool with its own caps and evals), model deprecation (retiring something like Gemini 2.5 Pro by redirecting traffic before the route is removed), MCP server onboarding, and agent or team onboarding. Each becomes a GitOps PR in kong-services, passes automated policy and two-lines-of-assurance vetting, and is promoted to the gateway by decK sync. The data plane then enforces SPIFFE workload attestation, central Splunk HEC telemetry, token quotas and loop defenses, and dynamic vault secrets with tool ACLs. Out of band, the automated kill switch API and SRE revocation path severs a consumer at the gateway in under five seconds without waiting for a pipeline run.</a:t>
             </a:r>
             <a:endParaRPr lang="en-US" dirty="0"/>
           </a:p>
@@ -10970,7 +10970,7 @@
         <p:spPr>
           <a:xfrm>
             <a:off x="457200" y="868680"/>
-            <a:ext cx="3566160" cy="3611880"/>
+            <a:ext cx="3566160" cy="3749040"/>
           </a:xfrm>
           <a:prstGeom prst="roundRect">
             <a:avLst>
@@ -11127,11 +11127,11 @@
         <p:spPr>
           <a:xfrm>
             <a:off x="658368" y="1645920"/>
-            <a:ext cx="3163824" cy="749808"/>
+            <a:ext cx="3163824" cy="493776"/>
           </a:xfrm>
           <a:prstGeom prst="roundRect">
             <a:avLst>
-              <a:gd name="adj" fmla="val 9756"/>
+              <a:gd name="adj" fmla="val 14815"/>
             </a:avLst>
           </a:prstGeom>
           <a:solidFill>
@@ -11161,7 +11161,7 @@
         </p:blipFill>
         <p:spPr>
           <a:xfrm>
-            <a:off x="786384" y="1920240"/>
+            <a:off x="786384" y="1792224"/>
             <a:ext cx="201168" cy="201168"/>
           </a:xfrm>
           <a:prstGeom prst="rect">
@@ -11178,7 +11178,7 @@
         <p:spPr>
           <a:xfrm>
             <a:off x="1097280" y="1645920"/>
-            <a:ext cx="2615184" cy="749808"/>
+            <a:ext cx="2615184" cy="493776"/>
           </a:xfrm>
           <a:prstGeom prst="rect">
             <a:avLst/>
@@ -11239,12 +11239,12 @@
         </p:nvSpPr>
         <p:spPr>
           <a:xfrm>
-            <a:off x="658368" y="2587752"/>
-            <a:ext cx="3163824" cy="749808"/>
+            <a:off x="658368" y="2231136"/>
+            <a:ext cx="3163824" cy="493776"/>
           </a:xfrm>
           <a:prstGeom prst="roundRect">
             <a:avLst>
-              <a:gd name="adj" fmla="val 9756"/>
+              <a:gd name="adj" fmla="val 14815"/>
             </a:avLst>
           </a:prstGeom>
           <a:solidFill>
@@ -11274,7 +11274,7 @@
         </p:blipFill>
         <p:spPr>
           <a:xfrm>
-            <a:off x="786384" y="2862072"/>
+            <a:off x="786384" y="2377440"/>
             <a:ext cx="201168" cy="201168"/>
           </a:xfrm>
           <a:prstGeom prst="rect">
@@ -11290,8 +11290,8 @@
         </p:nvSpPr>
         <p:spPr>
           <a:xfrm>
-            <a:off x="1097280" y="2587752"/>
-            <a:ext cx="2615184" cy="749808"/>
+            <a:off x="1097280" y="2231136"/>
+            <a:ext cx="2615184" cy="493776"/>
           </a:xfrm>
           <a:prstGeom prst="rect">
             <a:avLst/>
@@ -11318,7 +11318,7 @@
                 <a:ea typeface="Calibri" pitchFamily="34" charset="-122"/>
                 <a:cs typeface="Calibri" pitchFamily="34" charset="-120"/>
               </a:rPr>
-              <a:t>MCP server onboarding</a:t>
+              <a:t>Model onboarding</a:t>
             </a:r>
             <a:endParaRPr lang="en-US" sz="1150" dirty="0"/>
           </a:p>
@@ -11338,7 +11338,7 @@
                 <a:ea typeface="Calibri" pitchFamily="34" charset="-122"/>
                 <a:cs typeface="Calibri" pitchFamily="34" charset="-120"/>
               </a:rPr>
-              <a:t>Tool RBAC, vault injection</a:t>
+              <a:t>e.g. add Gemini 3.8 Flash — route, caps, evals</a:t>
             </a:r>
             <a:endParaRPr lang="en-US" sz="1150" dirty="0"/>
           </a:p>
@@ -11352,12 +11352,12 @@
         </p:nvSpPr>
         <p:spPr>
           <a:xfrm>
-            <a:off x="658368" y="3529584"/>
-            <a:ext cx="3163824" cy="749808"/>
+            <a:off x="658368" y="2816352"/>
+            <a:ext cx="3163824" cy="493776"/>
           </a:xfrm>
           <a:prstGeom prst="roundRect">
             <a:avLst>
-              <a:gd name="adj" fmla="val 9756"/>
+              <a:gd name="adj" fmla="val 14815"/>
             </a:avLst>
           </a:prstGeom>
           <a:solidFill>
@@ -11387,7 +11387,7 @@
         </p:blipFill>
         <p:spPr>
           <a:xfrm>
-            <a:off x="786384" y="3803904"/>
+            <a:off x="786384" y="2962656"/>
             <a:ext cx="201168" cy="201168"/>
           </a:xfrm>
           <a:prstGeom prst="rect">
@@ -11403,8 +11403,8 @@
         </p:nvSpPr>
         <p:spPr>
           <a:xfrm>
-            <a:off x="1097280" y="3529584"/>
-            <a:ext cx="2615184" cy="749808"/>
+            <a:off x="1097280" y="2816352"/>
+            <a:ext cx="2615184" cy="493776"/>
           </a:xfrm>
           <a:prstGeom prst="rect">
             <a:avLst/>
@@ -11431,7 +11431,7 @@
                 <a:ea typeface="Calibri" pitchFamily="34" charset="-122"/>
                 <a:cs typeface="Calibri" pitchFamily="34" charset="-120"/>
               </a:rPr>
-              <a:t>Agent / team onboarding</a:t>
+              <a:t>Model deprecation</a:t>
             </a:r>
             <a:endParaRPr lang="en-US" sz="1150" dirty="0"/>
           </a:p>
@@ -11451,7 +11451,7 @@
                 <a:ea typeface="Calibri" pitchFamily="34" charset="-122"/>
                 <a:cs typeface="Calibri" pitchFamily="34" charset="-120"/>
               </a:rPr>
-              <a:t>Spoke project, transit, quotas</a:t>
+              <a:t>e.g. retire Gemini 2.5 Pro — redirect, then remove</a:t>
             </a:r>
             <a:endParaRPr lang="en-US" sz="1150" dirty="0"/>
           </a:p>
@@ -11465,12 +11465,12 @@
         </p:nvSpPr>
         <p:spPr>
           <a:xfrm>
-            <a:off x="4480560" y="868680"/>
-            <a:ext cx="3566160" cy="3611880"/>
+            <a:off x="658368" y="3401568"/>
+            <a:ext cx="3163824" cy="493776"/>
           </a:xfrm>
           <a:prstGeom prst="roundRect">
             <a:avLst>
-              <a:gd name="adj" fmla="val 3077"/>
+              <a:gd name="adj" fmla="val 14815"/>
             </a:avLst>
           </a:prstGeom>
           <a:solidFill>
@@ -11484,166 +11484,9 @@
           </a:ln>
         </p:spPr>
       </p:sp>
-      <p:sp>
-        <p:nvSpPr>
-          <p:cNvPr id="18" name="Shape 13"/>
-          <p:cNvSpPr/>
-          <p:nvPr/>
-        </p:nvSpPr>
-        <p:spPr>
-          <a:xfrm>
-            <a:off x="4608576" y="1024128"/>
-            <a:ext cx="3310128" cy="502920"/>
-          </a:xfrm>
-          <a:prstGeom prst="roundRect">
-            <a:avLst>
-              <a:gd name="adj" fmla="val 14545"/>
-            </a:avLst>
-          </a:prstGeom>
-          <a:solidFill>
-            <a:srgbClr val="ECF9F3"/>
-          </a:solidFill>
-          <a:ln w="15875">
-            <a:solidFill>
-              <a:srgbClr val="A8DDCB"/>
-            </a:solidFill>
-            <a:prstDash val="solid"/>
-          </a:ln>
-        </p:spPr>
-      </p:sp>
-      <p:sp>
-        <p:nvSpPr>
-          <p:cNvPr id="19" name="Shape 14"/>
-          <p:cNvSpPr/>
-          <p:nvPr/>
-        </p:nvSpPr>
-        <p:spPr>
-          <a:xfrm>
-            <a:off x="4700016" y="1097280"/>
-            <a:ext cx="347472" cy="347472"/>
-          </a:xfrm>
-          <a:prstGeom prst="ellipse">
-            <a:avLst/>
-          </a:prstGeom>
-          <a:solidFill>
-            <a:srgbClr val="0F9D76"/>
-          </a:solidFill>
-          <a:ln w="12700">
-            <a:solidFill>
-              <a:srgbClr val="0F9D76"/>
-            </a:solidFill>
-            <a:prstDash val="solid"/>
-          </a:ln>
-        </p:spPr>
-      </p:sp>
-      <p:sp>
-        <p:nvSpPr>
-          <p:cNvPr id="20" name="Text 15"/>
-          <p:cNvSpPr txBox="1"/>
-          <p:nvPr/>
-        </p:nvSpPr>
-        <p:spPr>
-          <a:xfrm>
-            <a:off x="4700016" y="1097280"/>
-            <a:ext cx="347472" cy="347472"/>
-          </a:xfrm>
-          <a:prstGeom prst="rect">
-            <a:avLst/>
-          </a:prstGeom>
-          <a:noFill/>
-          <a:ln/>
-        </p:spPr>
-        <p:txBody>
-          <a:bodyPr wrap="square" lIns="0" tIns="0" rIns="0" bIns="0" rtlCol="0" anchor="ctr"/>
-          <a:lstStyle/>
-          <a:p>
-            <a:pPr algn="ctr" indent="0" marL="0">
-              <a:buNone/>
-            </a:pPr>
-            <a:r>
-              <a:rPr lang="en-US" sz="1300" b="1" dirty="0">
-                <a:solidFill>
-                  <a:srgbClr val="FFFFFF"/>
-                </a:solidFill>
-                <a:latin typeface="Calibri" pitchFamily="34" charset="0"/>
-                <a:ea typeface="Calibri" pitchFamily="34" charset="-122"/>
-                <a:cs typeface="Calibri" pitchFamily="34" charset="-120"/>
-              </a:rPr>
-              <a:t>2</a:t>
-            </a:r>
-            <a:endParaRPr lang="en-US" sz="1300" dirty="0"/>
-          </a:p>
-        </p:txBody>
-      </p:sp>
-      <p:sp>
-        <p:nvSpPr>
-          <p:cNvPr id="21" name="Text 16"/>
-          <p:cNvSpPr txBox="1"/>
-          <p:nvPr/>
-        </p:nvSpPr>
-        <p:spPr>
-          <a:xfrm>
-            <a:off x="5157216" y="1024128"/>
-            <a:ext cx="2743200" cy="502920"/>
-          </a:xfrm>
-          <a:prstGeom prst="rect">
-            <a:avLst/>
-          </a:prstGeom>
-          <a:noFill/>
-          <a:ln/>
-        </p:spPr>
-        <p:txBody>
-          <a:bodyPr wrap="square" lIns="0" tIns="0" rIns="0" bIns="0" rtlCol="0" anchor="ctr"/>
-          <a:lstStyle/>
-          <a:p>
-            <a:pPr indent="0" marL="0">
-              <a:buNone/>
-            </a:pPr>
-            <a:r>
-              <a:rPr lang="en-US" sz="1250" b="1" dirty="0">
-                <a:solidFill>
-                  <a:srgbClr val="0A7355"/>
-                </a:solidFill>
-                <a:latin typeface="Calibri" pitchFamily="34" charset="0"/>
-                <a:ea typeface="Calibri" pitchFamily="34" charset="-122"/>
-                <a:cs typeface="Calibri" pitchFamily="34" charset="-120"/>
-              </a:rPr>
-              <a:t>AI hub CI/CD (GitOps spine)</a:t>
-            </a:r>
-            <a:endParaRPr lang="en-US" sz="1250" dirty="0"/>
-          </a:p>
-        </p:txBody>
-      </p:sp>
-      <p:sp>
-        <p:nvSpPr>
-          <p:cNvPr id="22" name="Shape 17"/>
-          <p:cNvSpPr/>
-          <p:nvPr/>
-        </p:nvSpPr>
-        <p:spPr>
-          <a:xfrm>
-            <a:off x="4681728" y="1627632"/>
-            <a:ext cx="3163824" cy="685800"/>
-          </a:xfrm>
-          <a:prstGeom prst="roundRect">
-            <a:avLst>
-              <a:gd name="adj" fmla="val 10667"/>
-            </a:avLst>
-          </a:prstGeom>
-          <a:solidFill>
-            <a:srgbClr val="FFFFFF"/>
-          </a:solidFill>
-          <a:ln w="15875">
-            <a:solidFill>
-              <a:srgbClr val="C7D2E8"/>
-            </a:solidFill>
-            <a:prstDash val="solid"/>
-          </a:ln>
-        </p:spPr>
-      </p:sp>
       <p:pic>
         <p:nvPicPr>
-          <p:cNvPr id="23" name="Image 3" descr="preencoded.png">    </p:cNvPr>
+          <p:cNvPr id="18" name="Image 3" descr="preencoded.png">    </p:cNvPr>
           <p:cNvPicPr>
             <a:picLocks noChangeAspect="1"/>
           </p:cNvPicPr>
@@ -11657,7 +11500,7 @@
         </p:blipFill>
         <p:spPr>
           <a:xfrm>
-            <a:off x="4809744" y="1869948"/>
+            <a:off x="786384" y="3547872"/>
             <a:ext cx="201168" cy="201168"/>
           </a:xfrm>
           <a:prstGeom prst="rect">
@@ -11667,14 +11510,14 @@
       </p:pic>
       <p:sp>
         <p:nvSpPr>
-          <p:cNvPr id="24" name="Text 18"/>
+          <p:cNvPr id="19" name="Text 13"/>
           <p:cNvSpPr txBox="1"/>
           <p:nvPr/>
         </p:nvSpPr>
         <p:spPr>
           <a:xfrm>
-            <a:off x="5120640" y="1627632"/>
-            <a:ext cx="2615184" cy="685800"/>
+            <a:off x="1097280" y="3401568"/>
+            <a:ext cx="2615184" cy="493776"/>
           </a:xfrm>
           <a:prstGeom prst="rect">
             <a:avLst/>
@@ -11701,7 +11544,7 @@
                 <a:ea typeface="Calibri" pitchFamily="34" charset="-122"/>
                 <a:cs typeface="Calibri" pitchFamily="34" charset="-120"/>
               </a:rPr>
-              <a:t>GitOps PR in kong-services</a:t>
+              <a:t>MCP server onboarding</a:t>
             </a:r>
             <a:endParaRPr lang="en-US" sz="1150" dirty="0"/>
           </a:p>
@@ -11721,7 +11564,7 @@
                 <a:ea typeface="Calibri" pitchFamily="34" charset="-122"/>
                 <a:cs typeface="Calibri" pitchFamily="34" charset="-120"/>
               </a:rPr>
-              <a:t>Declarative config change proposed</a:t>
+              <a:t>Tool RBAC, vault injection</a:t>
             </a:r>
             <a:endParaRPr lang="en-US" sz="1150" dirty="0"/>
           </a:p>
@@ -11729,42 +11572,18 @@
       </p:sp>
       <p:sp>
         <p:nvSpPr>
-          <p:cNvPr id="25" name="Shape 19"/>
-          <p:cNvSpPr/>
-          <p:nvPr/>
-        </p:nvSpPr>
-        <p:spPr>
-          <a:xfrm>
-            <a:off x="6263640" y="2350008"/>
-            <a:ext cx="0" cy="192024"/>
-          </a:xfrm>
-          <a:prstGeom prst="line">
-            <a:avLst/>
-          </a:prstGeom>
-          <a:noFill/>
-          <a:ln w="22225">
-            <a:solidFill>
-              <a:srgbClr val="2B3A67"/>
-            </a:solidFill>
-            <a:prstDash val="solid"/>
-            <a:tailEnd type="triangle"/>
-          </a:ln>
-        </p:spPr>
-      </p:sp>
-      <p:sp>
-        <p:nvSpPr>
-          <p:cNvPr id="26" name="Shape 20"/>
-          <p:cNvSpPr/>
-          <p:nvPr/>
-        </p:nvSpPr>
-        <p:spPr>
-          <a:xfrm>
-            <a:off x="4681728" y="2587752"/>
-            <a:ext cx="3163824" cy="685800"/>
+          <p:cNvPr id="20" name="Shape 14"/>
+          <p:cNvSpPr/>
+          <p:nvPr/>
+        </p:nvSpPr>
+        <p:spPr>
+          <a:xfrm>
+            <a:off x="658368" y="3986784"/>
+            <a:ext cx="3163824" cy="493776"/>
           </a:xfrm>
           <a:prstGeom prst="roundRect">
             <a:avLst>
-              <a:gd name="adj" fmla="val 10667"/>
+              <a:gd name="adj" fmla="val 14815"/>
             </a:avLst>
           </a:prstGeom>
           <a:solidFill>
@@ -11780,7 +11599,7 @@
       </p:sp>
       <p:pic>
         <p:nvPicPr>
-          <p:cNvPr id="27" name="Image 4" descr="preencoded.png">    </p:cNvPr>
+          <p:cNvPr id="21" name="Image 4" descr="preencoded.png">    </p:cNvPr>
           <p:cNvPicPr>
             <a:picLocks noChangeAspect="1"/>
           </p:cNvPicPr>
@@ -11794,7 +11613,7 @@
         </p:blipFill>
         <p:spPr>
           <a:xfrm>
-            <a:off x="4809744" y="2830068"/>
+            <a:off x="786384" y="4133088"/>
             <a:ext cx="201168" cy="201168"/>
           </a:xfrm>
           <a:prstGeom prst="rect">
@@ -11804,14 +11623,14 @@
       </p:pic>
       <p:sp>
         <p:nvSpPr>
-          <p:cNvPr id="28" name="Text 21"/>
+          <p:cNvPr id="22" name="Text 15"/>
           <p:cNvSpPr txBox="1"/>
           <p:nvPr/>
         </p:nvSpPr>
         <p:spPr>
           <a:xfrm>
-            <a:off x="5120640" y="2587752"/>
-            <a:ext cx="2615184" cy="685800"/>
+            <a:off x="1097280" y="3986784"/>
+            <a:ext cx="2615184" cy="493776"/>
           </a:xfrm>
           <a:prstGeom prst="rect">
             <a:avLst/>
@@ -11838,7 +11657,7 @@
                 <a:ea typeface="Calibri" pitchFamily="34" charset="-122"/>
                 <a:cs typeface="Calibri" pitchFamily="34" charset="-120"/>
               </a:rPr>
-              <a:t>Automated policy &amp; 2LoA vetting</a:t>
+              <a:t>Agent / team onboarding</a:t>
             </a:r>
             <a:endParaRPr lang="en-US" sz="1150" dirty="0"/>
           </a:p>
@@ -11858,7 +11677,7 @@
                 <a:ea typeface="Calibri" pitchFamily="34" charset="-122"/>
                 <a:cs typeface="Calibri" pitchFamily="34" charset="-120"/>
               </a:rPr>
-              <a:t>Schema checks and dual approval</a:t>
+              <a:t>Spoke project, transit, quotas</a:t>
             </a:r>
             <a:endParaRPr lang="en-US" sz="1150" dirty="0"/>
           </a:p>
@@ -11866,42 +11685,18 @@
       </p:sp>
       <p:sp>
         <p:nvSpPr>
-          <p:cNvPr id="29" name="Shape 22"/>
-          <p:cNvSpPr/>
-          <p:nvPr/>
-        </p:nvSpPr>
-        <p:spPr>
-          <a:xfrm>
-            <a:off x="6263640" y="3310128"/>
-            <a:ext cx="0" cy="192024"/>
-          </a:xfrm>
-          <a:prstGeom prst="line">
-            <a:avLst/>
-          </a:prstGeom>
-          <a:noFill/>
-          <a:ln w="22225">
-            <a:solidFill>
-              <a:srgbClr val="2B3A67"/>
-            </a:solidFill>
-            <a:prstDash val="solid"/>
-            <a:tailEnd type="triangle"/>
-          </a:ln>
-        </p:spPr>
-      </p:sp>
-      <p:sp>
-        <p:nvSpPr>
-          <p:cNvPr id="30" name="Shape 23"/>
-          <p:cNvSpPr/>
-          <p:nvPr/>
-        </p:nvSpPr>
-        <p:spPr>
-          <a:xfrm>
-            <a:off x="4681728" y="3547872"/>
-            <a:ext cx="3163824" cy="685800"/>
+          <p:cNvPr id="23" name="Shape 16"/>
+          <p:cNvSpPr/>
+          <p:nvPr/>
+        </p:nvSpPr>
+        <p:spPr>
+          <a:xfrm>
+            <a:off x="4480560" y="868680"/>
+            <a:ext cx="3566160" cy="3749040"/>
           </a:xfrm>
           <a:prstGeom prst="roundRect">
             <a:avLst>
-              <a:gd name="adj" fmla="val 10667"/>
+              <a:gd name="adj" fmla="val 3077"/>
             </a:avLst>
           </a:prstGeom>
           <a:solidFill>
@@ -11915,9 +11710,166 @@
           </a:ln>
         </p:spPr>
       </p:sp>
+      <p:sp>
+        <p:nvSpPr>
+          <p:cNvPr id="24" name="Shape 17"/>
+          <p:cNvSpPr/>
+          <p:nvPr/>
+        </p:nvSpPr>
+        <p:spPr>
+          <a:xfrm>
+            <a:off x="4608576" y="1024128"/>
+            <a:ext cx="3310128" cy="502920"/>
+          </a:xfrm>
+          <a:prstGeom prst="roundRect">
+            <a:avLst>
+              <a:gd name="adj" fmla="val 14545"/>
+            </a:avLst>
+          </a:prstGeom>
+          <a:solidFill>
+            <a:srgbClr val="ECF9F3"/>
+          </a:solidFill>
+          <a:ln w="15875">
+            <a:solidFill>
+              <a:srgbClr val="A8DDCB"/>
+            </a:solidFill>
+            <a:prstDash val="solid"/>
+          </a:ln>
+        </p:spPr>
+      </p:sp>
+      <p:sp>
+        <p:nvSpPr>
+          <p:cNvPr id="25" name="Shape 18"/>
+          <p:cNvSpPr/>
+          <p:nvPr/>
+        </p:nvSpPr>
+        <p:spPr>
+          <a:xfrm>
+            <a:off x="4700016" y="1097280"/>
+            <a:ext cx="347472" cy="347472"/>
+          </a:xfrm>
+          <a:prstGeom prst="ellipse">
+            <a:avLst/>
+          </a:prstGeom>
+          <a:solidFill>
+            <a:srgbClr val="0F9D76"/>
+          </a:solidFill>
+          <a:ln w="12700">
+            <a:solidFill>
+              <a:srgbClr val="0F9D76"/>
+            </a:solidFill>
+            <a:prstDash val="solid"/>
+          </a:ln>
+        </p:spPr>
+      </p:sp>
+      <p:sp>
+        <p:nvSpPr>
+          <p:cNvPr id="26" name="Text 19"/>
+          <p:cNvSpPr txBox="1"/>
+          <p:nvPr/>
+        </p:nvSpPr>
+        <p:spPr>
+          <a:xfrm>
+            <a:off x="4700016" y="1097280"/>
+            <a:ext cx="347472" cy="347472"/>
+          </a:xfrm>
+          <a:prstGeom prst="rect">
+            <a:avLst/>
+          </a:prstGeom>
+          <a:noFill/>
+          <a:ln/>
+        </p:spPr>
+        <p:txBody>
+          <a:bodyPr wrap="square" lIns="0" tIns="0" rIns="0" bIns="0" rtlCol="0" anchor="ctr"/>
+          <a:lstStyle/>
+          <a:p>
+            <a:pPr algn="ctr" indent="0" marL="0">
+              <a:buNone/>
+            </a:pPr>
+            <a:r>
+              <a:rPr lang="en-US" sz="1300" b="1" dirty="0">
+                <a:solidFill>
+                  <a:srgbClr val="FFFFFF"/>
+                </a:solidFill>
+                <a:latin typeface="Calibri" pitchFamily="34" charset="0"/>
+                <a:ea typeface="Calibri" pitchFamily="34" charset="-122"/>
+                <a:cs typeface="Calibri" pitchFamily="34" charset="-120"/>
+              </a:rPr>
+              <a:t>2</a:t>
+            </a:r>
+            <a:endParaRPr lang="en-US" sz="1300" dirty="0"/>
+          </a:p>
+        </p:txBody>
+      </p:sp>
+      <p:sp>
+        <p:nvSpPr>
+          <p:cNvPr id="27" name="Text 20"/>
+          <p:cNvSpPr txBox="1"/>
+          <p:nvPr/>
+        </p:nvSpPr>
+        <p:spPr>
+          <a:xfrm>
+            <a:off x="5157216" y="1024128"/>
+            <a:ext cx="2743200" cy="502920"/>
+          </a:xfrm>
+          <a:prstGeom prst="rect">
+            <a:avLst/>
+          </a:prstGeom>
+          <a:noFill/>
+          <a:ln/>
+        </p:spPr>
+        <p:txBody>
+          <a:bodyPr wrap="square" lIns="0" tIns="0" rIns="0" bIns="0" rtlCol="0" anchor="ctr"/>
+          <a:lstStyle/>
+          <a:p>
+            <a:pPr indent="0" marL="0">
+              <a:buNone/>
+            </a:pPr>
+            <a:r>
+              <a:rPr lang="en-US" sz="1250" b="1" dirty="0">
+                <a:solidFill>
+                  <a:srgbClr val="0A7355"/>
+                </a:solidFill>
+                <a:latin typeface="Calibri" pitchFamily="34" charset="0"/>
+                <a:ea typeface="Calibri" pitchFamily="34" charset="-122"/>
+                <a:cs typeface="Calibri" pitchFamily="34" charset="-120"/>
+              </a:rPr>
+              <a:t>AI hub CI/CD (GitOps spine)</a:t>
+            </a:r>
+            <a:endParaRPr lang="en-US" sz="1250" dirty="0"/>
+          </a:p>
+        </p:txBody>
+      </p:sp>
+      <p:sp>
+        <p:nvSpPr>
+          <p:cNvPr id="28" name="Shape 21"/>
+          <p:cNvSpPr/>
+          <p:nvPr/>
+        </p:nvSpPr>
+        <p:spPr>
+          <a:xfrm>
+            <a:off x="4681728" y="1645920"/>
+            <a:ext cx="3163824" cy="731520"/>
+          </a:xfrm>
+          <a:prstGeom prst="roundRect">
+            <a:avLst>
+              <a:gd name="adj" fmla="val 10000"/>
+            </a:avLst>
+          </a:prstGeom>
+          <a:solidFill>
+            <a:srgbClr val="FFFFFF"/>
+          </a:solidFill>
+          <a:ln w="15875">
+            <a:solidFill>
+              <a:srgbClr val="C7D2E8"/>
+            </a:solidFill>
+            <a:prstDash val="solid"/>
+          </a:ln>
+        </p:spPr>
+      </p:sp>
       <p:pic>
         <p:nvPicPr>
-          <p:cNvPr id="31" name="Image 5" descr="preencoded.png">    </p:cNvPr>
+          <p:cNvPr id="29" name="Image 5" descr="preencoded.png">    </p:cNvPr>
           <p:cNvPicPr>
             <a:picLocks noChangeAspect="1"/>
           </p:cNvPicPr>
@@ -11931,7 +11883,7 @@
         </p:blipFill>
         <p:spPr>
           <a:xfrm>
-            <a:off x="4809744" y="3790188"/>
+            <a:off x="4809744" y="1911096"/>
             <a:ext cx="201168" cy="201168"/>
           </a:xfrm>
           <a:prstGeom prst="rect">
@@ -11941,14 +11893,14 @@
       </p:pic>
       <p:sp>
         <p:nvSpPr>
-          <p:cNvPr id="32" name="Text 24"/>
+          <p:cNvPr id="30" name="Text 22"/>
           <p:cNvSpPr txBox="1"/>
           <p:nvPr/>
         </p:nvSpPr>
         <p:spPr>
           <a:xfrm>
-            <a:off x="5120640" y="3547872"/>
-            <a:ext cx="2615184" cy="685800"/>
+            <a:off x="5120640" y="1645920"/>
+            <a:ext cx="2615184" cy="731520"/>
           </a:xfrm>
           <a:prstGeom prst="rect">
             <a:avLst/>
@@ -11975,7 +11927,7 @@
                 <a:ea typeface="Calibri" pitchFamily="34" charset="-122"/>
                 <a:cs typeface="Calibri" pitchFamily="34" charset="-120"/>
               </a:rPr>
-              <a:t>decK gateway sync</a:t>
+              <a:t>GitOps PR in kong-services</a:t>
             </a:r>
             <a:endParaRPr lang="en-US" sz="1150" dirty="0"/>
           </a:p>
@@ -11995,7 +11947,7 @@
                 <a:ea typeface="Calibri" pitchFamily="34" charset="-122"/>
                 <a:cs typeface="Calibri" pitchFamily="34" charset="-120"/>
               </a:rPr>
-              <a:t>Config promoted to the data plane</a:t>
+              <a:t>Declarative config change proposed</a:t>
             </a:r>
             <a:endParaRPr lang="en-US" sz="1150" dirty="0"/>
           </a:p>
@@ -12003,18 +11955,42 @@
       </p:sp>
       <p:sp>
         <p:nvSpPr>
-          <p:cNvPr id="33" name="Shape 25"/>
-          <p:cNvSpPr/>
-          <p:nvPr/>
-        </p:nvSpPr>
-        <p:spPr>
-          <a:xfrm>
-            <a:off x="8503920" y="868680"/>
-            <a:ext cx="3246120" cy="3611880"/>
+          <p:cNvPr id="31" name="Shape 23"/>
+          <p:cNvSpPr/>
+          <p:nvPr/>
+        </p:nvSpPr>
+        <p:spPr>
+          <a:xfrm>
+            <a:off x="6263640" y="2414016"/>
+            <a:ext cx="0" cy="237744"/>
+          </a:xfrm>
+          <a:prstGeom prst="line">
+            <a:avLst/>
+          </a:prstGeom>
+          <a:noFill/>
+          <a:ln w="22225">
+            <a:solidFill>
+              <a:srgbClr val="2B3A67"/>
+            </a:solidFill>
+            <a:prstDash val="solid"/>
+            <a:tailEnd type="triangle"/>
+          </a:ln>
+        </p:spPr>
+      </p:sp>
+      <p:sp>
+        <p:nvSpPr>
+          <p:cNvPr id="32" name="Shape 24"/>
+          <p:cNvSpPr/>
+          <p:nvPr/>
+        </p:nvSpPr>
+        <p:spPr>
+          <a:xfrm>
+            <a:off x="4681728" y="2697480"/>
+            <a:ext cx="3163824" cy="731520"/>
           </a:xfrm>
           <a:prstGeom prst="roundRect">
             <a:avLst>
-              <a:gd name="adj" fmla="val 3380"/>
+              <a:gd name="adj" fmla="val 10000"/>
             </a:avLst>
           </a:prstGeom>
           <a:solidFill>
@@ -12028,166 +12004,9 @@
           </a:ln>
         </p:spPr>
       </p:sp>
-      <p:sp>
-        <p:nvSpPr>
-          <p:cNvPr id="34" name="Shape 26"/>
-          <p:cNvSpPr/>
-          <p:nvPr/>
-        </p:nvSpPr>
-        <p:spPr>
-          <a:xfrm>
-            <a:off x="8631936" y="1024128"/>
-            <a:ext cx="2990088" cy="502920"/>
-          </a:xfrm>
-          <a:prstGeom prst="roundRect">
-            <a:avLst>
-              <a:gd name="adj" fmla="val 14545"/>
-            </a:avLst>
-          </a:prstGeom>
-          <a:solidFill>
-            <a:srgbClr val="F4F2FD"/>
-          </a:solidFill>
-          <a:ln w="15875">
-            <a:solidFill>
-              <a:srgbClr val="D8D2F2"/>
-            </a:solidFill>
-            <a:prstDash val="solid"/>
-          </a:ln>
-        </p:spPr>
-      </p:sp>
-      <p:sp>
-        <p:nvSpPr>
-          <p:cNvPr id="35" name="Shape 27"/>
-          <p:cNvSpPr/>
-          <p:nvPr/>
-        </p:nvSpPr>
-        <p:spPr>
-          <a:xfrm>
-            <a:off x="8723376" y="1097280"/>
-            <a:ext cx="347472" cy="347472"/>
-          </a:xfrm>
-          <a:prstGeom prst="ellipse">
-            <a:avLst/>
-          </a:prstGeom>
-          <a:solidFill>
-            <a:srgbClr val="6D28D9"/>
-          </a:solidFill>
-          <a:ln w="12700">
-            <a:solidFill>
-              <a:srgbClr val="6D28D9"/>
-            </a:solidFill>
-            <a:prstDash val="solid"/>
-          </a:ln>
-        </p:spPr>
-      </p:sp>
-      <p:sp>
-        <p:nvSpPr>
-          <p:cNvPr id="36" name="Text 28"/>
-          <p:cNvSpPr txBox="1"/>
-          <p:nvPr/>
-        </p:nvSpPr>
-        <p:spPr>
-          <a:xfrm>
-            <a:off x="8723376" y="1097280"/>
-            <a:ext cx="347472" cy="347472"/>
-          </a:xfrm>
-          <a:prstGeom prst="rect">
-            <a:avLst/>
-          </a:prstGeom>
-          <a:noFill/>
-          <a:ln/>
-        </p:spPr>
-        <p:txBody>
-          <a:bodyPr wrap="square" lIns="0" tIns="0" rIns="0" bIns="0" rtlCol="0" anchor="ctr"/>
-          <a:lstStyle/>
-          <a:p>
-            <a:pPr algn="ctr" indent="0" marL="0">
-              <a:buNone/>
-            </a:pPr>
-            <a:r>
-              <a:rPr lang="en-US" sz="1300" b="1" dirty="0">
-                <a:solidFill>
-                  <a:srgbClr val="FFFFFF"/>
-                </a:solidFill>
-                <a:latin typeface="Calibri" pitchFamily="34" charset="0"/>
-                <a:ea typeface="Calibri" pitchFamily="34" charset="-122"/>
-                <a:cs typeface="Calibri" pitchFamily="34" charset="-120"/>
-              </a:rPr>
-              <a:t>3</a:t>
-            </a:r>
-            <a:endParaRPr lang="en-US" sz="1300" dirty="0"/>
-          </a:p>
-        </p:txBody>
-      </p:sp>
-      <p:sp>
-        <p:nvSpPr>
-          <p:cNvPr id="37" name="Text 29"/>
-          <p:cNvSpPr txBox="1"/>
-          <p:nvPr/>
-        </p:nvSpPr>
-        <p:spPr>
-          <a:xfrm>
-            <a:off x="9180576" y="1024128"/>
-            <a:ext cx="2423160" cy="502920"/>
-          </a:xfrm>
-          <a:prstGeom prst="rect">
-            <a:avLst/>
-          </a:prstGeom>
-          <a:noFill/>
-          <a:ln/>
-        </p:spPr>
-        <p:txBody>
-          <a:bodyPr wrap="square" lIns="0" tIns="0" rIns="0" bIns="0" rtlCol="0" anchor="ctr"/>
-          <a:lstStyle/>
-          <a:p>
-            <a:pPr indent="0" marL="0">
-              <a:buNone/>
-            </a:pPr>
-            <a:r>
-              <a:rPr lang="en-US" sz="1250" b="1" dirty="0">
-                <a:solidFill>
-                  <a:srgbClr val="5B21B6"/>
-                </a:solidFill>
-                <a:latin typeface="Calibri" pitchFamily="34" charset="0"/>
-                <a:ea typeface="Calibri" pitchFamily="34" charset="-122"/>
-                <a:cs typeface="Calibri" pitchFamily="34" charset="-120"/>
-              </a:rPr>
-              <a:t>Enforced at the data plane</a:t>
-            </a:r>
-            <a:endParaRPr lang="en-US" sz="1250" dirty="0"/>
-          </a:p>
-        </p:txBody>
-      </p:sp>
-      <p:sp>
-        <p:nvSpPr>
-          <p:cNvPr id="38" name="Shape 30"/>
-          <p:cNvSpPr/>
-          <p:nvPr/>
-        </p:nvSpPr>
-        <p:spPr>
-          <a:xfrm>
-            <a:off x="8705088" y="1645920"/>
-            <a:ext cx="2843784" cy="548640"/>
-          </a:xfrm>
-          <a:prstGeom prst="roundRect">
-            <a:avLst>
-              <a:gd name="adj" fmla="val 13333"/>
-            </a:avLst>
-          </a:prstGeom>
-          <a:solidFill>
-            <a:srgbClr val="FFFFFF"/>
-          </a:solidFill>
-          <a:ln w="15875">
-            <a:solidFill>
-              <a:srgbClr val="C7D2E8"/>
-            </a:solidFill>
-            <a:prstDash val="solid"/>
-          </a:ln>
-        </p:spPr>
-      </p:sp>
       <p:pic>
         <p:nvPicPr>
-          <p:cNvPr id="39" name="Image 6" descr="preencoded.png">    </p:cNvPr>
+          <p:cNvPr id="33" name="Image 6" descr="preencoded.png">    </p:cNvPr>
           <p:cNvPicPr>
             <a:picLocks noChangeAspect="1"/>
           </p:cNvPicPr>
@@ -12201,7 +12020,7 @@
         </p:blipFill>
         <p:spPr>
           <a:xfrm>
-            <a:off x="8833104" y="1819656"/>
+            <a:off x="4809744" y="2962656"/>
             <a:ext cx="201168" cy="201168"/>
           </a:xfrm>
           <a:prstGeom prst="rect">
@@ -12211,14 +12030,14 @@
       </p:pic>
       <p:sp>
         <p:nvSpPr>
-          <p:cNvPr id="40" name="Text 31"/>
+          <p:cNvPr id="34" name="Text 25"/>
           <p:cNvSpPr txBox="1"/>
           <p:nvPr/>
         </p:nvSpPr>
         <p:spPr>
           <a:xfrm>
-            <a:off x="9144000" y="1645920"/>
-            <a:ext cx="2295144" cy="548640"/>
+            <a:off x="5120640" y="2697480"/>
+            <a:ext cx="2615184" cy="731520"/>
           </a:xfrm>
           <a:prstGeom prst="rect">
             <a:avLst/>
@@ -12237,7 +12056,7 @@
               <a:buNone/>
             </a:pPr>
             <a:r>
-              <a:rPr lang="en-US" sz="1150" dirty="0">
+              <a:rPr lang="en-US" sz="1150" b="1" dirty="0">
                 <a:solidFill>
                   <a:srgbClr val="1F2937"/>
                 </a:solidFill>
@@ -12245,26 +12064,70 @@
                 <a:ea typeface="Calibri" pitchFamily="34" charset="-122"/>
                 <a:cs typeface="Calibri" pitchFamily="34" charset="-120"/>
               </a:rPr>
-              <a:t>SPIFFE workload attestation</a:t>
+              <a:t>Automated policy &amp; 2LoA vetting</a:t>
             </a:r>
             <a:endParaRPr lang="en-US" sz="1150" dirty="0"/>
           </a:p>
-        </p:txBody>
-      </p:sp>
-      <p:sp>
-        <p:nvSpPr>
-          <p:cNvPr id="41" name="Shape 32"/>
-          <p:cNvSpPr/>
-          <p:nvPr/>
-        </p:nvSpPr>
-        <p:spPr>
-          <a:xfrm>
-            <a:off x="8705088" y="2331720"/>
-            <a:ext cx="2843784" cy="548640"/>
+          <a:p>
+            <a:pPr algn="ctr" indent="0" marL="0">
+              <a:lnSpc>
+                <a:spcPct val="100000"/>
+              </a:lnSpc>
+              <a:buNone/>
+            </a:pPr>
+            <a:r>
+              <a:rPr lang="en-US" sz="950" dirty="0">
+                <a:solidFill>
+                  <a:srgbClr val="4B5563"/>
+                </a:solidFill>
+                <a:latin typeface="Calibri" pitchFamily="34" charset="0"/>
+                <a:ea typeface="Calibri" pitchFamily="34" charset="-122"/>
+                <a:cs typeface="Calibri" pitchFamily="34" charset="-120"/>
+              </a:rPr>
+              <a:t>Schema checks and dual approval</a:t>
+            </a:r>
+            <a:endParaRPr lang="en-US" sz="1150" dirty="0"/>
+          </a:p>
+        </p:txBody>
+      </p:sp>
+      <p:sp>
+        <p:nvSpPr>
+          <p:cNvPr id="35" name="Shape 26"/>
+          <p:cNvSpPr/>
+          <p:nvPr/>
+        </p:nvSpPr>
+        <p:spPr>
+          <a:xfrm>
+            <a:off x="6263640" y="3465576"/>
+            <a:ext cx="0" cy="237744"/>
+          </a:xfrm>
+          <a:prstGeom prst="line">
+            <a:avLst/>
+          </a:prstGeom>
+          <a:noFill/>
+          <a:ln w="22225">
+            <a:solidFill>
+              <a:srgbClr val="2B3A67"/>
+            </a:solidFill>
+            <a:prstDash val="solid"/>
+            <a:tailEnd type="triangle"/>
+          </a:ln>
+        </p:spPr>
+      </p:sp>
+      <p:sp>
+        <p:nvSpPr>
+          <p:cNvPr id="36" name="Shape 27"/>
+          <p:cNvSpPr/>
+          <p:nvPr/>
+        </p:nvSpPr>
+        <p:spPr>
+          <a:xfrm>
+            <a:off x="4681728" y="3749040"/>
+            <a:ext cx="3163824" cy="731520"/>
           </a:xfrm>
           <a:prstGeom prst="roundRect">
             <a:avLst>
-              <a:gd name="adj" fmla="val 13333"/>
+              <a:gd name="adj" fmla="val 10000"/>
             </a:avLst>
           </a:prstGeom>
           <a:solidFill>
@@ -12280,7 +12143,7 @@
       </p:sp>
       <p:pic>
         <p:nvPicPr>
-          <p:cNvPr id="42" name="Image 7" descr="preencoded.png">    </p:cNvPr>
+          <p:cNvPr id="37" name="Image 7" descr="preencoded.png">    </p:cNvPr>
           <p:cNvPicPr>
             <a:picLocks noChangeAspect="1"/>
           </p:cNvPicPr>
@@ -12294,7 +12157,7 @@
         </p:blipFill>
         <p:spPr>
           <a:xfrm>
-            <a:off x="8833104" y="2505456"/>
+            <a:off x="4809744" y="4014216"/>
             <a:ext cx="201168" cy="201168"/>
           </a:xfrm>
           <a:prstGeom prst="rect">
@@ -12302,6 +12165,186 @@
           </a:prstGeom>
         </p:spPr>
       </p:pic>
+      <p:sp>
+        <p:nvSpPr>
+          <p:cNvPr id="38" name="Text 28"/>
+          <p:cNvSpPr txBox="1"/>
+          <p:nvPr/>
+        </p:nvSpPr>
+        <p:spPr>
+          <a:xfrm>
+            <a:off x="5120640" y="3749040"/>
+            <a:ext cx="2615184" cy="731520"/>
+          </a:xfrm>
+          <a:prstGeom prst="rect">
+            <a:avLst/>
+          </a:prstGeom>
+          <a:noFill/>
+          <a:ln/>
+        </p:spPr>
+        <p:txBody>
+          <a:bodyPr wrap="square" lIns="0" tIns="0" rIns="0" bIns="0" rtlCol="0" anchor="ctr"/>
+          <a:lstStyle/>
+          <a:p>
+            <a:pPr algn="ctr" indent="0" marL="0">
+              <a:lnSpc>
+                <a:spcPct val="100000"/>
+              </a:lnSpc>
+              <a:buNone/>
+            </a:pPr>
+            <a:r>
+              <a:rPr lang="en-US" sz="1150" b="1" dirty="0">
+                <a:solidFill>
+                  <a:srgbClr val="1F2937"/>
+                </a:solidFill>
+                <a:latin typeface="Calibri" pitchFamily="34" charset="0"/>
+                <a:ea typeface="Calibri" pitchFamily="34" charset="-122"/>
+                <a:cs typeface="Calibri" pitchFamily="34" charset="-120"/>
+              </a:rPr>
+              <a:t>decK gateway sync</a:t>
+            </a:r>
+            <a:endParaRPr lang="en-US" sz="1150" dirty="0"/>
+          </a:p>
+          <a:p>
+            <a:pPr algn="ctr" indent="0" marL="0">
+              <a:lnSpc>
+                <a:spcPct val="100000"/>
+              </a:lnSpc>
+              <a:buNone/>
+            </a:pPr>
+            <a:r>
+              <a:rPr lang="en-US" sz="950" dirty="0">
+                <a:solidFill>
+                  <a:srgbClr val="4B5563"/>
+                </a:solidFill>
+                <a:latin typeface="Calibri" pitchFamily="34" charset="0"/>
+                <a:ea typeface="Calibri" pitchFamily="34" charset="-122"/>
+                <a:cs typeface="Calibri" pitchFamily="34" charset="-120"/>
+              </a:rPr>
+              <a:t>Config promoted to the data plane</a:t>
+            </a:r>
+            <a:endParaRPr lang="en-US" sz="1150" dirty="0"/>
+          </a:p>
+        </p:txBody>
+      </p:sp>
+      <p:sp>
+        <p:nvSpPr>
+          <p:cNvPr id="39" name="Shape 29"/>
+          <p:cNvSpPr/>
+          <p:nvPr/>
+        </p:nvSpPr>
+        <p:spPr>
+          <a:xfrm>
+            <a:off x="8503920" y="868680"/>
+            <a:ext cx="3246120" cy="3749040"/>
+          </a:xfrm>
+          <a:prstGeom prst="roundRect">
+            <a:avLst>
+              <a:gd name="adj" fmla="val 3380"/>
+            </a:avLst>
+          </a:prstGeom>
+          <a:solidFill>
+            <a:srgbClr val="FFFFFF"/>
+          </a:solidFill>
+          <a:ln w="15875">
+            <a:solidFill>
+              <a:srgbClr val="C7D2E8"/>
+            </a:solidFill>
+            <a:prstDash val="solid"/>
+          </a:ln>
+        </p:spPr>
+      </p:sp>
+      <p:sp>
+        <p:nvSpPr>
+          <p:cNvPr id="40" name="Shape 30"/>
+          <p:cNvSpPr/>
+          <p:nvPr/>
+        </p:nvSpPr>
+        <p:spPr>
+          <a:xfrm>
+            <a:off x="8631936" y="1024128"/>
+            <a:ext cx="2990088" cy="502920"/>
+          </a:xfrm>
+          <a:prstGeom prst="roundRect">
+            <a:avLst>
+              <a:gd name="adj" fmla="val 14545"/>
+            </a:avLst>
+          </a:prstGeom>
+          <a:solidFill>
+            <a:srgbClr val="F4F2FD"/>
+          </a:solidFill>
+          <a:ln w="15875">
+            <a:solidFill>
+              <a:srgbClr val="D8D2F2"/>
+            </a:solidFill>
+            <a:prstDash val="solid"/>
+          </a:ln>
+        </p:spPr>
+      </p:sp>
+      <p:sp>
+        <p:nvSpPr>
+          <p:cNvPr id="41" name="Shape 31"/>
+          <p:cNvSpPr/>
+          <p:nvPr/>
+        </p:nvSpPr>
+        <p:spPr>
+          <a:xfrm>
+            <a:off x="8723376" y="1097280"/>
+            <a:ext cx="347472" cy="347472"/>
+          </a:xfrm>
+          <a:prstGeom prst="ellipse">
+            <a:avLst/>
+          </a:prstGeom>
+          <a:solidFill>
+            <a:srgbClr val="6D28D9"/>
+          </a:solidFill>
+          <a:ln w="12700">
+            <a:solidFill>
+              <a:srgbClr val="6D28D9"/>
+            </a:solidFill>
+            <a:prstDash val="solid"/>
+          </a:ln>
+        </p:spPr>
+      </p:sp>
+      <p:sp>
+        <p:nvSpPr>
+          <p:cNvPr id="42" name="Text 32"/>
+          <p:cNvSpPr txBox="1"/>
+          <p:nvPr/>
+        </p:nvSpPr>
+        <p:spPr>
+          <a:xfrm>
+            <a:off x="8723376" y="1097280"/>
+            <a:ext cx="347472" cy="347472"/>
+          </a:xfrm>
+          <a:prstGeom prst="rect">
+            <a:avLst/>
+          </a:prstGeom>
+          <a:noFill/>
+          <a:ln/>
+        </p:spPr>
+        <p:txBody>
+          <a:bodyPr wrap="square" lIns="0" tIns="0" rIns="0" bIns="0" rtlCol="0" anchor="ctr"/>
+          <a:lstStyle/>
+          <a:p>
+            <a:pPr algn="ctr" indent="0" marL="0">
+              <a:buNone/>
+            </a:pPr>
+            <a:r>
+              <a:rPr lang="en-US" sz="1300" b="1" dirty="0">
+                <a:solidFill>
+                  <a:srgbClr val="FFFFFF"/>
+                </a:solidFill>
+                <a:latin typeface="Calibri" pitchFamily="34" charset="0"/>
+                <a:ea typeface="Calibri" pitchFamily="34" charset="-122"/>
+                <a:cs typeface="Calibri" pitchFamily="34" charset="-120"/>
+              </a:rPr>
+              <a:t>3</a:t>
+            </a:r>
+            <a:endParaRPr lang="en-US" sz="1300" dirty="0"/>
+          </a:p>
+        </p:txBody>
+      </p:sp>
       <p:sp>
         <p:nvSpPr>
           <p:cNvPr id="43" name="Text 33"/>
@@ -12310,8 +12353,8 @@
         </p:nvSpPr>
         <p:spPr>
           <a:xfrm>
-            <a:off x="9144000" y="2331720"/>
-            <a:ext cx="2295144" cy="548640"/>
+            <a:off x="9180576" y="1024128"/>
+            <a:ext cx="2423160" cy="502920"/>
           </a:xfrm>
           <a:prstGeom prst="rect">
             <a:avLst/>
@@ -12323,24 +12366,21 @@
           <a:bodyPr wrap="square" lIns="0" tIns="0" rIns="0" bIns="0" rtlCol="0" anchor="ctr"/>
           <a:lstStyle/>
           <a:p>
-            <a:pPr algn="ctr" indent="0" marL="0">
-              <a:lnSpc>
-                <a:spcPct val="100000"/>
-              </a:lnSpc>
-              <a:buNone/>
-            </a:pPr>
-            <a:r>
-              <a:rPr lang="en-US" sz="1150" dirty="0">
-                <a:solidFill>
-                  <a:srgbClr val="1F2937"/>
-                </a:solidFill>
-                <a:latin typeface="Calibri" pitchFamily="34" charset="0"/>
-                <a:ea typeface="Calibri" pitchFamily="34" charset="-122"/>
-                <a:cs typeface="Calibri" pitchFamily="34" charset="-120"/>
-              </a:rPr>
-              <a:t>Central Splunk HEC telemetry</a:t>
-            </a:r>
-            <a:endParaRPr lang="en-US" sz="1150" dirty="0"/>
+            <a:pPr indent="0" marL="0">
+              <a:buNone/>
+            </a:pPr>
+            <a:r>
+              <a:rPr lang="en-US" sz="1250" b="1" dirty="0">
+                <a:solidFill>
+                  <a:srgbClr val="5B21B6"/>
+                </a:solidFill>
+                <a:latin typeface="Calibri" pitchFamily="34" charset="0"/>
+                <a:ea typeface="Calibri" pitchFamily="34" charset="-122"/>
+                <a:cs typeface="Calibri" pitchFamily="34" charset="-120"/>
+              </a:rPr>
+              <a:t>Enforced at the data plane</a:t>
+            </a:r>
+            <a:endParaRPr lang="en-US" sz="1250" dirty="0"/>
           </a:p>
         </p:txBody>
       </p:sp>
@@ -12352,12 +12392,12 @@
         </p:nvSpPr>
         <p:spPr>
           <a:xfrm>
-            <a:off x="8705088" y="3017520"/>
-            <a:ext cx="2843784" cy="548640"/>
+            <a:off x="8705088" y="1645920"/>
+            <a:ext cx="2843784" cy="585216"/>
           </a:xfrm>
           <a:prstGeom prst="roundRect">
             <a:avLst>
-              <a:gd name="adj" fmla="val 13333"/>
+              <a:gd name="adj" fmla="val 12500"/>
             </a:avLst>
           </a:prstGeom>
           <a:solidFill>
@@ -12387,7 +12427,7 @@
         </p:blipFill>
         <p:spPr>
           <a:xfrm>
-            <a:off x="8833104" y="3191256"/>
+            <a:off x="8833104" y="1837944"/>
             <a:ext cx="201168" cy="201168"/>
           </a:xfrm>
           <a:prstGeom prst="rect">
@@ -12403,8 +12443,8 @@
         </p:nvSpPr>
         <p:spPr>
           <a:xfrm>
-            <a:off x="9144000" y="3017520"/>
-            <a:ext cx="2295144" cy="548640"/>
+            <a:off x="9144000" y="1645920"/>
+            <a:ext cx="2295144" cy="585216"/>
           </a:xfrm>
           <a:prstGeom prst="rect">
             <a:avLst/>
@@ -12431,7 +12471,7 @@
                 <a:ea typeface="Calibri" pitchFamily="34" charset="-122"/>
                 <a:cs typeface="Calibri" pitchFamily="34" charset="-120"/>
               </a:rPr>
-              <a:t>Token quotas &amp; loop defenses</a:t>
+              <a:t>SPIFFE workload attestation</a:t>
             </a:r>
             <a:endParaRPr lang="en-US" sz="1150" dirty="0"/>
           </a:p>
@@ -12445,12 +12485,12 @@
         </p:nvSpPr>
         <p:spPr>
           <a:xfrm>
-            <a:off x="8705088" y="3703320"/>
-            <a:ext cx="2843784" cy="548640"/>
+            <a:off x="8705088" y="2395728"/>
+            <a:ext cx="2843784" cy="585216"/>
           </a:xfrm>
           <a:prstGeom prst="roundRect">
             <a:avLst>
-              <a:gd name="adj" fmla="val 13333"/>
+              <a:gd name="adj" fmla="val 12500"/>
             </a:avLst>
           </a:prstGeom>
           <a:solidFill>
@@ -12480,7 +12520,7 @@
         </p:blipFill>
         <p:spPr>
           <a:xfrm>
-            <a:off x="8833104" y="3877056"/>
+            <a:off x="8833104" y="2587752"/>
             <a:ext cx="201168" cy="201168"/>
           </a:xfrm>
           <a:prstGeom prst="rect">
@@ -12496,8 +12536,8 @@
         </p:nvSpPr>
         <p:spPr>
           <a:xfrm>
-            <a:off x="9144000" y="3703320"/>
-            <a:ext cx="2295144" cy="548640"/>
+            <a:off x="9144000" y="2395728"/>
+            <a:ext cx="2295144" cy="585216"/>
           </a:xfrm>
           <a:prstGeom prst="rect">
             <a:avLst/>
@@ -12524,7 +12564,7 @@
                 <a:ea typeface="Calibri" pitchFamily="34" charset="-122"/>
                 <a:cs typeface="Calibri" pitchFamily="34" charset="-120"/>
               </a:rPr>
-              <a:t>Dynamic vault secrets &amp; tool ACLs</a:t>
+              <a:t>Central Splunk HEC telemetry</a:t>
             </a:r>
             <a:endParaRPr lang="en-US" sz="1150" dirty="0"/>
           </a:p>
@@ -12538,68 +12578,20 @@
         </p:nvSpPr>
         <p:spPr>
           <a:xfrm>
-            <a:off x="4114800" y="2651760"/>
-            <a:ext cx="292608" cy="0"/>
-          </a:xfrm>
-          <a:prstGeom prst="line">
-            <a:avLst/>
-          </a:prstGeom>
-          <a:noFill/>
-          <a:ln w="25400">
-            <a:solidFill>
-              <a:srgbClr val="2B3A67"/>
-            </a:solidFill>
-            <a:prstDash val="solid"/>
-            <a:tailEnd type="triangle"/>
-          </a:ln>
-        </p:spPr>
-      </p:sp>
-      <p:sp>
-        <p:nvSpPr>
-          <p:cNvPr id="51" name="Shape 39"/>
-          <p:cNvSpPr/>
-          <p:nvPr/>
-        </p:nvSpPr>
-        <p:spPr>
-          <a:xfrm>
-            <a:off x="8138160" y="2651760"/>
-            <a:ext cx="292608" cy="0"/>
-          </a:xfrm>
-          <a:prstGeom prst="line">
-            <a:avLst/>
-          </a:prstGeom>
-          <a:noFill/>
-          <a:ln w="25400">
-            <a:solidFill>
-              <a:srgbClr val="2B3A67"/>
-            </a:solidFill>
-            <a:prstDash val="solid"/>
-            <a:tailEnd type="triangle"/>
-          </a:ln>
-        </p:spPr>
-      </p:sp>
-      <p:sp>
-        <p:nvSpPr>
-          <p:cNvPr id="52" name="Shape 40"/>
-          <p:cNvSpPr/>
-          <p:nvPr/>
-        </p:nvSpPr>
-        <p:spPr>
-          <a:xfrm>
-            <a:off x="457200" y="4754880"/>
-            <a:ext cx="7589520" cy="960120"/>
+            <a:off x="8705088" y="3145536"/>
+            <a:ext cx="2843784" cy="585216"/>
           </a:xfrm>
           <a:prstGeom prst="roundRect">
             <a:avLst>
-              <a:gd name="adj" fmla="val 9524"/>
+              <a:gd name="adj" fmla="val 12500"/>
             </a:avLst>
           </a:prstGeom>
           <a:solidFill>
-            <a:srgbClr val="FDF1F1"/>
+            <a:srgbClr val="FFFFFF"/>
           </a:solidFill>
           <a:ln w="15875">
             <a:solidFill>
-              <a:srgbClr val="F0C3C3"/>
+              <a:srgbClr val="C7D2E8"/>
             </a:solidFill>
             <a:prstDash val="solid"/>
           </a:ln>
@@ -12607,7 +12599,7 @@
       </p:sp>
       <p:pic>
         <p:nvPicPr>
-          <p:cNvPr id="53" name="Image 10" descr="preencoded.png">    </p:cNvPr>
+          <p:cNvPr id="51" name="Image 10" descr="preencoded.png">    </p:cNvPr>
           <p:cNvPicPr>
             <a:picLocks noChangeAspect="1"/>
           </p:cNvPicPr>
@@ -12621,8 +12613,8 @@
         </p:blipFill>
         <p:spPr>
           <a:xfrm>
-            <a:off x="685800" y="5102352"/>
-            <a:ext cx="256032" cy="256032"/>
+            <a:off x="8833104" y="3337560"/>
+            <a:ext cx="201168" cy="201168"/>
           </a:xfrm>
           <a:prstGeom prst="rect">
             <a:avLst/>
@@ -12631,14 +12623,14 @@
       </p:pic>
       <p:sp>
         <p:nvSpPr>
-          <p:cNvPr id="54" name="Text 41"/>
+          <p:cNvPr id="52" name="Text 39"/>
           <p:cNvSpPr txBox="1"/>
           <p:nvPr/>
         </p:nvSpPr>
         <p:spPr>
           <a:xfrm>
-            <a:off x="1033272" y="5029200"/>
-            <a:ext cx="2011680" cy="411480"/>
+            <a:off x="9144000" y="3145536"/>
+            <a:ext cx="2295144" cy="585216"/>
           </a:xfrm>
           <a:prstGeom prst="rect">
             <a:avLst/>
@@ -12650,38 +12642,41 @@
           <a:bodyPr wrap="square" lIns="0" tIns="0" rIns="0" bIns="0" rtlCol="0" anchor="ctr"/>
           <a:lstStyle/>
           <a:p>
-            <a:pPr indent="0" marL="0">
-              <a:buNone/>
-            </a:pPr>
-            <a:r>
-              <a:rPr lang="en-US" sz="1300" b="1" dirty="0">
-                <a:solidFill>
-                  <a:srgbClr val="B3261E"/>
-                </a:solidFill>
-                <a:latin typeface="Calibri" pitchFamily="34" charset="0"/>
-                <a:ea typeface="Calibri" pitchFamily="34" charset="-122"/>
-                <a:cs typeface="Calibri" pitchFamily="34" charset="-120"/>
-              </a:rPr>
-              <a:t>Emergency operations</a:t>
-            </a:r>
-            <a:endParaRPr lang="en-US" sz="1300" dirty="0"/>
-          </a:p>
-        </p:txBody>
-      </p:sp>
-      <p:sp>
-        <p:nvSpPr>
-          <p:cNvPr id="55" name="Shape 42"/>
-          <p:cNvSpPr/>
-          <p:nvPr/>
-        </p:nvSpPr>
-        <p:spPr>
-          <a:xfrm>
-            <a:off x="3154680" y="4992624"/>
-            <a:ext cx="4663440" cy="484632"/>
+            <a:pPr algn="ctr" indent="0" marL="0">
+              <a:lnSpc>
+                <a:spcPct val="100000"/>
+              </a:lnSpc>
+              <a:buNone/>
+            </a:pPr>
+            <a:r>
+              <a:rPr lang="en-US" sz="1150" dirty="0">
+                <a:solidFill>
+                  <a:srgbClr val="1F2937"/>
+                </a:solidFill>
+                <a:latin typeface="Calibri" pitchFamily="34" charset="0"/>
+                <a:ea typeface="Calibri" pitchFamily="34" charset="-122"/>
+                <a:cs typeface="Calibri" pitchFamily="34" charset="-120"/>
+              </a:rPr>
+              <a:t>Token quotas &amp; loop defenses</a:t>
+            </a:r>
+            <a:endParaRPr lang="en-US" sz="1150" dirty="0"/>
+          </a:p>
+        </p:txBody>
+      </p:sp>
+      <p:sp>
+        <p:nvSpPr>
+          <p:cNvPr id="53" name="Shape 40"/>
+          <p:cNvSpPr/>
+          <p:nvPr/>
+        </p:nvSpPr>
+        <p:spPr>
+          <a:xfrm>
+            <a:off x="8705088" y="3895344"/>
+            <a:ext cx="2843784" cy="585216"/>
           </a:xfrm>
           <a:prstGeom prst="roundRect">
             <a:avLst>
-              <a:gd name="adj" fmla="val 15094"/>
+              <a:gd name="adj" fmla="val 12500"/>
             </a:avLst>
           </a:prstGeom>
           <a:solidFill>
@@ -12689,7 +12684,7 @@
           </a:solidFill>
           <a:ln w="15875">
             <a:solidFill>
-              <a:srgbClr val="F0C3C3"/>
+              <a:srgbClr val="C7D2E8"/>
             </a:solidFill>
             <a:prstDash val="solid"/>
           </a:ln>
@@ -12697,7 +12692,7 @@
       </p:sp>
       <p:pic>
         <p:nvPicPr>
-          <p:cNvPr id="56" name="Image 11" descr="preencoded.png">    </p:cNvPr>
+          <p:cNvPr id="54" name="Image 11" descr="preencoded.png">    </p:cNvPr>
           <p:cNvPicPr>
             <a:picLocks noChangeAspect="1"/>
           </p:cNvPicPr>
@@ -12711,8 +12706,8 @@
         </p:blipFill>
         <p:spPr>
           <a:xfrm>
-            <a:off x="3310128" y="5120640"/>
-            <a:ext cx="219456" cy="219456"/>
+            <a:off x="8833104" y="4087368"/>
+            <a:ext cx="201168" cy="201168"/>
           </a:xfrm>
           <a:prstGeom prst="rect">
             <a:avLst/>
@@ -12721,14 +12716,14 @@
       </p:pic>
       <p:sp>
         <p:nvSpPr>
-          <p:cNvPr id="57" name="Text 43"/>
+          <p:cNvPr id="55" name="Text 41"/>
           <p:cNvSpPr txBox="1"/>
           <p:nvPr/>
         </p:nvSpPr>
         <p:spPr>
           <a:xfrm>
-            <a:off x="3566160" y="4992624"/>
-            <a:ext cx="4069080" cy="484632"/>
+            <a:off x="9144000" y="3895344"/>
+            <a:ext cx="2295144" cy="585216"/>
           </a:xfrm>
           <a:prstGeom prst="rect">
             <a:avLst/>
@@ -12741,10 +12736,13 @@
           <a:lstStyle/>
           <a:p>
             <a:pPr algn="ctr" indent="0" marL="0">
-              <a:buNone/>
-            </a:pPr>
-            <a:r>
-              <a:rPr lang="en-US" sz="1150" b="1" dirty="0">
+              <a:lnSpc>
+                <a:spcPct val="100000"/>
+              </a:lnSpc>
+              <a:buNone/>
+            </a:pPr>
+            <a:r>
+              <a:rPr lang="en-US" sz="1150" dirty="0">
                 <a:solidFill>
                   <a:srgbClr val="1F2937"/>
                 </a:solidFill>
@@ -12752,7 +12750,7 @@
                 <a:ea typeface="Calibri" pitchFamily="34" charset="-122"/>
                 <a:cs typeface="Calibri" pitchFamily="34" charset="-120"/>
               </a:rPr>
-              <a:t>Automated kill switch API  /  SRE revocation</a:t>
+              <a:t>Dynamic vault secrets &amp; tool ACLs</a:t>
             </a:r>
             <a:endParaRPr lang="en-US" sz="1150" dirty="0"/>
           </a:p>
@@ -12760,38 +12758,62 @@
       </p:sp>
       <p:sp>
         <p:nvSpPr>
+          <p:cNvPr id="56" name="Shape 42"/>
+          <p:cNvSpPr/>
+          <p:nvPr/>
+        </p:nvSpPr>
+        <p:spPr>
+          <a:xfrm>
+            <a:off x="4114800" y="2743200"/>
+            <a:ext cx="292608" cy="0"/>
+          </a:xfrm>
+          <a:prstGeom prst="line">
+            <a:avLst/>
+          </a:prstGeom>
+          <a:noFill/>
+          <a:ln w="25400">
+            <a:solidFill>
+              <a:srgbClr val="2B3A67"/>
+            </a:solidFill>
+            <a:prstDash val="solid"/>
+            <a:tailEnd type="triangle"/>
+          </a:ln>
+        </p:spPr>
+      </p:sp>
+      <p:sp>
+        <p:nvSpPr>
+          <p:cNvPr id="57" name="Shape 43"/>
+          <p:cNvSpPr/>
+          <p:nvPr/>
+        </p:nvSpPr>
+        <p:spPr>
+          <a:xfrm>
+            <a:off x="8138160" y="2743200"/>
+            <a:ext cx="292608" cy="0"/>
+          </a:xfrm>
+          <a:prstGeom prst="line">
+            <a:avLst/>
+          </a:prstGeom>
+          <a:noFill/>
+          <a:ln w="25400">
+            <a:solidFill>
+              <a:srgbClr val="2B3A67"/>
+            </a:solidFill>
+            <a:prstDash val="solid"/>
+            <a:tailEnd type="triangle"/>
+          </a:ln>
+        </p:spPr>
+      </p:sp>
+      <p:sp>
+        <p:nvSpPr>
           <p:cNvPr id="58" name="Shape 44"/>
           <p:cNvSpPr/>
           <p:nvPr/>
         </p:nvSpPr>
         <p:spPr>
           <a:xfrm>
-            <a:off x="8138160" y="5234940"/>
-            <a:ext cx="292608" cy="0"/>
-          </a:xfrm>
-          <a:prstGeom prst="line">
-            <a:avLst/>
-          </a:prstGeom>
-          <a:noFill/>
-          <a:ln w="25400">
-            <a:solidFill>
-              <a:srgbClr val="B3261E"/>
-            </a:solidFill>
-            <a:prstDash val="dash"/>
-            <a:tailEnd type="triangle"/>
-          </a:ln>
-        </p:spPr>
-      </p:sp>
-      <p:sp>
-        <p:nvSpPr>
-          <p:cNvPr id="59" name="Shape 45"/>
-          <p:cNvSpPr/>
-          <p:nvPr/>
-        </p:nvSpPr>
-        <p:spPr>
-          <a:xfrm>
-            <a:off x="8503920" y="4754880"/>
-            <a:ext cx="3246120" cy="960120"/>
+            <a:off x="457200" y="4892040"/>
+            <a:ext cx="7589520" cy="960120"/>
           </a:xfrm>
           <a:prstGeom prst="roundRect">
             <a:avLst>
@@ -12809,15 +12831,219 @@
           </a:ln>
         </p:spPr>
       </p:sp>
-      <p:sp>
-        <p:nvSpPr>
-          <p:cNvPr id="60" name="Text 46"/>
+      <p:pic>
+        <p:nvPicPr>
+          <p:cNvPr id="59" name="Image 12" descr="preencoded.png">    </p:cNvPr>
+          <p:cNvPicPr>
+            <a:picLocks noChangeAspect="1"/>
+          </p:cNvPicPr>
+          <p:nvPr/>
+        </p:nvPicPr>
+        <p:blipFill>
+          <a:blip r:embed="rId13"/>
+          <a:stretch>
+            <a:fillRect/>
+          </a:stretch>
+        </p:blipFill>
+        <p:spPr>
+          <a:xfrm>
+            <a:off x="685800" y="5239512"/>
+            <a:ext cx="256032" cy="256032"/>
+          </a:xfrm>
+          <a:prstGeom prst="rect">
+            <a:avLst/>
+          </a:prstGeom>
+        </p:spPr>
+      </p:pic>
+      <p:sp>
+        <p:nvSpPr>
+          <p:cNvPr id="60" name="Text 45"/>
           <p:cNvSpPr txBox="1"/>
           <p:nvPr/>
         </p:nvSpPr>
         <p:spPr>
           <a:xfrm>
-            <a:off x="8613648" y="4754880"/>
+            <a:off x="1033272" y="5166360"/>
+            <a:ext cx="2011680" cy="411480"/>
+          </a:xfrm>
+          <a:prstGeom prst="rect">
+            <a:avLst/>
+          </a:prstGeom>
+          <a:noFill/>
+          <a:ln/>
+        </p:spPr>
+        <p:txBody>
+          <a:bodyPr wrap="square" lIns="0" tIns="0" rIns="0" bIns="0" rtlCol="0" anchor="ctr"/>
+          <a:lstStyle/>
+          <a:p>
+            <a:pPr indent="0" marL="0">
+              <a:buNone/>
+            </a:pPr>
+            <a:r>
+              <a:rPr lang="en-US" sz="1300" b="1" dirty="0">
+                <a:solidFill>
+                  <a:srgbClr val="B3261E"/>
+                </a:solidFill>
+                <a:latin typeface="Calibri" pitchFamily="34" charset="0"/>
+                <a:ea typeface="Calibri" pitchFamily="34" charset="-122"/>
+                <a:cs typeface="Calibri" pitchFamily="34" charset="-120"/>
+              </a:rPr>
+              <a:t>Emergency operations</a:t>
+            </a:r>
+            <a:endParaRPr lang="en-US" sz="1300" dirty="0"/>
+          </a:p>
+        </p:txBody>
+      </p:sp>
+      <p:sp>
+        <p:nvSpPr>
+          <p:cNvPr id="61" name="Shape 46"/>
+          <p:cNvSpPr/>
+          <p:nvPr/>
+        </p:nvSpPr>
+        <p:spPr>
+          <a:xfrm>
+            <a:off x="3154680" y="5129784"/>
+            <a:ext cx="4663440" cy="484632"/>
+          </a:xfrm>
+          <a:prstGeom prst="roundRect">
+            <a:avLst>
+              <a:gd name="adj" fmla="val 15094"/>
+            </a:avLst>
+          </a:prstGeom>
+          <a:solidFill>
+            <a:srgbClr val="FFFFFF"/>
+          </a:solidFill>
+          <a:ln w="15875">
+            <a:solidFill>
+              <a:srgbClr val="F0C3C3"/>
+            </a:solidFill>
+            <a:prstDash val="solid"/>
+          </a:ln>
+        </p:spPr>
+      </p:sp>
+      <p:pic>
+        <p:nvPicPr>
+          <p:cNvPr id="62" name="Image 13" descr="preencoded.png">    </p:cNvPr>
+          <p:cNvPicPr>
+            <a:picLocks noChangeAspect="1"/>
+          </p:cNvPicPr>
+          <p:nvPr/>
+        </p:nvPicPr>
+        <p:blipFill>
+          <a:blip r:embed="rId14"/>
+          <a:stretch>
+            <a:fillRect/>
+          </a:stretch>
+        </p:blipFill>
+        <p:spPr>
+          <a:xfrm>
+            <a:off x="3310128" y="5257800"/>
+            <a:ext cx="219456" cy="219456"/>
+          </a:xfrm>
+          <a:prstGeom prst="rect">
+            <a:avLst/>
+          </a:prstGeom>
+        </p:spPr>
+      </p:pic>
+      <p:sp>
+        <p:nvSpPr>
+          <p:cNvPr id="63" name="Text 47"/>
+          <p:cNvSpPr txBox="1"/>
+          <p:nvPr/>
+        </p:nvSpPr>
+        <p:spPr>
+          <a:xfrm>
+            <a:off x="3566160" y="5129784"/>
+            <a:ext cx="4069080" cy="484632"/>
+          </a:xfrm>
+          <a:prstGeom prst="rect">
+            <a:avLst/>
+          </a:prstGeom>
+          <a:noFill/>
+          <a:ln/>
+        </p:spPr>
+        <p:txBody>
+          <a:bodyPr wrap="square" lIns="0" tIns="0" rIns="0" bIns="0" rtlCol="0" anchor="ctr"/>
+          <a:lstStyle/>
+          <a:p>
+            <a:pPr algn="ctr" indent="0" marL="0">
+              <a:buNone/>
+            </a:pPr>
+            <a:r>
+              <a:rPr lang="en-US" sz="1150" b="1" dirty="0">
+                <a:solidFill>
+                  <a:srgbClr val="1F2937"/>
+                </a:solidFill>
+                <a:latin typeface="Calibri" pitchFamily="34" charset="0"/>
+                <a:ea typeface="Calibri" pitchFamily="34" charset="-122"/>
+                <a:cs typeface="Calibri" pitchFamily="34" charset="-120"/>
+              </a:rPr>
+              <a:t>Automated kill switch API  /  SRE revocation</a:t>
+            </a:r>
+            <a:endParaRPr lang="en-US" sz="1150" dirty="0"/>
+          </a:p>
+        </p:txBody>
+      </p:sp>
+      <p:sp>
+        <p:nvSpPr>
+          <p:cNvPr id="64" name="Shape 48"/>
+          <p:cNvSpPr/>
+          <p:nvPr/>
+        </p:nvSpPr>
+        <p:spPr>
+          <a:xfrm>
+            <a:off x="8138160" y="5372100"/>
+            <a:ext cx="292608" cy="0"/>
+          </a:xfrm>
+          <a:prstGeom prst="line">
+            <a:avLst/>
+          </a:prstGeom>
+          <a:noFill/>
+          <a:ln w="25400">
+            <a:solidFill>
+              <a:srgbClr val="B3261E"/>
+            </a:solidFill>
+            <a:prstDash val="dash"/>
+            <a:tailEnd type="triangle"/>
+          </a:ln>
+        </p:spPr>
+      </p:sp>
+      <p:sp>
+        <p:nvSpPr>
+          <p:cNvPr id="65" name="Shape 49"/>
+          <p:cNvSpPr/>
+          <p:nvPr/>
+        </p:nvSpPr>
+        <p:spPr>
+          <a:xfrm>
+            <a:off x="8503920" y="4892040"/>
+            <a:ext cx="3246120" cy="960120"/>
+          </a:xfrm>
+          <a:prstGeom prst="roundRect">
+            <a:avLst>
+              <a:gd name="adj" fmla="val 9524"/>
+            </a:avLst>
+          </a:prstGeom>
+          <a:solidFill>
+            <a:srgbClr val="FDF1F1"/>
+          </a:solidFill>
+          <a:ln w="15875">
+            <a:solidFill>
+              <a:srgbClr val="F0C3C3"/>
+            </a:solidFill>
+            <a:prstDash val="solid"/>
+          </a:ln>
+        </p:spPr>
+      </p:sp>
+      <p:sp>
+        <p:nvSpPr>
+          <p:cNvPr id="66" name="Text 50"/>
+          <p:cNvSpPr txBox="1"/>
+          <p:nvPr/>
+        </p:nvSpPr>
+        <p:spPr>
+          <a:xfrm>
+            <a:off x="8613648" y="4892040"/>
             <a:ext cx="3026664" cy="960120"/>
           </a:xfrm>
           <a:prstGeom prst="rect">
@@ -12873,7 +13099,7 @@
       </p:sp>
       <p:sp>
         <p:nvSpPr>
-          <p:cNvPr id="61" name="Shape 47"/>
+          <p:cNvPr id="67" name="Shape 51"/>
           <p:cNvSpPr/>
           <p:nvPr/>
         </p:nvSpPr>
@@ -12900,7 +13126,7 @@
       </p:sp>
       <p:sp>
         <p:nvSpPr>
-          <p:cNvPr id="62" name="Text 48"/>
+          <p:cNvPr id="68" name="Text 52"/>
           <p:cNvSpPr txBox="1"/>
           <p:nvPr/>
         </p:nvSpPr>
